--- a/preview/secteur_Consumer_Defensive_S&P_500/secteur_Consumer_Defensive_S&P_500.pptx
+++ b/preview/secteur_Consumer_Defensive_S&P_500/secteur_Consumer_Defensive_S&P_500.pptx
@@ -11040,7 +11040,7 @@
                   <a:srgbClr val="FFFFFF"/>
                 </a:solidFill>
               </a:rPr>
-              <a:t>Zone d Entree Optimale</a:t>
+              <a:t>Zone d'Entree Optimale</a:t>
             </a:r>
           </a:p>
         </p:txBody>
@@ -13790,7 +13790,7 @@
                   <a:srgbClr val="FFFFFF"/>
                 </a:solidFill>
               </a:rPr>
-              <a:t>Risques &amp; Conditions d Invalidation</a:t>
+              <a:t>Risques &amp; Conditions d'Invalidation</a:t>
             </a:r>
           </a:p>
         </p:txBody>

--- a/preview/secteur_Consumer_Defensive_S&P_500/secteur_Consumer_Defensive_S&P_500.pptx
+++ b/preview/secteur_Consumer_Defensive_S&P_500/secteur_Consumer_Defensive_S&P_500.pptx
@@ -21243,8 +21243,8 @@
         </p:blipFill>
         <p:spPr>
           <a:xfrm>
-            <a:off x="540000" y="827999"/>
-            <a:ext cx="8063999" cy="3671999"/>
+            <a:off x="324000" y="827999"/>
+            <a:ext cx="5400000" cy="3671999"/>
           </a:xfrm>
           <a:prstGeom prst="rect">
             <a:avLst/>
@@ -21259,8 +21259,8 @@
         </p:nvSpPr>
         <p:spPr>
           <a:xfrm>
-            <a:off x="0" y="4950000"/>
-            <a:ext cx="9144000" cy="180000"/>
+            <a:off x="5903999" y="827999"/>
+            <a:ext cx="2916000" cy="3671999"/>
           </a:xfrm>
           <a:prstGeom prst="rect">
             <a:avLst/>
@@ -21296,7 +21296,904 @@
       </p:sp>
       <p:sp>
         <p:nvSpPr>
-          <p:cNvPr id="17" name="TextBox 16"/>
+          <p:cNvPr id="17" name="Rectangle 16"/>
+          <p:cNvSpPr/>
+          <p:nvPr/>
+        </p:nvSpPr>
+        <p:spPr>
+          <a:xfrm>
+            <a:off x="5903999" y="827999"/>
+            <a:ext cx="2916000" cy="234000"/>
+          </a:xfrm>
+          <a:prstGeom prst="rect">
+            <a:avLst/>
+          </a:prstGeom>
+          <a:solidFill>
+            <a:srgbClr val="1B3A6B"/>
+          </a:solidFill>
+          <a:ln>
+            <a:noFill/>
+          </a:ln>
+        </p:spPr>
+        <p:style>
+          <a:lnRef idx="1">
+            <a:schemeClr val="accent1"/>
+          </a:lnRef>
+          <a:fillRef idx="3">
+            <a:schemeClr val="accent1"/>
+          </a:fillRef>
+          <a:effectRef idx="2">
+            <a:schemeClr val="accent1"/>
+          </a:effectRef>
+          <a:fontRef idx="minor">
+            <a:schemeClr val="lt1"/>
+          </a:fontRef>
+        </p:style>
+        <p:txBody>
+          <a:bodyPr rtlCol="0" anchor="ctr"/>
+          <a:lstStyle/>
+          <a:p>
+            <a:pPr algn="ctr"/>
+          </a:p>
+        </p:txBody>
+      </p:sp>
+      <p:sp>
+        <p:nvSpPr>
+          <p:cNvPr id="18" name="TextBox 17"/>
+          <p:cNvSpPr txBox="1"/>
+          <p:nvPr/>
+        </p:nvSpPr>
+        <p:spPr>
+          <a:xfrm>
+            <a:off x="5976000" y="846000"/>
+            <a:ext cx="2808000" cy="198000"/>
+          </a:xfrm>
+          <a:prstGeom prst="rect">
+            <a:avLst/>
+          </a:prstGeom>
+          <a:noFill/>
+        </p:spPr>
+        <p:txBody>
+          <a:bodyPr wrap="square">
+            <a:spAutoFit/>
+          </a:bodyPr>
+          <a:lstStyle/>
+          <a:p>
+            <a:pPr algn="l"/>
+            <a:r>
+              <a:rPr sz="800" b="1" i="0">
+                <a:solidFill>
+                  <a:srgbClr val="FFFFFF"/>
+                </a:solidFill>
+              </a:rPr>
+              <a:t>LEGENDE — SOCIETES</a:t>
+            </a:r>
+          </a:p>
+        </p:txBody>
+      </p:sp>
+      <p:sp>
+        <p:nvSpPr>
+          <p:cNvPr id="19" name="Rectangle 18"/>
+          <p:cNvSpPr/>
+          <p:nvPr/>
+        </p:nvSpPr>
+        <p:spPr>
+          <a:xfrm>
+            <a:off x="5940000" y="1188000"/>
+            <a:ext cx="180000" cy="125999"/>
+          </a:xfrm>
+          <a:prstGeom prst="rect">
+            <a:avLst/>
+          </a:prstGeom>
+          <a:solidFill>
+            <a:srgbClr val="1B3A6B"/>
+          </a:solidFill>
+          <a:ln>
+            <a:noFill/>
+          </a:ln>
+        </p:spPr>
+        <p:style>
+          <a:lnRef idx="1">
+            <a:schemeClr val="accent1"/>
+          </a:lnRef>
+          <a:fillRef idx="3">
+            <a:schemeClr val="accent1"/>
+          </a:fillRef>
+          <a:effectRef idx="2">
+            <a:schemeClr val="accent1"/>
+          </a:effectRef>
+          <a:fontRef idx="minor">
+            <a:schemeClr val="lt1"/>
+          </a:fontRef>
+        </p:style>
+        <p:txBody>
+          <a:bodyPr rtlCol="0" anchor="ctr"/>
+          <a:lstStyle/>
+          <a:p>
+            <a:pPr algn="ctr"/>
+          </a:p>
+        </p:txBody>
+      </p:sp>
+      <p:sp>
+        <p:nvSpPr>
+          <p:cNvPr id="20" name="TextBox 19"/>
+          <p:cNvSpPr txBox="1"/>
+          <p:nvPr/>
+        </p:nvSpPr>
+        <p:spPr>
+          <a:xfrm>
+            <a:off x="6192000" y="1134000"/>
+            <a:ext cx="2556000" cy="198000"/>
+          </a:xfrm>
+          <a:prstGeom prst="rect">
+            <a:avLst/>
+          </a:prstGeom>
+          <a:noFill/>
+        </p:spPr>
+        <p:txBody>
+          <a:bodyPr wrap="square">
+            <a:spAutoFit/>
+          </a:bodyPr>
+          <a:lstStyle/>
+          <a:p>
+            <a:pPr algn="l"/>
+            <a:r>
+              <a:rPr sz="750" b="1" i="0">
+                <a:solidFill>
+                  <a:srgbClr val="1B3A6B"/>
+                </a:solidFill>
+              </a:rPr>
+              <a:t>CON1  —  Consumer Defensive Corp 1</a:t>
+            </a:r>
+          </a:p>
+        </p:txBody>
+      </p:sp>
+      <p:sp>
+        <p:nvSpPr>
+          <p:cNvPr id="21" name="TextBox 20"/>
+          <p:cNvSpPr txBox="1"/>
+          <p:nvPr/>
+        </p:nvSpPr>
+        <p:spPr>
+          <a:xfrm>
+            <a:off x="6192000" y="1332000"/>
+            <a:ext cx="2556000" cy="198000"/>
+          </a:xfrm>
+          <a:prstGeom prst="rect">
+            <a:avLst/>
+          </a:prstGeom>
+          <a:noFill/>
+        </p:spPr>
+        <p:txBody>
+          <a:bodyPr wrap="square">
+            <a:spAutoFit/>
+          </a:bodyPr>
+          <a:lstStyle/>
+          <a:p>
+            <a:pPr algn="l"/>
+            <a:r>
+              <a:rPr sz="700" b="0" i="0">
+                <a:solidFill>
+                  <a:srgbClr val="555555"/>
+                </a:solidFill>
+              </a:rPr>
+              <a:t>Score 48/100  ·  SELL</a:t>
+            </a:r>
+          </a:p>
+        </p:txBody>
+      </p:sp>
+      <p:sp>
+        <p:nvSpPr>
+          <p:cNvPr id="22" name="Rectangle 21"/>
+          <p:cNvSpPr/>
+          <p:nvPr/>
+        </p:nvSpPr>
+        <p:spPr>
+          <a:xfrm>
+            <a:off x="5940000" y="1638000"/>
+            <a:ext cx="180000" cy="125999"/>
+          </a:xfrm>
+          <a:prstGeom prst="rect">
+            <a:avLst/>
+          </a:prstGeom>
+          <a:solidFill>
+            <a:srgbClr val="1A7A4A"/>
+          </a:solidFill>
+          <a:ln>
+            <a:noFill/>
+          </a:ln>
+        </p:spPr>
+        <p:style>
+          <a:lnRef idx="1">
+            <a:schemeClr val="accent1"/>
+          </a:lnRef>
+          <a:fillRef idx="3">
+            <a:schemeClr val="accent1"/>
+          </a:fillRef>
+          <a:effectRef idx="2">
+            <a:schemeClr val="accent1"/>
+          </a:effectRef>
+          <a:fontRef idx="minor">
+            <a:schemeClr val="lt1"/>
+          </a:fontRef>
+        </p:style>
+        <p:txBody>
+          <a:bodyPr rtlCol="0" anchor="ctr"/>
+          <a:lstStyle/>
+          <a:p>
+            <a:pPr algn="ctr"/>
+          </a:p>
+        </p:txBody>
+      </p:sp>
+      <p:sp>
+        <p:nvSpPr>
+          <p:cNvPr id="23" name="TextBox 22"/>
+          <p:cNvSpPr txBox="1"/>
+          <p:nvPr/>
+        </p:nvSpPr>
+        <p:spPr>
+          <a:xfrm>
+            <a:off x="6192000" y="1584000"/>
+            <a:ext cx="2556000" cy="198000"/>
+          </a:xfrm>
+          <a:prstGeom prst="rect">
+            <a:avLst/>
+          </a:prstGeom>
+          <a:noFill/>
+        </p:spPr>
+        <p:txBody>
+          <a:bodyPr wrap="square">
+            <a:spAutoFit/>
+          </a:bodyPr>
+          <a:lstStyle/>
+          <a:p>
+            <a:pPr algn="l"/>
+            <a:r>
+              <a:rPr sz="750" b="1" i="0">
+                <a:solidFill>
+                  <a:srgbClr val="1B3A6B"/>
+                </a:solidFill>
+              </a:rPr>
+              <a:t>CON2  —  Consumer Defensive Corp 2</a:t>
+            </a:r>
+          </a:p>
+        </p:txBody>
+      </p:sp>
+      <p:sp>
+        <p:nvSpPr>
+          <p:cNvPr id="24" name="TextBox 23"/>
+          <p:cNvSpPr txBox="1"/>
+          <p:nvPr/>
+        </p:nvSpPr>
+        <p:spPr>
+          <a:xfrm>
+            <a:off x="6192000" y="1782000"/>
+            <a:ext cx="2556000" cy="198000"/>
+          </a:xfrm>
+          <a:prstGeom prst="rect">
+            <a:avLst/>
+          </a:prstGeom>
+          <a:noFill/>
+        </p:spPr>
+        <p:txBody>
+          <a:bodyPr wrap="square">
+            <a:spAutoFit/>
+          </a:bodyPr>
+          <a:lstStyle/>
+          <a:p>
+            <a:pPr algn="l"/>
+            <a:r>
+              <a:rPr sz="700" b="0" i="0">
+                <a:solidFill>
+                  <a:srgbClr val="555555"/>
+                </a:solidFill>
+              </a:rPr>
+              <a:t>Score 52/100  ·  HOLD</a:t>
+            </a:r>
+          </a:p>
+        </p:txBody>
+      </p:sp>
+      <p:sp>
+        <p:nvSpPr>
+          <p:cNvPr id="25" name="Rectangle 24"/>
+          <p:cNvSpPr/>
+          <p:nvPr/>
+        </p:nvSpPr>
+        <p:spPr>
+          <a:xfrm>
+            <a:off x="5940000" y="2088000"/>
+            <a:ext cx="180000" cy="125999"/>
+          </a:xfrm>
+          <a:prstGeom prst="rect">
+            <a:avLst/>
+          </a:prstGeom>
+          <a:solidFill>
+            <a:srgbClr val="A82020"/>
+          </a:solidFill>
+          <a:ln>
+            <a:noFill/>
+          </a:ln>
+        </p:spPr>
+        <p:style>
+          <a:lnRef idx="1">
+            <a:schemeClr val="accent1"/>
+          </a:lnRef>
+          <a:fillRef idx="3">
+            <a:schemeClr val="accent1"/>
+          </a:fillRef>
+          <a:effectRef idx="2">
+            <a:schemeClr val="accent1"/>
+          </a:effectRef>
+          <a:fontRef idx="minor">
+            <a:schemeClr val="lt1"/>
+          </a:fontRef>
+        </p:style>
+        <p:txBody>
+          <a:bodyPr rtlCol="0" anchor="ctr"/>
+          <a:lstStyle/>
+          <a:p>
+            <a:pPr algn="ctr"/>
+          </a:p>
+        </p:txBody>
+      </p:sp>
+      <p:sp>
+        <p:nvSpPr>
+          <p:cNvPr id="26" name="TextBox 25"/>
+          <p:cNvSpPr txBox="1"/>
+          <p:nvPr/>
+        </p:nvSpPr>
+        <p:spPr>
+          <a:xfrm>
+            <a:off x="6192000" y="2034000"/>
+            <a:ext cx="2556000" cy="198000"/>
+          </a:xfrm>
+          <a:prstGeom prst="rect">
+            <a:avLst/>
+          </a:prstGeom>
+          <a:noFill/>
+        </p:spPr>
+        <p:txBody>
+          <a:bodyPr wrap="square">
+            <a:spAutoFit/>
+          </a:bodyPr>
+          <a:lstStyle/>
+          <a:p>
+            <a:pPr algn="l"/>
+            <a:r>
+              <a:rPr sz="750" b="1" i="0">
+                <a:solidFill>
+                  <a:srgbClr val="1B3A6B"/>
+                </a:solidFill>
+              </a:rPr>
+              <a:t>CON3  —  Consumer Defensive Corp 3</a:t>
+            </a:r>
+          </a:p>
+        </p:txBody>
+      </p:sp>
+      <p:sp>
+        <p:nvSpPr>
+          <p:cNvPr id="27" name="TextBox 26"/>
+          <p:cNvSpPr txBox="1"/>
+          <p:nvPr/>
+        </p:nvSpPr>
+        <p:spPr>
+          <a:xfrm>
+            <a:off x="6192000" y="2232000"/>
+            <a:ext cx="2556000" cy="198000"/>
+          </a:xfrm>
+          <a:prstGeom prst="rect">
+            <a:avLst/>
+          </a:prstGeom>
+          <a:noFill/>
+        </p:spPr>
+        <p:txBody>
+          <a:bodyPr wrap="square">
+            <a:spAutoFit/>
+          </a:bodyPr>
+          <a:lstStyle/>
+          <a:p>
+            <a:pPr algn="l"/>
+            <a:r>
+              <a:rPr sz="700" b="0" i="0">
+                <a:solidFill>
+                  <a:srgbClr val="555555"/>
+                </a:solidFill>
+              </a:rPr>
+              <a:t>Score 56/100  ·  HOLD</a:t>
+            </a:r>
+          </a:p>
+        </p:txBody>
+      </p:sp>
+      <p:sp>
+        <p:nvSpPr>
+          <p:cNvPr id="28" name="Rectangle 27"/>
+          <p:cNvSpPr/>
+          <p:nvPr/>
+        </p:nvSpPr>
+        <p:spPr>
+          <a:xfrm>
+            <a:off x="5940000" y="2538000"/>
+            <a:ext cx="180000" cy="125999"/>
+          </a:xfrm>
+          <a:prstGeom prst="rect">
+            <a:avLst/>
+          </a:prstGeom>
+          <a:solidFill>
+            <a:srgbClr val="B06000"/>
+          </a:solidFill>
+          <a:ln>
+            <a:noFill/>
+          </a:ln>
+        </p:spPr>
+        <p:style>
+          <a:lnRef idx="1">
+            <a:schemeClr val="accent1"/>
+          </a:lnRef>
+          <a:fillRef idx="3">
+            <a:schemeClr val="accent1"/>
+          </a:fillRef>
+          <a:effectRef idx="2">
+            <a:schemeClr val="accent1"/>
+          </a:effectRef>
+          <a:fontRef idx="minor">
+            <a:schemeClr val="lt1"/>
+          </a:fontRef>
+        </p:style>
+        <p:txBody>
+          <a:bodyPr rtlCol="0" anchor="ctr"/>
+          <a:lstStyle/>
+          <a:p>
+            <a:pPr algn="ctr"/>
+          </a:p>
+        </p:txBody>
+      </p:sp>
+      <p:sp>
+        <p:nvSpPr>
+          <p:cNvPr id="29" name="TextBox 28"/>
+          <p:cNvSpPr txBox="1"/>
+          <p:nvPr/>
+        </p:nvSpPr>
+        <p:spPr>
+          <a:xfrm>
+            <a:off x="6192000" y="2484000"/>
+            <a:ext cx="2556000" cy="198000"/>
+          </a:xfrm>
+          <a:prstGeom prst="rect">
+            <a:avLst/>
+          </a:prstGeom>
+          <a:noFill/>
+        </p:spPr>
+        <p:txBody>
+          <a:bodyPr wrap="square">
+            <a:spAutoFit/>
+          </a:bodyPr>
+          <a:lstStyle/>
+          <a:p>
+            <a:pPr algn="l"/>
+            <a:r>
+              <a:rPr sz="750" b="1" i="0">
+                <a:solidFill>
+                  <a:srgbClr val="1B3A6B"/>
+                </a:solidFill>
+              </a:rPr>
+              <a:t>CON4  —  Consumer Defensive Corp 4</a:t>
+            </a:r>
+          </a:p>
+        </p:txBody>
+      </p:sp>
+      <p:sp>
+        <p:nvSpPr>
+          <p:cNvPr id="30" name="TextBox 29"/>
+          <p:cNvSpPr txBox="1"/>
+          <p:nvPr/>
+        </p:nvSpPr>
+        <p:spPr>
+          <a:xfrm>
+            <a:off x="6192000" y="2682000"/>
+            <a:ext cx="2556000" cy="198000"/>
+          </a:xfrm>
+          <a:prstGeom prst="rect">
+            <a:avLst/>
+          </a:prstGeom>
+          <a:noFill/>
+        </p:spPr>
+        <p:txBody>
+          <a:bodyPr wrap="square">
+            <a:spAutoFit/>
+          </a:bodyPr>
+          <a:lstStyle/>
+          <a:p>
+            <a:pPr algn="l"/>
+            <a:r>
+              <a:rPr sz="700" b="0" i="0">
+                <a:solidFill>
+                  <a:srgbClr val="555555"/>
+                </a:solidFill>
+              </a:rPr>
+              <a:t>Score 60/100  ·  HOLD</a:t>
+            </a:r>
+          </a:p>
+        </p:txBody>
+      </p:sp>
+      <p:sp>
+        <p:nvSpPr>
+          <p:cNvPr id="31" name="Rectangle 30"/>
+          <p:cNvSpPr/>
+          <p:nvPr/>
+        </p:nvSpPr>
+        <p:spPr>
+          <a:xfrm>
+            <a:off x="5940000" y="2988000"/>
+            <a:ext cx="180000" cy="125999"/>
+          </a:xfrm>
+          <a:prstGeom prst="rect">
+            <a:avLst/>
+          </a:prstGeom>
+          <a:solidFill>
+            <a:srgbClr val="2A5298"/>
+          </a:solidFill>
+          <a:ln>
+            <a:noFill/>
+          </a:ln>
+        </p:spPr>
+        <p:style>
+          <a:lnRef idx="1">
+            <a:schemeClr val="accent1"/>
+          </a:lnRef>
+          <a:fillRef idx="3">
+            <a:schemeClr val="accent1"/>
+          </a:fillRef>
+          <a:effectRef idx="2">
+            <a:schemeClr val="accent1"/>
+          </a:effectRef>
+          <a:fontRef idx="minor">
+            <a:schemeClr val="lt1"/>
+          </a:fontRef>
+        </p:style>
+        <p:txBody>
+          <a:bodyPr rtlCol="0" anchor="ctr"/>
+          <a:lstStyle/>
+          <a:p>
+            <a:pPr algn="ctr"/>
+          </a:p>
+        </p:txBody>
+      </p:sp>
+      <p:sp>
+        <p:nvSpPr>
+          <p:cNvPr id="32" name="TextBox 31"/>
+          <p:cNvSpPr txBox="1"/>
+          <p:nvPr/>
+        </p:nvSpPr>
+        <p:spPr>
+          <a:xfrm>
+            <a:off x="6192000" y="2934000"/>
+            <a:ext cx="2556000" cy="198000"/>
+          </a:xfrm>
+          <a:prstGeom prst="rect">
+            <a:avLst/>
+          </a:prstGeom>
+          <a:noFill/>
+        </p:spPr>
+        <p:txBody>
+          <a:bodyPr wrap="square">
+            <a:spAutoFit/>
+          </a:bodyPr>
+          <a:lstStyle/>
+          <a:p>
+            <a:pPr algn="l"/>
+            <a:r>
+              <a:rPr sz="750" b="1" i="0">
+                <a:solidFill>
+                  <a:srgbClr val="1B3A6B"/>
+                </a:solidFill>
+              </a:rPr>
+              <a:t>CON5  —  Consumer Defensive Corp 5</a:t>
+            </a:r>
+          </a:p>
+        </p:txBody>
+      </p:sp>
+      <p:sp>
+        <p:nvSpPr>
+          <p:cNvPr id="33" name="TextBox 32"/>
+          <p:cNvSpPr txBox="1"/>
+          <p:nvPr/>
+        </p:nvSpPr>
+        <p:spPr>
+          <a:xfrm>
+            <a:off x="6192000" y="3132000"/>
+            <a:ext cx="2556000" cy="198000"/>
+          </a:xfrm>
+          <a:prstGeom prst="rect">
+            <a:avLst/>
+          </a:prstGeom>
+          <a:noFill/>
+        </p:spPr>
+        <p:txBody>
+          <a:bodyPr wrap="square">
+            <a:spAutoFit/>
+          </a:bodyPr>
+          <a:lstStyle/>
+          <a:p>
+            <a:pPr algn="l"/>
+            <a:r>
+              <a:rPr sz="700" b="0" i="0">
+                <a:solidFill>
+                  <a:srgbClr val="555555"/>
+                </a:solidFill>
+              </a:rPr>
+              <a:t>Score 64/100  ·  HOLD</a:t>
+            </a:r>
+          </a:p>
+        </p:txBody>
+      </p:sp>
+      <p:sp>
+        <p:nvSpPr>
+          <p:cNvPr id="34" name="Rectangle 33"/>
+          <p:cNvSpPr/>
+          <p:nvPr/>
+        </p:nvSpPr>
+        <p:spPr>
+          <a:xfrm>
+            <a:off x="5940000" y="3438000"/>
+            <a:ext cx="180000" cy="125999"/>
+          </a:xfrm>
+          <a:prstGeom prst="rect">
+            <a:avLst/>
+          </a:prstGeom>
+          <a:solidFill>
+            <a:srgbClr val="6B3A1B"/>
+          </a:solidFill>
+          <a:ln>
+            <a:noFill/>
+          </a:ln>
+        </p:spPr>
+        <p:style>
+          <a:lnRef idx="1">
+            <a:schemeClr val="accent1"/>
+          </a:lnRef>
+          <a:fillRef idx="3">
+            <a:schemeClr val="accent1"/>
+          </a:fillRef>
+          <a:effectRef idx="2">
+            <a:schemeClr val="accent1"/>
+          </a:effectRef>
+          <a:fontRef idx="minor">
+            <a:schemeClr val="lt1"/>
+          </a:fontRef>
+        </p:style>
+        <p:txBody>
+          <a:bodyPr rtlCol="0" anchor="ctr"/>
+          <a:lstStyle/>
+          <a:p>
+            <a:pPr algn="ctr"/>
+          </a:p>
+        </p:txBody>
+      </p:sp>
+      <p:sp>
+        <p:nvSpPr>
+          <p:cNvPr id="35" name="TextBox 34"/>
+          <p:cNvSpPr txBox="1"/>
+          <p:nvPr/>
+        </p:nvSpPr>
+        <p:spPr>
+          <a:xfrm>
+            <a:off x="6192000" y="3384000"/>
+            <a:ext cx="2556000" cy="198000"/>
+          </a:xfrm>
+          <a:prstGeom prst="rect">
+            <a:avLst/>
+          </a:prstGeom>
+          <a:noFill/>
+        </p:spPr>
+        <p:txBody>
+          <a:bodyPr wrap="square">
+            <a:spAutoFit/>
+          </a:bodyPr>
+          <a:lstStyle/>
+          <a:p>
+            <a:pPr algn="l"/>
+            <a:r>
+              <a:rPr sz="750" b="1" i="0">
+                <a:solidFill>
+                  <a:srgbClr val="1B3A6B"/>
+                </a:solidFill>
+              </a:rPr>
+              <a:t>CON6  —  Consumer Defensive Corp 6</a:t>
+            </a:r>
+          </a:p>
+        </p:txBody>
+      </p:sp>
+      <p:sp>
+        <p:nvSpPr>
+          <p:cNvPr id="36" name="TextBox 35"/>
+          <p:cNvSpPr txBox="1"/>
+          <p:nvPr/>
+        </p:nvSpPr>
+        <p:spPr>
+          <a:xfrm>
+            <a:off x="6192000" y="3582000"/>
+            <a:ext cx="2556000" cy="198000"/>
+          </a:xfrm>
+          <a:prstGeom prst="rect">
+            <a:avLst/>
+          </a:prstGeom>
+          <a:noFill/>
+        </p:spPr>
+        <p:txBody>
+          <a:bodyPr wrap="square">
+            <a:spAutoFit/>
+          </a:bodyPr>
+          <a:lstStyle/>
+          <a:p>
+            <a:pPr algn="l"/>
+            <a:r>
+              <a:rPr sz="700" b="0" i="0">
+                <a:solidFill>
+                  <a:srgbClr val="555555"/>
+                </a:solidFill>
+              </a:rPr>
+              <a:t>Score 68/100  ·  HOLD</a:t>
+            </a:r>
+          </a:p>
+        </p:txBody>
+      </p:sp>
+      <p:sp>
+        <p:nvSpPr>
+          <p:cNvPr id="37" name="Rectangle 36"/>
+          <p:cNvSpPr/>
+          <p:nvPr/>
+        </p:nvSpPr>
+        <p:spPr>
+          <a:xfrm>
+            <a:off x="5903999" y="4068000"/>
+            <a:ext cx="2916000" cy="18000"/>
+          </a:xfrm>
+          <a:prstGeom prst="rect">
+            <a:avLst/>
+          </a:prstGeom>
+          <a:solidFill>
+            <a:srgbClr val="AAAAAA"/>
+          </a:solidFill>
+          <a:ln>
+            <a:noFill/>
+          </a:ln>
+        </p:spPr>
+        <p:style>
+          <a:lnRef idx="1">
+            <a:schemeClr val="accent1"/>
+          </a:lnRef>
+          <a:fillRef idx="3">
+            <a:schemeClr val="accent1"/>
+          </a:fillRef>
+          <a:effectRef idx="2">
+            <a:schemeClr val="accent1"/>
+          </a:effectRef>
+          <a:fontRef idx="minor">
+            <a:schemeClr val="lt1"/>
+          </a:fontRef>
+        </p:style>
+        <p:txBody>
+          <a:bodyPr rtlCol="0" anchor="ctr"/>
+          <a:lstStyle/>
+          <a:p>
+            <a:pPr algn="ctr"/>
+          </a:p>
+        </p:txBody>
+      </p:sp>
+      <p:sp>
+        <p:nvSpPr>
+          <p:cNvPr id="38" name="TextBox 37"/>
+          <p:cNvSpPr txBox="1"/>
+          <p:nvPr/>
+        </p:nvSpPr>
+        <p:spPr>
+          <a:xfrm>
+            <a:off x="5976000" y="4104000"/>
+            <a:ext cx="2808000" cy="180000"/>
+          </a:xfrm>
+          <a:prstGeom prst="rect">
+            <a:avLst/>
+          </a:prstGeom>
+          <a:noFill/>
+        </p:spPr>
+        <p:txBody>
+          <a:bodyPr wrap="square">
+            <a:spAutoFit/>
+          </a:bodyPr>
+          <a:lstStyle/>
+          <a:p>
+            <a:pPr algn="l"/>
+            <a:r>
+              <a:rPr sz="750" b="1" i="0">
+                <a:solidFill>
+                  <a:srgbClr val="1B3A6B"/>
+                </a:solidFill>
+              </a:rPr>
+              <a:t>LECTURE ANALYTIQUE</a:t>
+            </a:r>
+          </a:p>
+        </p:txBody>
+      </p:sp>
+      <p:sp>
+        <p:nvSpPr>
+          <p:cNvPr id="39" name="TextBox 38"/>
+          <p:cNvSpPr txBox="1"/>
+          <p:nvPr/>
+        </p:nvSpPr>
+        <p:spPr>
+          <a:xfrm>
+            <a:off x="5976000" y="4302000"/>
+            <a:ext cx="2808000" cy="216000"/>
+          </a:xfrm>
+          <a:prstGeom prst="rect">
+            <a:avLst/>
+          </a:prstGeom>
+          <a:noFill/>
+        </p:spPr>
+        <p:txBody>
+          <a:bodyPr wrap="square">
+            <a:spAutoFit/>
+          </a:bodyPr>
+          <a:lstStyle/>
+          <a:p>
+            <a:pPr algn="l"/>
+            <a:r>
+              <a:rPr sz="700" b="0" i="0">
+                <a:solidFill>
+                  <a:srgbClr val="555555"/>
+                </a:solidFill>
+              </a:rPr>
+              <a:t>Sur 52 semaines, CON6 affiche la meilleure performance (+20%) tandis que CON1 est en retard (+5%). La dispersion des trajectoires illustre la bifurcation sectorielle. Le momentum 52W est integre dans le score FinSight comme signal de confirmation.</a:t>
+            </a:r>
+          </a:p>
+        </p:txBody>
+      </p:sp>
+      <p:sp>
+        <p:nvSpPr>
+          <p:cNvPr id="40" name="Rectangle 39"/>
+          <p:cNvSpPr/>
+          <p:nvPr/>
+        </p:nvSpPr>
+        <p:spPr>
+          <a:xfrm>
+            <a:off x="0" y="4950000"/>
+            <a:ext cx="9144000" cy="180000"/>
+          </a:xfrm>
+          <a:prstGeom prst="rect">
+            <a:avLst/>
+          </a:prstGeom>
+          <a:solidFill>
+            <a:srgbClr val="F5F7FA"/>
+          </a:solidFill>
+          <a:ln>
+            <a:noFill/>
+          </a:ln>
+        </p:spPr>
+        <p:style>
+          <a:lnRef idx="1">
+            <a:schemeClr val="accent1"/>
+          </a:lnRef>
+          <a:fillRef idx="3">
+            <a:schemeClr val="accent1"/>
+          </a:fillRef>
+          <a:effectRef idx="2">
+            <a:schemeClr val="accent1"/>
+          </a:effectRef>
+          <a:fontRef idx="minor">
+            <a:schemeClr val="lt1"/>
+          </a:fontRef>
+        </p:style>
+        <p:txBody>
+          <a:bodyPr rtlCol="0" anchor="ctr"/>
+          <a:lstStyle/>
+          <a:p>
+            <a:pPr algn="ctr"/>
+          </a:p>
+        </p:txBody>
+      </p:sp>
+      <p:sp>
+        <p:nvSpPr>
+          <p:cNvPr id="41" name="TextBox 40"/>
           <p:cNvSpPr txBox="1"/>
           <p:nvPr/>
         </p:nvSpPr>
@@ -23656,7 +24553,7 @@
         <p:spPr>
           <a:xfrm>
             <a:off x="468000" y="972000"/>
-            <a:ext cx="4716000" cy="3420000"/>
+            <a:ext cx="4716000" cy="1620000"/>
           </a:xfrm>
           <a:prstGeom prst="rect">
             <a:avLst/>
@@ -23671,19 +24568,429 @@
           <a:p>
             <a:pPr algn="l"/>
             <a:r>
-              <a:rPr sz="900" b="0" i="0">
+              <a:rPr sz="1200" b="0" i="0">
                 <a:solidFill>
                   <a:srgbClr val="555555"/>
                 </a:solidFill>
               </a:rPr>
               <a:t>Le secteur Consommation Defensive regroupe les producteurs et distributeurs de biens essentiels — alimentation, boissons, hygiene-beaute. Modèle résilient par nature, il offre une protection en periode de recession tout en beneficiant du pricing power des marques leaders.</a:t>
+            </a:r>
+          </a:p>
+        </p:txBody>
+      </p:sp>
+      <p:sp>
+        <p:nvSpPr>
+          <p:cNvPr id="18" name="Rectangle 17"/>
+          <p:cNvSpPr/>
+          <p:nvPr/>
+        </p:nvSpPr>
+        <p:spPr>
+          <a:xfrm>
+            <a:off x="468000" y="2700000"/>
+            <a:ext cx="4680000" cy="162000"/>
+          </a:xfrm>
+          <a:prstGeom prst="rect">
+            <a:avLst/>
+          </a:prstGeom>
+          <a:solidFill>
+            <a:srgbClr val="1B3A6B"/>
+          </a:solidFill>
+          <a:ln>
+            <a:noFill/>
+          </a:ln>
+        </p:spPr>
+        <p:style>
+          <a:lnRef idx="1">
+            <a:schemeClr val="accent1"/>
+          </a:lnRef>
+          <a:fillRef idx="3">
+            <a:schemeClr val="accent1"/>
+          </a:fillRef>
+          <a:effectRef idx="2">
+            <a:schemeClr val="accent1"/>
+          </a:effectRef>
+          <a:fontRef idx="minor">
+            <a:schemeClr val="lt1"/>
+          </a:fontRef>
+        </p:style>
+        <p:txBody>
+          <a:bodyPr rtlCol="0" anchor="ctr"/>
+          <a:lstStyle/>
+          <a:p>
+            <a:pPr algn="ctr"/>
+          </a:p>
+        </p:txBody>
+      </p:sp>
+      <p:sp>
+        <p:nvSpPr>
+          <p:cNvPr id="19" name="TextBox 18"/>
+          <p:cNvSpPr txBox="1"/>
+          <p:nvPr/>
+        </p:nvSpPr>
+        <p:spPr>
+          <a:xfrm>
+            <a:off x="540000" y="2718000"/>
+            <a:ext cx="4500000" cy="144000"/>
+          </a:xfrm>
+          <a:prstGeom prst="rect">
+            <a:avLst/>
+          </a:prstGeom>
+          <a:noFill/>
+        </p:spPr>
+        <p:txBody>
+          <a:bodyPr wrap="square">
+            <a:spAutoFit/>
+          </a:bodyPr>
+          <a:lstStyle/>
+          <a:p>
+            <a:pPr algn="l"/>
+            <a:r>
+              <a:rPr sz="750" b="1" i="0">
+                <a:solidFill>
+                  <a:srgbClr val="FFFFFF"/>
+                </a:solidFill>
+              </a:rPr>
+              <a:t>CATALYSEURS CLES</a:t>
+            </a:r>
+          </a:p>
+        </p:txBody>
+      </p:sp>
+      <p:sp>
+        <p:nvSpPr>
+          <p:cNvPr id="20" name="Rectangle 19"/>
+          <p:cNvSpPr/>
+          <p:nvPr/>
+        </p:nvSpPr>
+        <p:spPr>
+          <a:xfrm>
+            <a:off x="468000" y="2898000"/>
+            <a:ext cx="28800" cy="432000"/>
+          </a:xfrm>
+          <a:prstGeom prst="rect">
+            <a:avLst/>
+          </a:prstGeom>
+          <a:solidFill>
+            <a:srgbClr val="1A7A4A"/>
+          </a:solidFill>
+          <a:ln>
+            <a:noFill/>
+          </a:ln>
+        </p:spPr>
+        <p:style>
+          <a:lnRef idx="1">
+            <a:schemeClr val="accent1"/>
+          </a:lnRef>
+          <a:fillRef idx="3">
+            <a:schemeClr val="accent1"/>
+          </a:fillRef>
+          <a:effectRef idx="2">
+            <a:schemeClr val="accent1"/>
+          </a:effectRef>
+          <a:fontRef idx="minor">
+            <a:schemeClr val="lt1"/>
+          </a:fontRef>
+        </p:style>
+        <p:txBody>
+          <a:bodyPr rtlCol="0" anchor="ctr"/>
+          <a:lstStyle/>
+          <a:p>
+            <a:pPr algn="ctr"/>
+          </a:p>
+        </p:txBody>
+      </p:sp>
+      <p:sp>
+        <p:nvSpPr>
+          <p:cNvPr id="21" name="TextBox 20"/>
+          <p:cNvSpPr txBox="1"/>
+          <p:nvPr/>
+        </p:nvSpPr>
+        <p:spPr>
+          <a:xfrm>
+            <a:off x="576000" y="2898000"/>
+            <a:ext cx="4428000" cy="162000"/>
+          </a:xfrm>
+          <a:prstGeom prst="rect">
+            <a:avLst/>
+          </a:prstGeom>
+          <a:noFill/>
+        </p:spPr>
+        <p:txBody>
+          <a:bodyPr wrap="square">
+            <a:spAutoFit/>
+          </a:bodyPr>
+          <a:lstStyle/>
+          <a:p>
+            <a:pPr algn="l"/>
+            <a:r>
+              <a:rPr sz="800" b="1" i="0">
+                <a:solidFill>
+                  <a:srgbClr val="1B3A6B"/>
+                </a:solidFill>
+              </a:rPr>
+              <a:t>Pricing Power</a:t>
+            </a:r>
+          </a:p>
+        </p:txBody>
+      </p:sp>
+      <p:sp>
+        <p:nvSpPr>
+          <p:cNvPr id="22" name="TextBox 21"/>
+          <p:cNvSpPr txBox="1"/>
+          <p:nvPr/>
+        </p:nvSpPr>
+        <p:spPr>
+          <a:xfrm>
+            <a:off x="576000" y="3060000"/>
+            <a:ext cx="4428000" cy="306000"/>
+          </a:xfrm>
+          <a:prstGeom prst="rect">
+            <a:avLst/>
+          </a:prstGeom>
+          <a:noFill/>
+        </p:spPr>
+        <p:txBody>
+          <a:bodyPr wrap="square">
+            <a:spAutoFit/>
+          </a:bodyPr>
+          <a:lstStyle/>
+          <a:p>
+            <a:pPr algn="l"/>
+            <a:r>
+              <a:rPr sz="750" b="0" i="0">
+                <a:solidFill>
+                  <a:srgbClr val="555555"/>
+                </a:solidFill>
+              </a:rPr>
+              <a:t>Capacité a répercuter l'inflation des intrants — les leaders de marque maintiennent des marges brutes &gt; 40 %.</a:t>
+            </a:r>
+          </a:p>
+        </p:txBody>
+      </p:sp>
+      <p:sp>
+        <p:nvSpPr>
+          <p:cNvPr id="23" name="Rectangle 22"/>
+          <p:cNvSpPr/>
+          <p:nvPr/>
+        </p:nvSpPr>
+        <p:spPr>
+          <a:xfrm>
+            <a:off x="468000" y="3384000"/>
+            <a:ext cx="28800" cy="432000"/>
+          </a:xfrm>
+          <a:prstGeom prst="rect">
+            <a:avLst/>
+          </a:prstGeom>
+          <a:solidFill>
+            <a:srgbClr val="1A7A4A"/>
+          </a:solidFill>
+          <a:ln>
+            <a:noFill/>
+          </a:ln>
+        </p:spPr>
+        <p:style>
+          <a:lnRef idx="1">
+            <a:schemeClr val="accent1"/>
+          </a:lnRef>
+          <a:fillRef idx="3">
+            <a:schemeClr val="accent1"/>
+          </a:fillRef>
+          <a:effectRef idx="2">
+            <a:schemeClr val="accent1"/>
+          </a:effectRef>
+          <a:fontRef idx="minor">
+            <a:schemeClr val="lt1"/>
+          </a:fontRef>
+        </p:style>
+        <p:txBody>
+          <a:bodyPr rtlCol="0" anchor="ctr"/>
+          <a:lstStyle/>
+          <a:p>
+            <a:pPr algn="ctr"/>
+          </a:p>
+        </p:txBody>
+      </p:sp>
+      <p:sp>
+        <p:nvSpPr>
+          <p:cNvPr id="24" name="TextBox 23"/>
+          <p:cNvSpPr txBox="1"/>
+          <p:nvPr/>
+        </p:nvSpPr>
+        <p:spPr>
+          <a:xfrm>
+            <a:off x="576000" y="3384000"/>
+            <a:ext cx="4428000" cy="162000"/>
+          </a:xfrm>
+          <a:prstGeom prst="rect">
+            <a:avLst/>
+          </a:prstGeom>
+          <a:noFill/>
+        </p:spPr>
+        <p:txBody>
+          <a:bodyPr wrap="square">
+            <a:spAutoFit/>
+          </a:bodyPr>
+          <a:lstStyle/>
+          <a:p>
+            <a:pPr algn="l"/>
+            <a:r>
+              <a:rPr sz="800" b="1" i="0">
+                <a:solidFill>
+                  <a:srgbClr val="1B3A6B"/>
+                </a:solidFill>
+              </a:rPr>
+              <a:t>Marches Emergents</a:t>
+            </a:r>
+          </a:p>
+        </p:txBody>
+      </p:sp>
+      <p:sp>
+        <p:nvSpPr>
+          <p:cNvPr id="25" name="TextBox 24"/>
+          <p:cNvSpPr txBox="1"/>
+          <p:nvPr/>
+        </p:nvSpPr>
+        <p:spPr>
+          <a:xfrm>
+            <a:off x="576000" y="3546000"/>
+            <a:ext cx="4428000" cy="306000"/>
+          </a:xfrm>
+          <a:prstGeom prst="rect">
+            <a:avLst/>
+          </a:prstGeom>
+          <a:noFill/>
+        </p:spPr>
+        <p:txBody>
+          <a:bodyPr wrap="square">
+            <a:spAutoFit/>
+          </a:bodyPr>
+          <a:lstStyle/>
+          <a:p>
+            <a:pPr algn="l"/>
+            <a:r>
+              <a:rPr sz="750" b="0" i="0">
+                <a:solidFill>
+                  <a:srgbClr val="555555"/>
+                </a:solidFill>
+              </a:rPr>
+              <a:t>Croissance de la classe moyenne en Afrique et Asie du Sud-Est — expansion a double chiffre.</a:t>
+            </a:r>
+          </a:p>
+        </p:txBody>
+      </p:sp>
+      <p:sp>
+        <p:nvSpPr>
+          <p:cNvPr id="26" name="Rectangle 25"/>
+          <p:cNvSpPr/>
+          <p:nvPr/>
+        </p:nvSpPr>
+        <p:spPr>
+          <a:xfrm>
+            <a:off x="468000" y="3870000"/>
+            <a:ext cx="28800" cy="432000"/>
+          </a:xfrm>
+          <a:prstGeom prst="rect">
+            <a:avLst/>
+          </a:prstGeom>
+          <a:solidFill>
+            <a:srgbClr val="1A7A4A"/>
+          </a:solidFill>
+          <a:ln>
+            <a:noFill/>
+          </a:ln>
+        </p:spPr>
+        <p:style>
+          <a:lnRef idx="1">
+            <a:schemeClr val="accent1"/>
+          </a:lnRef>
+          <a:fillRef idx="3">
+            <a:schemeClr val="accent1"/>
+          </a:fillRef>
+          <a:effectRef idx="2">
+            <a:schemeClr val="accent1"/>
+          </a:effectRef>
+          <a:fontRef idx="minor">
+            <a:schemeClr val="lt1"/>
+          </a:fontRef>
+        </p:style>
+        <p:txBody>
+          <a:bodyPr rtlCol="0" anchor="ctr"/>
+          <a:lstStyle/>
+          <a:p>
+            <a:pPr algn="ctr"/>
+          </a:p>
+        </p:txBody>
+      </p:sp>
+      <p:sp>
+        <p:nvSpPr>
+          <p:cNvPr id="27" name="TextBox 26"/>
+          <p:cNvSpPr txBox="1"/>
+          <p:nvPr/>
+        </p:nvSpPr>
+        <p:spPr>
+          <a:xfrm>
+            <a:off x="576000" y="3870000"/>
+            <a:ext cx="4428000" cy="162000"/>
+          </a:xfrm>
+          <a:prstGeom prst="rect">
+            <a:avLst/>
+          </a:prstGeom>
+          <a:noFill/>
+        </p:spPr>
+        <p:txBody>
+          <a:bodyPr wrap="square">
+            <a:spAutoFit/>
+          </a:bodyPr>
+          <a:lstStyle/>
+          <a:p>
+            <a:pPr algn="l"/>
+            <a:r>
+              <a:rPr sz="800" b="1" i="0">
+                <a:solidFill>
+                  <a:srgbClr val="1B3A6B"/>
+                </a:solidFill>
+              </a:rPr>
+              <a:t>Innovation Produit</a:t>
+            </a:r>
+          </a:p>
+        </p:txBody>
+      </p:sp>
+      <p:sp>
+        <p:nvSpPr>
+          <p:cNvPr id="28" name="TextBox 27"/>
+          <p:cNvSpPr txBox="1"/>
+          <p:nvPr/>
+        </p:nvSpPr>
+        <p:spPr>
+          <a:xfrm>
+            <a:off x="576000" y="4031999"/>
+            <a:ext cx="4428000" cy="306000"/>
+          </a:xfrm>
+          <a:prstGeom prst="rect">
+            <a:avLst/>
+          </a:prstGeom>
+          <a:noFill/>
+        </p:spPr>
+        <p:txBody>
+          <a:bodyPr wrap="square">
+            <a:spAutoFit/>
+          </a:bodyPr>
+          <a:lstStyle/>
+          <a:p>
+            <a:pPr algn="l"/>
+            <a:r>
+              <a:rPr sz="750" b="0" i="0">
+                <a:solidFill>
+                  <a:srgbClr val="555555"/>
+                </a:solidFill>
+              </a:rPr>
+              <a:t>Premiumisation et bio — capture de valeur additionnelle sur les segments porteurs.</a:t>
             </a:r>
           </a:p>
         </p:txBody>
       </p:sp>
       <p:graphicFrame>
         <p:nvGraphicFramePr>
-          <p:cNvPr id="18" name="Table 17"/>
+          <p:cNvPr id="29" name="Table 28"/>
           <p:cNvGraphicFramePr>
             <a:graphicFrameLocks noGrp="1"/>
           </p:cNvGraphicFramePr>
@@ -24168,7 +25475,7 @@
       </p:graphicFrame>
       <p:sp>
         <p:nvSpPr>
-          <p:cNvPr id="19" name="Rectangle 18"/>
+          <p:cNvPr id="30" name="Rectangle 29"/>
           <p:cNvSpPr/>
           <p:nvPr/>
         </p:nvSpPr>
@@ -24211,7 +25518,7 @@
       </p:sp>
       <p:sp>
         <p:nvSpPr>
-          <p:cNvPr id="20" name="TextBox 19"/>
+          <p:cNvPr id="31" name="TextBox 30"/>
           <p:cNvSpPr txBox="1"/>
           <p:nvPr/>
         </p:nvSpPr>

--- a/preview/secteur_Consumer_Defensive_S&P_500/secteur_Consumer_Defensive_S&P_500.pptx
+++ b/preview/secteur_Consumer_Defensive_S&P_500/secteur_Consumer_Defensive_S&P_500.pptx
@@ -3281,7 +3281,7 @@
                   <a:srgbClr val="555555"/>
                 </a:solidFill>
               </a:rPr>
-              <a:t>S&amp;P 500  ·  6 sociétés analysées</a:t>
+              <a:t>S&amp;P 500  ·  8 sociétés analysées</a:t>
             </a:r>
           </a:p>
         </p:txBody>
@@ -4161,9 +4161,9 @@
                   <a:srgbClr val="555555"/>
                 </a:solidFill>
               </a:rPr>
-              <a:t>CON6 domine le quadrant Premium Justifie — valorisation élevée (15.5x) soutenue par 42.5 % de marge brute.
-CON1 se positionne en zone Opportunite — EV/EBITDA de 8.0x sous la médiane sectorielle de 11.8x.
-La médiane sectorielle ressort a 11.8x — les acteurs en dessous offrent potentiellement les meilleures asymetries risque/rendement.</a:t>
+              <a:t>KO domine le quadrant Premium Justifie — valorisation élevée (22.1x) soutenue par 61.6 % de marge brute.
+GIS se positionne en zone Opportunite — EV/EBITDA de 9.8x sous la médiane sectorielle de 17.4x.
+La médiane sectorielle ressort a 17.4x — les acteurs en dessous offrent potentiellement les meilleures asymetries risque/rendement.</a:t>
             </a:r>
           </a:p>
         </p:txBody>
@@ -4769,7 +4769,7 @@
         </p:nvGraphicFramePr>
         <p:xfrm>
           <a:off x="324000" y="900000"/>
-          <a:ext cx="8495997" cy="1411200"/>
+          <a:ext cx="8495997" cy="1814400"/>
         </p:xfrm>
         <a:graphic>
           <a:graphicData uri="http://schemas.openxmlformats.org/drawingml/2006/table">
@@ -4978,7 +4978,7 @@
                             <a:srgbClr val="1A1A1A"/>
                           </a:solidFill>
                         </a:rPr>
-                        <a:t>CON6</a:t>
+                        <a:t>PM</a:t>
                       </a:r>
                     </a:p>
                   </a:txBody>
@@ -4998,7 +4998,7 @@
                             <a:srgbClr val="1A1A1A"/>
                           </a:solidFill>
                         </a:rPr>
-                        <a:t>Consumer Defensive</a:t>
+                        <a:t>Philip Morris Inte</a:t>
                       </a:r>
                     </a:p>
                   </a:txBody>
@@ -5018,7 +5018,7 @@
                             <a:srgbClr val="1A1A1A"/>
                           </a:solidFill>
                         </a:rPr>
-                        <a:t>68/100</a:t>
+                        <a:t>71/100</a:t>
                       </a:r>
                     </a:p>
                   </a:txBody>
@@ -5038,7 +5038,7 @@
                             <a:srgbClr val="1A1A1A"/>
                           </a:solidFill>
                         </a:rPr>
-                        <a:t>17</a:t>
+                        <a:t>13</a:t>
                       </a:r>
                     </a:p>
                   </a:txBody>
@@ -5058,7 +5058,7 @@
                             <a:srgbClr val="1A1A1A"/>
                           </a:solidFill>
                         </a:rPr>
-                        <a:t>17</a:t>
+                        <a:t>18</a:t>
                       </a:r>
                     </a:p>
                   </a:txBody>
@@ -5078,7 +5078,7 @@
                             <a:srgbClr val="1A1A1A"/>
                           </a:solidFill>
                         </a:rPr>
-                        <a:t>17</a:t>
+                        <a:t>25</a:t>
                       </a:r>
                     </a:p>
                   </a:txBody>
@@ -5098,7 +5098,7 @@
                             <a:srgbClr val="1A1A1A"/>
                           </a:solidFill>
                         </a:rPr>
-                        <a:t>17</a:t>
+                        <a:t>13</a:t>
                       </a:r>
                     </a:p>
                   </a:txBody>
@@ -5140,7 +5140,7 @@
                             <a:srgbClr val="1A1A1A"/>
                           </a:solidFill>
                         </a:rPr>
-                        <a:t>CON5</a:t>
+                        <a:t>KO</a:t>
                       </a:r>
                     </a:p>
                   </a:txBody>
@@ -5162,7 +5162,7 @@
                             <a:srgbClr val="1A1A1A"/>
                           </a:solidFill>
                         </a:rPr>
-                        <a:t>Consumer Defensive</a:t>
+                        <a:t>The Coca-Cola Comp</a:t>
                       </a:r>
                     </a:p>
                   </a:txBody>
@@ -5184,7 +5184,7 @@
                             <a:srgbClr val="1A1A1A"/>
                           </a:solidFill>
                         </a:rPr>
-                        <a:t>64/100</a:t>
+                        <a:t>65/100</a:t>
                       </a:r>
                     </a:p>
                   </a:txBody>
@@ -5206,7 +5206,7 @@
                             <a:srgbClr val="1A1A1A"/>
                           </a:solidFill>
                         </a:rPr>
-                        <a:t>16</a:t>
+                        <a:t>12</a:t>
                       </a:r>
                     </a:p>
                   </a:txBody>
@@ -5228,7 +5228,7 @@
                             <a:srgbClr val="1A1A1A"/>
                           </a:solidFill>
                         </a:rPr>
-                        <a:t>16</a:t>
+                        <a:t>14</a:t>
                       </a:r>
                     </a:p>
                   </a:txBody>
@@ -5250,7 +5250,7 @@
                             <a:srgbClr val="1A1A1A"/>
                           </a:solidFill>
                         </a:rPr>
-                        <a:t>16</a:t>
+                        <a:t>25</a:t>
                       </a:r>
                     </a:p>
                   </a:txBody>
@@ -5272,7 +5272,7 @@
                             <a:srgbClr val="1A1A1A"/>
                           </a:solidFill>
                         </a:rPr>
-                        <a:t>16</a:t>
+                        <a:t>13</a:t>
                       </a:r>
                     </a:p>
                   </a:txBody>
@@ -5294,7 +5294,7 @@
                             <a:srgbClr val="1A1A1A"/>
                           </a:solidFill>
                         </a:rPr>
-                        <a:t>HOLD</a:t>
+                        <a:t>BUY</a:t>
                       </a:r>
                     </a:p>
                   </a:txBody>
@@ -5318,7 +5318,7 @@
                             <a:srgbClr val="1A1A1A"/>
                           </a:solidFill>
                         </a:rPr>
-                        <a:t>CON4</a:t>
+                        <a:t>PG</a:t>
                       </a:r>
                     </a:p>
                   </a:txBody>
@@ -5338,7 +5338,7 @@
                             <a:srgbClr val="1A1A1A"/>
                           </a:solidFill>
                         </a:rPr>
-                        <a:t>Consumer Defensive</a:t>
+                        <a:t>The Procter &amp; Gamb</a:t>
                       </a:r>
                     </a:p>
                   </a:txBody>
@@ -5358,7 +5358,7 @@
                             <a:srgbClr val="1A1A1A"/>
                           </a:solidFill>
                         </a:rPr>
-                        <a:t>60/100</a:t>
+                        <a:t>63/100</a:t>
                       </a:r>
                     </a:p>
                   </a:txBody>
@@ -5378,7 +5378,7 @@
                             <a:srgbClr val="1A1A1A"/>
                           </a:solidFill>
                         </a:rPr>
-                        <a:t>15</a:t>
+                        <a:t>14</a:t>
                       </a:r>
                     </a:p>
                   </a:txBody>
@@ -5398,7 +5398,7 @@
                             <a:srgbClr val="1A1A1A"/>
                           </a:solidFill>
                         </a:rPr>
-                        <a:t>15</a:t>
+                        <a:t>13</a:t>
                       </a:r>
                     </a:p>
                   </a:txBody>
@@ -5418,7 +5418,7 @@
                             <a:srgbClr val="1A1A1A"/>
                           </a:solidFill>
                         </a:rPr>
-                        <a:t>15</a:t>
+                        <a:t>25</a:t>
                       </a:r>
                     </a:p>
                   </a:txBody>
@@ -5438,7 +5438,7 @@
                             <a:srgbClr val="1A1A1A"/>
                           </a:solidFill>
                         </a:rPr>
-                        <a:t>15</a:t>
+                        <a:t>10</a:t>
                       </a:r>
                     </a:p>
                   </a:txBody>
@@ -5480,7 +5480,7 @@
                             <a:srgbClr val="1A1A1A"/>
                           </a:solidFill>
                         </a:rPr>
-                        <a:t>CON3</a:t>
+                        <a:t>PEP</a:t>
                       </a:r>
                     </a:p>
                   </a:txBody>
@@ -5502,7 +5502,7 @@
                             <a:srgbClr val="1A1A1A"/>
                           </a:solidFill>
                         </a:rPr>
-                        <a:t>Consumer Defensive</a:t>
+                        <a:t>PepsiCo, Inc.</a:t>
                       </a:r>
                     </a:p>
                   </a:txBody>
@@ -5524,7 +5524,7 @@
                             <a:srgbClr val="1A1A1A"/>
                           </a:solidFill>
                         </a:rPr>
-                        <a:t>56/100</a:t>
+                        <a:t>59/100</a:t>
                       </a:r>
                     </a:p>
                   </a:txBody>
@@ -5546,7 +5546,7 @@
                             <a:srgbClr val="1A1A1A"/>
                           </a:solidFill>
                         </a:rPr>
-                        <a:t>14</a:t>
+                        <a:t>12</a:t>
                       </a:r>
                     </a:p>
                   </a:txBody>
@@ -5568,7 +5568,7 @@
                             <a:srgbClr val="1A1A1A"/>
                           </a:solidFill>
                         </a:rPr>
-                        <a:t>14</a:t>
+                        <a:t>17</a:t>
                       </a:r>
                     </a:p>
                   </a:txBody>
@@ -5590,7 +5590,7 @@
                             <a:srgbClr val="1A1A1A"/>
                           </a:solidFill>
                         </a:rPr>
-                        <a:t>14</a:t>
+                        <a:t>17</a:t>
                       </a:r>
                     </a:p>
                   </a:txBody>
@@ -5612,7 +5612,7 @@
                             <a:srgbClr val="1A1A1A"/>
                           </a:solidFill>
                         </a:rPr>
-                        <a:t>14</a:t>
+                        <a:t>12</a:t>
                       </a:r>
                     </a:p>
                   </a:txBody>
@@ -5658,7 +5658,7 @@
                             <a:srgbClr val="1A1A1A"/>
                           </a:solidFill>
                         </a:rPr>
-                        <a:t>CON2</a:t>
+                        <a:t>MDLZ</a:t>
                       </a:r>
                     </a:p>
                   </a:txBody>
@@ -5678,7 +5678,7 @@
                             <a:srgbClr val="1A1A1A"/>
                           </a:solidFill>
                         </a:rPr>
-                        <a:t>Consumer Defensive</a:t>
+                        <a:t>Mondelez Internati</a:t>
                       </a:r>
                     </a:p>
                   </a:txBody>
@@ -5698,7 +5698,7 @@
                             <a:srgbClr val="1A1A1A"/>
                           </a:solidFill>
                         </a:rPr>
-                        <a:t>52/100</a:t>
+                        <a:t>56/100</a:t>
                       </a:r>
                     </a:p>
                   </a:txBody>
@@ -5718,7 +5718,7 @@
                             <a:srgbClr val="1A1A1A"/>
                           </a:solidFill>
                         </a:rPr>
-                        <a:t>13</a:t>
+                        <a:t>9</a:t>
                       </a:r>
                     </a:p>
                   </a:txBody>
@@ -5738,7 +5738,7 @@
                             <a:srgbClr val="1A1A1A"/>
                           </a:solidFill>
                         </a:rPr>
-                        <a:t>13</a:t>
+                        <a:t>21</a:t>
                       </a:r>
                     </a:p>
                   </a:txBody>
@@ -5758,7 +5758,7 @@
                             <a:srgbClr val="1A1A1A"/>
                           </a:solidFill>
                         </a:rPr>
-                        <a:t>13</a:t>
+                        <a:t>15</a:t>
                       </a:r>
                     </a:p>
                   </a:txBody>
@@ -5778,7 +5778,7 @@
                             <a:srgbClr val="1A1A1A"/>
                           </a:solidFill>
                         </a:rPr>
-                        <a:t>13</a:t>
+                        <a:t>10</a:t>
                       </a:r>
                     </a:p>
                   </a:txBody>
@@ -5820,7 +5820,7 @@
                             <a:srgbClr val="1A1A1A"/>
                           </a:solidFill>
                         </a:rPr>
-                        <a:t>CON1</a:t>
+                        <a:t>WMT</a:t>
                       </a:r>
                     </a:p>
                   </a:txBody>
@@ -5842,7 +5842,7 @@
                             <a:srgbClr val="1A1A1A"/>
                           </a:solidFill>
                         </a:rPr>
-                        <a:t>Consumer Defensive</a:t>
+                        <a:t>Walmart Inc.</a:t>
                       </a:r>
                     </a:p>
                   </a:txBody>
@@ -5864,7 +5864,7 @@
                             <a:srgbClr val="1A1A1A"/>
                           </a:solidFill>
                         </a:rPr>
-                        <a:t>48/100</a:t>
+                        <a:t>50/100</a:t>
                       </a:r>
                     </a:p>
                   </a:txBody>
@@ -5886,7 +5886,7 @@
                             <a:srgbClr val="1A1A1A"/>
                           </a:solidFill>
                         </a:rPr>
-                        <a:t>12</a:t>
+                        <a:t>2</a:t>
                       </a:r>
                     </a:p>
                   </a:txBody>
@@ -5908,7 +5908,347 @@
                             <a:srgbClr val="1A1A1A"/>
                           </a:solidFill>
                         </a:rPr>
+                        <a:t>17</a:t>
+                      </a:r>
+                    </a:p>
+                  </a:txBody>
+                  <a:tcPr>
+                    <a:solidFill>
+                      <a:srgbClr val="F5F7FA"/>
+                    </a:solidFill>
+                  </a:tcPr>
+                </a:tc>
+                <a:tc>
+                  <a:txBody>
+                    <a:bodyPr/>
+                    <a:lstStyle/>
+                    <a:p>
+                      <a:pPr algn="ctr"/>
+                      <a:r>
+                        <a:rPr sz="750" b="0">
+                          <a:solidFill>
+                            <a:srgbClr val="1A1A1A"/>
+                          </a:solidFill>
+                        </a:rPr>
                         <a:t>12</a:t>
+                      </a:r>
+                    </a:p>
+                  </a:txBody>
+                  <a:tcPr>
+                    <a:solidFill>
+                      <a:srgbClr val="F5F7FA"/>
+                    </a:solidFill>
+                  </a:tcPr>
+                </a:tc>
+                <a:tc>
+                  <a:txBody>
+                    <a:bodyPr/>
+                    <a:lstStyle/>
+                    <a:p>
+                      <a:pPr algn="ctr"/>
+                      <a:r>
+                        <a:rPr sz="750" b="0">
+                          <a:solidFill>
+                            <a:srgbClr val="1A1A1A"/>
+                          </a:solidFill>
+                        </a:rPr>
+                        <a:t>17</a:t>
+                      </a:r>
+                    </a:p>
+                  </a:txBody>
+                  <a:tcPr>
+                    <a:solidFill>
+                      <a:srgbClr val="F5F7FA"/>
+                    </a:solidFill>
+                  </a:tcPr>
+                </a:tc>
+                <a:tc>
+                  <a:txBody>
+                    <a:bodyPr/>
+                    <a:lstStyle/>
+                    <a:p>
+                      <a:pPr algn="ctr"/>
+                      <a:r>
+                        <a:rPr sz="750" b="0">
+                          <a:solidFill>
+                            <a:srgbClr val="1A1A1A"/>
+                          </a:solidFill>
+                        </a:rPr>
+                        <a:t>HOLD</a:t>
+                      </a:r>
+                    </a:p>
+                  </a:txBody>
+                  <a:tcPr>
+                    <a:solidFill>
+                      <a:srgbClr val="F5F7FA"/>
+                    </a:solidFill>
+                  </a:tcPr>
+                </a:tc>
+              </a:tr>
+              <a:tr h="201600">
+                <a:tc>
+                  <a:txBody>
+                    <a:bodyPr/>
+                    <a:lstStyle/>
+                    <a:p>
+                      <a:pPr algn="ctr"/>
+                      <a:r>
+                        <a:rPr sz="750" b="0">
+                          <a:solidFill>
+                            <a:srgbClr val="1A1A1A"/>
+                          </a:solidFill>
+                        </a:rPr>
+                        <a:t>GIS</a:t>
+                      </a:r>
+                    </a:p>
+                  </a:txBody>
+                  <a:tcPr>
+                    <a:noFill/>
+                  </a:tcPr>
+                </a:tc>
+                <a:tc>
+                  <a:txBody>
+                    <a:bodyPr/>
+                    <a:lstStyle/>
+                    <a:p>
+                      <a:pPr algn="ctr"/>
+                      <a:r>
+                        <a:rPr sz="750" b="0">
+                          <a:solidFill>
+                            <a:srgbClr val="1A1A1A"/>
+                          </a:solidFill>
+                        </a:rPr>
+                        <a:t>General Mills, Inc</a:t>
+                      </a:r>
+                    </a:p>
+                  </a:txBody>
+                  <a:tcPr>
+                    <a:noFill/>
+                  </a:tcPr>
+                </a:tc>
+                <a:tc>
+                  <a:txBody>
+                    <a:bodyPr/>
+                    <a:lstStyle/>
+                    <a:p>
+                      <a:pPr algn="ctr"/>
+                      <a:r>
+                        <a:rPr sz="750" b="0">
+                          <a:solidFill>
+                            <a:srgbClr val="1A1A1A"/>
+                          </a:solidFill>
+                        </a:rPr>
+                        <a:t>50/100</a:t>
+                      </a:r>
+                    </a:p>
+                  </a:txBody>
+                  <a:tcPr>
+                    <a:noFill/>
+                  </a:tcPr>
+                </a:tc>
+                <a:tc>
+                  <a:txBody>
+                    <a:bodyPr/>
+                    <a:lstStyle/>
+                    <a:p>
+                      <a:pPr algn="ctr"/>
+                      <a:r>
+                        <a:rPr sz="750" b="0">
+                          <a:solidFill>
+                            <a:srgbClr val="1A1A1A"/>
+                          </a:solidFill>
+                        </a:rPr>
+                        <a:t>20</a:t>
+                      </a:r>
+                    </a:p>
+                  </a:txBody>
+                  <a:tcPr>
+                    <a:noFill/>
+                  </a:tcPr>
+                </a:tc>
+                <a:tc>
+                  <a:txBody>
+                    <a:bodyPr/>
+                    <a:lstStyle/>
+                    <a:p>
+                      <a:pPr algn="ctr"/>
+                      <a:r>
+                        <a:rPr sz="750" b="0">
+                          <a:solidFill>
+                            <a:srgbClr val="1A1A1A"/>
+                          </a:solidFill>
+                        </a:rPr>
+                        <a:t>3</a:t>
+                      </a:r>
+                    </a:p>
+                  </a:txBody>
+                  <a:tcPr>
+                    <a:noFill/>
+                  </a:tcPr>
+                </a:tc>
+                <a:tc>
+                  <a:txBody>
+                    <a:bodyPr/>
+                    <a:lstStyle/>
+                    <a:p>
+                      <a:pPr algn="ctr"/>
+                      <a:r>
+                        <a:rPr sz="750" b="0">
+                          <a:solidFill>
+                            <a:srgbClr val="1A1A1A"/>
+                          </a:solidFill>
+                        </a:rPr>
+                        <a:t>19</a:t>
+                      </a:r>
+                    </a:p>
+                  </a:txBody>
+                  <a:tcPr>
+                    <a:noFill/>
+                  </a:tcPr>
+                </a:tc>
+                <a:tc>
+                  <a:txBody>
+                    <a:bodyPr/>
+                    <a:lstStyle/>
+                    <a:p>
+                      <a:pPr algn="ctr"/>
+                      <a:r>
+                        <a:rPr sz="750" b="0">
+                          <a:solidFill>
+                            <a:srgbClr val="1A1A1A"/>
+                          </a:solidFill>
+                        </a:rPr>
+                        <a:t>6</a:t>
+                      </a:r>
+                    </a:p>
+                  </a:txBody>
+                  <a:tcPr>
+                    <a:noFill/>
+                  </a:tcPr>
+                </a:tc>
+                <a:tc>
+                  <a:txBody>
+                    <a:bodyPr/>
+                    <a:lstStyle/>
+                    <a:p>
+                      <a:pPr algn="ctr"/>
+                      <a:r>
+                        <a:rPr sz="750" b="0">
+                          <a:solidFill>
+                            <a:srgbClr val="1A1A1A"/>
+                          </a:solidFill>
+                        </a:rPr>
+                        <a:t>HOLD</a:t>
+                      </a:r>
+                    </a:p>
+                  </a:txBody>
+                  <a:tcPr>
+                    <a:noFill/>
+                  </a:tcPr>
+                </a:tc>
+              </a:tr>
+              <a:tr h="201600">
+                <a:tc>
+                  <a:txBody>
+                    <a:bodyPr/>
+                    <a:lstStyle/>
+                    <a:p>
+                      <a:pPr algn="ctr"/>
+                      <a:r>
+                        <a:rPr sz="750" b="0">
+                          <a:solidFill>
+                            <a:srgbClr val="1A1A1A"/>
+                          </a:solidFill>
+                        </a:rPr>
+                        <a:t>COST</a:t>
+                      </a:r>
+                    </a:p>
+                  </a:txBody>
+                  <a:tcPr>
+                    <a:solidFill>
+                      <a:srgbClr val="F5F7FA"/>
+                    </a:solidFill>
+                  </a:tcPr>
+                </a:tc>
+                <a:tc>
+                  <a:txBody>
+                    <a:bodyPr/>
+                    <a:lstStyle/>
+                    <a:p>
+                      <a:pPr algn="ctr"/>
+                      <a:r>
+                        <a:rPr sz="750" b="0">
+                          <a:solidFill>
+                            <a:srgbClr val="1A1A1A"/>
+                          </a:solidFill>
+                        </a:rPr>
+                        <a:t>Costco Wholesale C</a:t>
+                      </a:r>
+                    </a:p>
+                  </a:txBody>
+                  <a:tcPr>
+                    <a:solidFill>
+                      <a:srgbClr val="F5F7FA"/>
+                    </a:solidFill>
+                  </a:tcPr>
+                </a:tc>
+                <a:tc>
+                  <a:txBody>
+                    <a:bodyPr/>
+                    <a:lstStyle/>
+                    <a:p>
+                      <a:pPr algn="ctr"/>
+                      <a:r>
+                        <a:rPr sz="750" b="0">
+                          <a:solidFill>
+                            <a:srgbClr val="1A1A1A"/>
+                          </a:solidFill>
+                        </a:rPr>
+                        <a:t>46/100</a:t>
+                      </a:r>
+                    </a:p>
+                  </a:txBody>
+                  <a:tcPr>
+                    <a:solidFill>
+                      <a:srgbClr val="F5F7FA"/>
+                    </a:solidFill>
+                  </a:tcPr>
+                </a:tc>
+                <a:tc>
+                  <a:txBody>
+                    <a:bodyPr/>
+                    <a:lstStyle/>
+                    <a:p>
+                      <a:pPr algn="ctr"/>
+                      <a:r>
+                        <a:rPr sz="750" b="0">
+                          <a:solidFill>
+                            <a:srgbClr val="1A1A1A"/>
+                          </a:solidFill>
+                        </a:rPr>
+                        <a:t>0</a:t>
+                      </a:r>
+                    </a:p>
+                  </a:txBody>
+                  <a:tcPr>
+                    <a:solidFill>
+                      <a:srgbClr val="F5F7FA"/>
+                    </a:solidFill>
+                  </a:tcPr>
+                </a:tc>
+                <a:tc>
+                  <a:txBody>
+                    <a:bodyPr/>
+                    <a:lstStyle/>
+                    <a:p>
+                      <a:pPr algn="ctr"/>
+                      <a:r>
+                        <a:rPr sz="750" b="0">
+                          <a:solidFill>
+                            <a:srgbClr val="1A1A1A"/>
+                          </a:solidFill>
+                        </a:rPr>
+                        <a:t>21</a:t>
                       </a:r>
                     </a:p>
                   </a:txBody>
@@ -6215,7 +6555,7 @@
                   <a:srgbClr val="555555"/>
                 </a:solidFill>
               </a:rPr>
-              <a:t>Consumer Defensive Cor presente le profil le plus equilibre du secteur (68/100) avec des scores Value=17, Growth=17, Quality=17, Momentum=17. La dispersion des scores entre les 6 sociétés reflete des profils hétérogènes — une allocation selective privilegiant les leaders qualitatifs est recommandee dans la configuration sectorielle actuelle.</a:t>
+              <a:t>Philip Morris Internat presente le profil le plus equilibre du secteur (71/100) avec des scores Value=13, Growth=18, Quality=25, Momentum=13. La dispersion des scores entre les 8 sociétés reflete des profils hétérogènes — une allocation selective privilegiant les leaders qualitatifs est recommandee dans la configuration sectorielle actuelle.</a:t>
             </a:r>
           </a:p>
         </p:txBody>
@@ -7166,7 +7506,7 @@
                   <a:srgbClr val="1B3A6B"/>
                 </a:solidFill>
               </a:rPr>
-              <a:t>CON6</a:t>
+              <a:t>PM</a:t>
             </a:r>
           </a:p>
         </p:txBody>
@@ -7277,7 +7617,7 @@
                   <a:srgbClr val="555555"/>
                 </a:solidFill>
               </a:rPr>
-              <a:t>Consumer Defensive C</a:t>
+              <a:t>Philip Morris Intern</a:t>
             </a:r>
           </a:p>
         </p:txBody>
@@ -7354,7 +7694,7 @@
                   <a:srgbClr val="FFFFFF"/>
                 </a:solidFill>
               </a:rPr>
-              <a:t>Cible : 156</a:t>
+              <a:t>Cible : 195</a:t>
             </a:r>
           </a:p>
         </p:txBody>
@@ -7533,7 +7873,7 @@
                   <a:srgbClr val="1B3A6B"/>
                 </a:solidFill>
               </a:rPr>
-              <a:t>15.5x</a:t>
+              <a:t>16.0x</a:t>
             </a:r>
           </a:p>
         </p:txBody>
@@ -7644,7 +7984,7 @@
                   <a:srgbClr val="1B3A6B"/>
                 </a:solidFill>
               </a:rPr>
-              <a:t>24.0 %</a:t>
+              <a:t>46.1 %</a:t>
             </a:r>
           </a:p>
         </p:txBody>
@@ -7755,7 +8095,7 @@
                   <a:srgbClr val="1B3A6B"/>
                 </a:solidFill>
               </a:rPr>
-              <a:t>3.3</a:t>
+              <a:t>2.5</a:t>
             </a:r>
           </a:p>
         </p:txBody>
@@ -8126,7 +8466,7 @@
             <a:avLst/>
           </a:prstGeom>
           <a:solidFill>
-            <a:srgbClr val="B06000"/>
+            <a:srgbClr val="1A7A4A"/>
           </a:solidFill>
           <a:ln>
             <a:noFill/>
@@ -8183,7 +8523,7 @@
                   <a:srgbClr val="1B3A6B"/>
                 </a:solidFill>
               </a:rPr>
-              <a:t>CON5</a:t>
+              <a:t>KO</a:t>
             </a:r>
           </a:p>
         </p:txBody>
@@ -8198,6 +8538,946 @@
           <a:xfrm>
             <a:off x="5112000" y="972000"/>
             <a:ext cx="792000" cy="251999"/>
+          </a:xfrm>
+          <a:prstGeom prst="rect">
+            <a:avLst/>
+          </a:prstGeom>
+          <a:solidFill>
+            <a:srgbClr val="1A7A4A"/>
+          </a:solidFill>
+          <a:ln>
+            <a:noFill/>
+          </a:ln>
+        </p:spPr>
+        <p:style>
+          <a:lnRef idx="1">
+            <a:schemeClr val="accent1"/>
+          </a:lnRef>
+          <a:fillRef idx="3">
+            <a:schemeClr val="accent1"/>
+          </a:fillRef>
+          <a:effectRef idx="2">
+            <a:schemeClr val="accent1"/>
+          </a:effectRef>
+          <a:fontRef idx="minor">
+            <a:schemeClr val="lt1"/>
+          </a:fontRef>
+        </p:style>
+        <p:txBody>
+          <a:bodyPr rtlCol="0" anchor="ctr"/>
+          <a:lstStyle/>
+          <a:p>
+            <a:pPr algn="ctr"/>
+          </a:p>
+        </p:txBody>
+      </p:sp>
+      <p:sp>
+        <p:nvSpPr>
+          <p:cNvPr id="46" name="TextBox 45"/>
+          <p:cNvSpPr txBox="1"/>
+          <p:nvPr/>
+        </p:nvSpPr>
+        <p:spPr>
+          <a:xfrm>
+            <a:off x="5112000" y="979200"/>
+            <a:ext cx="792000" cy="234000"/>
+          </a:xfrm>
+          <a:prstGeom prst="rect">
+            <a:avLst/>
+          </a:prstGeom>
+          <a:noFill/>
+        </p:spPr>
+        <p:txBody>
+          <a:bodyPr wrap="square">
+            <a:spAutoFit/>
+          </a:bodyPr>
+          <a:lstStyle/>
+          <a:p>
+            <a:pPr algn="ctr"/>
+            <a:r>
+              <a:rPr sz="900" b="1" i="0">
+                <a:solidFill>
+                  <a:srgbClr val="FFFFFF"/>
+                </a:solidFill>
+              </a:rPr>
+              <a:t>BUY</a:t>
+            </a:r>
+          </a:p>
+        </p:txBody>
+      </p:sp>
+      <p:sp>
+        <p:nvSpPr>
+          <p:cNvPr id="47" name="TextBox 46"/>
+          <p:cNvSpPr txBox="1"/>
+          <p:nvPr/>
+        </p:nvSpPr>
+        <p:spPr>
+          <a:xfrm>
+            <a:off x="3348000" y="1260000"/>
+            <a:ext cx="2556000" cy="180000"/>
+          </a:xfrm>
+          <a:prstGeom prst="rect">
+            <a:avLst/>
+          </a:prstGeom>
+          <a:noFill/>
+        </p:spPr>
+        <p:txBody>
+          <a:bodyPr wrap="square">
+            <a:spAutoFit/>
+          </a:bodyPr>
+          <a:lstStyle/>
+          <a:p>
+            <a:pPr algn="l"/>
+            <a:r>
+              <a:rPr sz="800" b="0" i="0">
+                <a:solidFill>
+                  <a:srgbClr val="555555"/>
+                </a:solidFill>
+              </a:rPr>
+              <a:t>The Coca-Cola Compan</a:t>
+            </a:r>
+          </a:p>
+        </p:txBody>
+      </p:sp>
+      <p:sp>
+        <p:nvSpPr>
+          <p:cNvPr id="48" name="Rectangle 47"/>
+          <p:cNvSpPr/>
+          <p:nvPr/>
+        </p:nvSpPr>
+        <p:spPr>
+          <a:xfrm>
+            <a:off x="3348000" y="1512000"/>
+            <a:ext cx="2556000" cy="432000"/>
+          </a:xfrm>
+          <a:prstGeom prst="rect">
+            <a:avLst/>
+          </a:prstGeom>
+          <a:solidFill>
+            <a:srgbClr val="2A5298"/>
+          </a:solidFill>
+          <a:ln>
+            <a:noFill/>
+          </a:ln>
+        </p:spPr>
+        <p:style>
+          <a:lnRef idx="1">
+            <a:schemeClr val="accent1"/>
+          </a:lnRef>
+          <a:fillRef idx="3">
+            <a:schemeClr val="accent1"/>
+          </a:fillRef>
+          <a:effectRef idx="2">
+            <a:schemeClr val="accent1"/>
+          </a:effectRef>
+          <a:fontRef idx="minor">
+            <a:schemeClr val="lt1"/>
+          </a:fontRef>
+        </p:style>
+        <p:txBody>
+          <a:bodyPr rtlCol="0" anchor="ctr"/>
+          <a:lstStyle/>
+          <a:p>
+            <a:pPr algn="ctr"/>
+          </a:p>
+        </p:txBody>
+      </p:sp>
+      <p:sp>
+        <p:nvSpPr>
+          <p:cNvPr id="49" name="TextBox 48"/>
+          <p:cNvSpPr txBox="1"/>
+          <p:nvPr/>
+        </p:nvSpPr>
+        <p:spPr>
+          <a:xfrm>
+            <a:off x="3384000" y="1548000"/>
+            <a:ext cx="1368000" cy="216000"/>
+          </a:xfrm>
+          <a:prstGeom prst="rect">
+            <a:avLst/>
+          </a:prstGeom>
+          <a:noFill/>
+        </p:spPr>
+        <p:txBody>
+          <a:bodyPr wrap="square">
+            <a:spAutoFit/>
+          </a:bodyPr>
+          <a:lstStyle/>
+          <a:p>
+            <a:pPr algn="l"/>
+            <a:r>
+              <a:rPr sz="900" b="1" i="0">
+                <a:solidFill>
+                  <a:srgbClr val="FFFFFF"/>
+                </a:solidFill>
+              </a:rPr>
+              <a:t>Cible : 90</a:t>
+            </a:r>
+          </a:p>
+        </p:txBody>
+      </p:sp>
+      <p:sp>
+        <p:nvSpPr>
+          <p:cNvPr id="50" name="TextBox 49"/>
+          <p:cNvSpPr txBox="1"/>
+          <p:nvPr/>
+        </p:nvSpPr>
+        <p:spPr>
+          <a:xfrm>
+            <a:off x="4788000" y="1548000"/>
+            <a:ext cx="1080000" cy="216000"/>
+          </a:xfrm>
+          <a:prstGeom prst="rect">
+            <a:avLst/>
+          </a:prstGeom>
+          <a:noFill/>
+        </p:spPr>
+        <p:txBody>
+          <a:bodyPr wrap="square">
+            <a:spAutoFit/>
+          </a:bodyPr>
+          <a:lstStyle/>
+          <a:p>
+            <a:pPr algn="l"/>
+            <a:r>
+              <a:rPr sz="900" b="0" i="0">
+                <a:solidFill>
+                  <a:srgbClr val="FFFFFF"/>
+                </a:solidFill>
+              </a:rPr>
+              <a:t>Upside : +20 %</a:t>
+            </a:r>
+          </a:p>
+        </p:txBody>
+      </p:sp>
+      <p:sp>
+        <p:nvSpPr>
+          <p:cNvPr id="51" name="TextBox 50"/>
+          <p:cNvSpPr txBox="1"/>
+          <p:nvPr/>
+        </p:nvSpPr>
+        <p:spPr>
+          <a:xfrm>
+            <a:off x="3348000" y="2015999"/>
+            <a:ext cx="2556000" cy="180000"/>
+          </a:xfrm>
+          <a:prstGeom prst="rect">
+            <a:avLst/>
+          </a:prstGeom>
+          <a:noFill/>
+        </p:spPr>
+        <p:txBody>
+          <a:bodyPr wrap="square">
+            <a:spAutoFit/>
+          </a:bodyPr>
+          <a:lstStyle/>
+          <a:p>
+            <a:pPr algn="l"/>
+            <a:r>
+              <a:rPr sz="750" b="1" i="0">
+                <a:solidFill>
+                  <a:srgbClr val="1B3A6B"/>
+                </a:solidFill>
+              </a:rPr>
+              <a:t>Ratios cles</a:t>
+            </a:r>
+          </a:p>
+        </p:txBody>
+      </p:sp>
+      <p:sp>
+        <p:nvSpPr>
+          <p:cNvPr id="52" name="Rectangle 51"/>
+          <p:cNvSpPr/>
+          <p:nvPr/>
+        </p:nvSpPr>
+        <p:spPr>
+          <a:xfrm>
+            <a:off x="3348000" y="2196000"/>
+            <a:ext cx="2556000" cy="259200"/>
+          </a:xfrm>
+          <a:prstGeom prst="rect">
+            <a:avLst/>
+          </a:prstGeom>
+          <a:solidFill>
+            <a:srgbClr val="E8ECF0"/>
+          </a:solidFill>
+          <a:ln>
+            <a:noFill/>
+          </a:ln>
+        </p:spPr>
+        <p:style>
+          <a:lnRef idx="1">
+            <a:schemeClr val="accent1"/>
+          </a:lnRef>
+          <a:fillRef idx="3">
+            <a:schemeClr val="accent1"/>
+          </a:fillRef>
+          <a:effectRef idx="2">
+            <a:schemeClr val="accent1"/>
+          </a:effectRef>
+          <a:fontRef idx="minor">
+            <a:schemeClr val="lt1"/>
+          </a:fontRef>
+        </p:style>
+        <p:txBody>
+          <a:bodyPr rtlCol="0" anchor="ctr"/>
+          <a:lstStyle/>
+          <a:p>
+            <a:pPr algn="ctr"/>
+          </a:p>
+        </p:txBody>
+      </p:sp>
+      <p:sp>
+        <p:nvSpPr>
+          <p:cNvPr id="53" name="TextBox 52"/>
+          <p:cNvSpPr txBox="1"/>
+          <p:nvPr/>
+        </p:nvSpPr>
+        <p:spPr>
+          <a:xfrm>
+            <a:off x="3384000" y="2214000"/>
+            <a:ext cx="1368000" cy="223200"/>
+          </a:xfrm>
+          <a:prstGeom prst="rect">
+            <a:avLst/>
+          </a:prstGeom>
+          <a:noFill/>
+        </p:spPr>
+        <p:txBody>
+          <a:bodyPr wrap="square">
+            <a:spAutoFit/>
+          </a:bodyPr>
+          <a:lstStyle/>
+          <a:p>
+            <a:pPr algn="l"/>
+            <a:r>
+              <a:rPr sz="800" b="0" i="0">
+                <a:solidFill>
+                  <a:srgbClr val="555555"/>
+                </a:solidFill>
+              </a:rPr>
+              <a:t>EV/EBITDA</a:t>
+            </a:r>
+          </a:p>
+        </p:txBody>
+      </p:sp>
+      <p:sp>
+        <p:nvSpPr>
+          <p:cNvPr id="54" name="TextBox 53"/>
+          <p:cNvSpPr txBox="1"/>
+          <p:nvPr/>
+        </p:nvSpPr>
+        <p:spPr>
+          <a:xfrm>
+            <a:off x="4788000" y="2214000"/>
+            <a:ext cx="1080000" cy="223200"/>
+          </a:xfrm>
+          <a:prstGeom prst="rect">
+            <a:avLst/>
+          </a:prstGeom>
+          <a:noFill/>
+        </p:spPr>
+        <p:txBody>
+          <a:bodyPr wrap="square">
+            <a:spAutoFit/>
+          </a:bodyPr>
+          <a:lstStyle/>
+          <a:p>
+            <a:pPr algn="r"/>
+            <a:r>
+              <a:rPr sz="850" b="1" i="0">
+                <a:solidFill>
+                  <a:srgbClr val="1B3A6B"/>
+                </a:solidFill>
+              </a:rPr>
+              <a:t>22.1x</a:t>
+            </a:r>
+          </a:p>
+        </p:txBody>
+      </p:sp>
+      <p:sp>
+        <p:nvSpPr>
+          <p:cNvPr id="55" name="Rectangle 54"/>
+          <p:cNvSpPr/>
+          <p:nvPr/>
+        </p:nvSpPr>
+        <p:spPr>
+          <a:xfrm>
+            <a:off x="3348000" y="2466000"/>
+            <a:ext cx="2556000" cy="259200"/>
+          </a:xfrm>
+          <a:prstGeom prst="rect">
+            <a:avLst/>
+          </a:prstGeom>
+          <a:solidFill>
+            <a:srgbClr val="E8ECF0"/>
+          </a:solidFill>
+          <a:ln>
+            <a:noFill/>
+          </a:ln>
+        </p:spPr>
+        <p:style>
+          <a:lnRef idx="1">
+            <a:schemeClr val="accent1"/>
+          </a:lnRef>
+          <a:fillRef idx="3">
+            <a:schemeClr val="accent1"/>
+          </a:fillRef>
+          <a:effectRef idx="2">
+            <a:schemeClr val="accent1"/>
+          </a:effectRef>
+          <a:fontRef idx="minor">
+            <a:schemeClr val="lt1"/>
+          </a:fontRef>
+        </p:style>
+        <p:txBody>
+          <a:bodyPr rtlCol="0" anchor="ctr"/>
+          <a:lstStyle/>
+          <a:p>
+            <a:pPr algn="ctr"/>
+          </a:p>
+        </p:txBody>
+      </p:sp>
+      <p:sp>
+        <p:nvSpPr>
+          <p:cNvPr id="56" name="TextBox 55"/>
+          <p:cNvSpPr txBox="1"/>
+          <p:nvPr/>
+        </p:nvSpPr>
+        <p:spPr>
+          <a:xfrm>
+            <a:off x="3384000" y="2484000"/>
+            <a:ext cx="1368000" cy="223200"/>
+          </a:xfrm>
+          <a:prstGeom prst="rect">
+            <a:avLst/>
+          </a:prstGeom>
+          <a:noFill/>
+        </p:spPr>
+        <p:txBody>
+          <a:bodyPr wrap="square">
+            <a:spAutoFit/>
+          </a:bodyPr>
+          <a:lstStyle/>
+          <a:p>
+            <a:pPr algn="l"/>
+            <a:r>
+              <a:rPr sz="800" b="0" i="0">
+                <a:solidFill>
+                  <a:srgbClr val="555555"/>
+                </a:solidFill>
+              </a:rPr>
+              <a:t>Marge EBITDA</a:t>
+            </a:r>
+          </a:p>
+        </p:txBody>
+      </p:sp>
+      <p:sp>
+        <p:nvSpPr>
+          <p:cNvPr id="57" name="TextBox 56"/>
+          <p:cNvSpPr txBox="1"/>
+          <p:nvPr/>
+        </p:nvSpPr>
+        <p:spPr>
+          <a:xfrm>
+            <a:off x="4788000" y="2484000"/>
+            <a:ext cx="1080000" cy="223200"/>
+          </a:xfrm>
+          <a:prstGeom prst="rect">
+            <a:avLst/>
+          </a:prstGeom>
+          <a:noFill/>
+        </p:spPr>
+        <p:txBody>
+          <a:bodyPr wrap="square">
+            <a:spAutoFit/>
+          </a:bodyPr>
+          <a:lstStyle/>
+          <a:p>
+            <a:pPr algn="r"/>
+            <a:r>
+              <a:rPr sz="850" b="1" i="0">
+                <a:solidFill>
+                  <a:srgbClr val="1B3A6B"/>
+                </a:solidFill>
+              </a:rPr>
+              <a:t>33.5 %</a:t>
+            </a:r>
+          </a:p>
+        </p:txBody>
+      </p:sp>
+      <p:sp>
+        <p:nvSpPr>
+          <p:cNvPr id="58" name="Rectangle 57"/>
+          <p:cNvSpPr/>
+          <p:nvPr/>
+        </p:nvSpPr>
+        <p:spPr>
+          <a:xfrm>
+            <a:off x="3348000" y="2736000"/>
+            <a:ext cx="2556000" cy="259200"/>
+          </a:xfrm>
+          <a:prstGeom prst="rect">
+            <a:avLst/>
+          </a:prstGeom>
+          <a:solidFill>
+            <a:srgbClr val="E8ECF0"/>
+          </a:solidFill>
+          <a:ln>
+            <a:noFill/>
+          </a:ln>
+        </p:spPr>
+        <p:style>
+          <a:lnRef idx="1">
+            <a:schemeClr val="accent1"/>
+          </a:lnRef>
+          <a:fillRef idx="3">
+            <a:schemeClr val="accent1"/>
+          </a:fillRef>
+          <a:effectRef idx="2">
+            <a:schemeClr val="accent1"/>
+          </a:effectRef>
+          <a:fontRef idx="minor">
+            <a:schemeClr val="lt1"/>
+          </a:fontRef>
+        </p:style>
+        <p:txBody>
+          <a:bodyPr rtlCol="0" anchor="ctr"/>
+          <a:lstStyle/>
+          <a:p>
+            <a:pPr algn="ctr"/>
+          </a:p>
+        </p:txBody>
+      </p:sp>
+      <p:sp>
+        <p:nvSpPr>
+          <p:cNvPr id="59" name="TextBox 58"/>
+          <p:cNvSpPr txBox="1"/>
+          <p:nvPr/>
+        </p:nvSpPr>
+        <p:spPr>
+          <a:xfrm>
+            <a:off x="3384000" y="2754000"/>
+            <a:ext cx="1368000" cy="223200"/>
+          </a:xfrm>
+          <a:prstGeom prst="rect">
+            <a:avLst/>
+          </a:prstGeom>
+          <a:noFill/>
+        </p:spPr>
+        <p:txBody>
+          <a:bodyPr wrap="square">
+            <a:spAutoFit/>
+          </a:bodyPr>
+          <a:lstStyle/>
+          <a:p>
+            <a:pPr algn="l"/>
+            <a:r>
+              <a:rPr sz="800" b="0" i="0">
+                <a:solidFill>
+                  <a:srgbClr val="555555"/>
+                </a:solidFill>
+              </a:rPr>
+              <a:t>Altman Z</a:t>
+            </a:r>
+          </a:p>
+        </p:txBody>
+      </p:sp>
+      <p:sp>
+        <p:nvSpPr>
+          <p:cNvPr id="60" name="TextBox 59"/>
+          <p:cNvSpPr txBox="1"/>
+          <p:nvPr/>
+        </p:nvSpPr>
+        <p:spPr>
+          <a:xfrm>
+            <a:off x="4788000" y="2754000"/>
+            <a:ext cx="1080000" cy="223200"/>
+          </a:xfrm>
+          <a:prstGeom prst="rect">
+            <a:avLst/>
+          </a:prstGeom>
+          <a:noFill/>
+        </p:spPr>
+        <p:txBody>
+          <a:bodyPr wrap="square">
+            <a:spAutoFit/>
+          </a:bodyPr>
+          <a:lstStyle/>
+          <a:p>
+            <a:pPr algn="r"/>
+            <a:r>
+              <a:rPr sz="850" b="1" i="0">
+                <a:solidFill>
+                  <a:srgbClr val="1B3A6B"/>
+                </a:solidFill>
+              </a:rPr>
+              <a:t>2.5</a:t>
+            </a:r>
+          </a:p>
+        </p:txBody>
+      </p:sp>
+      <p:sp>
+        <p:nvSpPr>
+          <p:cNvPr id="61" name="TextBox 60"/>
+          <p:cNvSpPr txBox="1"/>
+          <p:nvPr/>
+        </p:nvSpPr>
+        <p:spPr>
+          <a:xfrm>
+            <a:off x="3348000" y="3060000"/>
+            <a:ext cx="2556000" cy="180000"/>
+          </a:xfrm>
+          <a:prstGeom prst="rect">
+            <a:avLst/>
+          </a:prstGeom>
+          <a:noFill/>
+        </p:spPr>
+        <p:txBody>
+          <a:bodyPr wrap="square">
+            <a:spAutoFit/>
+          </a:bodyPr>
+          <a:lstStyle/>
+          <a:p>
+            <a:pPr algn="l"/>
+            <a:r>
+              <a:rPr sz="750" b="1" i="0">
+                <a:solidFill>
+                  <a:srgbClr val="1A7A4A"/>
+                </a:solidFill>
+              </a:rPr>
+              <a:t>Catalyseur</a:t>
+            </a:r>
+          </a:p>
+        </p:txBody>
+      </p:sp>
+      <p:sp>
+        <p:nvSpPr>
+          <p:cNvPr id="62" name="Rectangle 61"/>
+          <p:cNvSpPr/>
+          <p:nvPr/>
+        </p:nvSpPr>
+        <p:spPr>
+          <a:xfrm>
+            <a:off x="3348000" y="3240000"/>
+            <a:ext cx="2556000" cy="503999"/>
+          </a:xfrm>
+          <a:prstGeom prst="rect">
+            <a:avLst/>
+          </a:prstGeom>
+          <a:solidFill>
+            <a:srgbClr val="E8F5EE"/>
+          </a:solidFill>
+          <a:ln>
+            <a:noFill/>
+          </a:ln>
+        </p:spPr>
+        <p:style>
+          <a:lnRef idx="1">
+            <a:schemeClr val="accent1"/>
+          </a:lnRef>
+          <a:fillRef idx="3">
+            <a:schemeClr val="accent1"/>
+          </a:fillRef>
+          <a:effectRef idx="2">
+            <a:schemeClr val="accent1"/>
+          </a:effectRef>
+          <a:fontRef idx="minor">
+            <a:schemeClr val="lt1"/>
+          </a:fontRef>
+        </p:style>
+        <p:txBody>
+          <a:bodyPr rtlCol="0" anchor="ctr"/>
+          <a:lstStyle/>
+          <a:p>
+            <a:pPr algn="ctr"/>
+          </a:p>
+        </p:txBody>
+      </p:sp>
+      <p:sp>
+        <p:nvSpPr>
+          <p:cNvPr id="63" name="Rectangle 62"/>
+          <p:cNvSpPr/>
+          <p:nvPr/>
+        </p:nvSpPr>
+        <p:spPr>
+          <a:xfrm>
+            <a:off x="3348000" y="3240000"/>
+            <a:ext cx="36000" cy="503999"/>
+          </a:xfrm>
+          <a:prstGeom prst="rect">
+            <a:avLst/>
+          </a:prstGeom>
+          <a:solidFill>
+            <a:srgbClr val="1A7A4A"/>
+          </a:solidFill>
+          <a:ln>
+            <a:noFill/>
+          </a:ln>
+        </p:spPr>
+        <p:style>
+          <a:lnRef idx="1">
+            <a:schemeClr val="accent1"/>
+          </a:lnRef>
+          <a:fillRef idx="3">
+            <a:schemeClr val="accent1"/>
+          </a:fillRef>
+          <a:effectRef idx="2">
+            <a:schemeClr val="accent1"/>
+          </a:effectRef>
+          <a:fontRef idx="minor">
+            <a:schemeClr val="lt1"/>
+          </a:fontRef>
+        </p:style>
+        <p:txBody>
+          <a:bodyPr rtlCol="0" anchor="ctr"/>
+          <a:lstStyle/>
+          <a:p>
+            <a:pPr algn="ctr"/>
+          </a:p>
+        </p:txBody>
+      </p:sp>
+      <p:sp>
+        <p:nvSpPr>
+          <p:cNvPr id="64" name="TextBox 63"/>
+          <p:cNvSpPr txBox="1"/>
+          <p:nvPr/>
+        </p:nvSpPr>
+        <p:spPr>
+          <a:xfrm>
+            <a:off x="3420000" y="3258000"/>
+            <a:ext cx="2412000" cy="450000"/>
+          </a:xfrm>
+          <a:prstGeom prst="rect">
+            <a:avLst/>
+          </a:prstGeom>
+          <a:noFill/>
+        </p:spPr>
+        <p:txBody>
+          <a:bodyPr wrap="square">
+            <a:spAutoFit/>
+          </a:bodyPr>
+          <a:lstStyle/>
+          <a:p>
+            <a:pPr algn="l"/>
+            <a:r>
+              <a:rPr sz="750" b="0" i="0">
+                <a:solidFill>
+                  <a:srgbClr val="555555"/>
+                </a:solidFill>
+              </a:rPr>
+              <a:t>Croissance de la classe moyenne en Afrique et Asie du Sud-Est — expansion a double chiffre.</a:t>
+            </a:r>
+          </a:p>
+        </p:txBody>
+      </p:sp>
+      <p:sp>
+        <p:nvSpPr>
+          <p:cNvPr id="65" name="TextBox 64"/>
+          <p:cNvSpPr txBox="1"/>
+          <p:nvPr/>
+        </p:nvSpPr>
+        <p:spPr>
+          <a:xfrm>
+            <a:off x="3348000" y="3780000"/>
+            <a:ext cx="2556000" cy="180000"/>
+          </a:xfrm>
+          <a:prstGeom prst="rect">
+            <a:avLst/>
+          </a:prstGeom>
+          <a:noFill/>
+        </p:spPr>
+        <p:txBody>
+          <a:bodyPr wrap="square">
+            <a:spAutoFit/>
+          </a:bodyPr>
+          <a:lstStyle/>
+          <a:p>
+            <a:pPr algn="l"/>
+            <a:r>
+              <a:rPr sz="750" b="1" i="0">
+                <a:solidFill>
+                  <a:srgbClr val="A82020"/>
+                </a:solidFill>
+              </a:rPr>
+              <a:t>Risque principal</a:t>
+            </a:r>
+          </a:p>
+        </p:txBody>
+      </p:sp>
+      <p:sp>
+        <p:nvSpPr>
+          <p:cNvPr id="66" name="Rectangle 65"/>
+          <p:cNvSpPr/>
+          <p:nvPr/>
+        </p:nvSpPr>
+        <p:spPr>
+          <a:xfrm>
+            <a:off x="3348000" y="3996000"/>
+            <a:ext cx="2556000" cy="503999"/>
+          </a:xfrm>
+          <a:prstGeom prst="rect">
+            <a:avLst/>
+          </a:prstGeom>
+          <a:solidFill>
+            <a:srgbClr val="FBEBEB"/>
+          </a:solidFill>
+          <a:ln>
+            <a:noFill/>
+          </a:ln>
+        </p:spPr>
+        <p:style>
+          <a:lnRef idx="1">
+            <a:schemeClr val="accent1"/>
+          </a:lnRef>
+          <a:fillRef idx="3">
+            <a:schemeClr val="accent1"/>
+          </a:fillRef>
+          <a:effectRef idx="2">
+            <a:schemeClr val="accent1"/>
+          </a:effectRef>
+          <a:fontRef idx="minor">
+            <a:schemeClr val="lt1"/>
+          </a:fontRef>
+        </p:style>
+        <p:txBody>
+          <a:bodyPr rtlCol="0" anchor="ctr"/>
+          <a:lstStyle/>
+          <a:p>
+            <a:pPr algn="ctr"/>
+          </a:p>
+        </p:txBody>
+      </p:sp>
+      <p:sp>
+        <p:nvSpPr>
+          <p:cNvPr id="67" name="Rectangle 66"/>
+          <p:cNvSpPr/>
+          <p:nvPr/>
+        </p:nvSpPr>
+        <p:spPr>
+          <a:xfrm>
+            <a:off x="3348000" y="3996000"/>
+            <a:ext cx="36000" cy="503999"/>
+          </a:xfrm>
+          <a:prstGeom prst="rect">
+            <a:avLst/>
+          </a:prstGeom>
+          <a:solidFill>
+            <a:srgbClr val="A82020"/>
+          </a:solidFill>
+          <a:ln>
+            <a:noFill/>
+          </a:ln>
+        </p:spPr>
+        <p:style>
+          <a:lnRef idx="1">
+            <a:schemeClr val="accent1"/>
+          </a:lnRef>
+          <a:fillRef idx="3">
+            <a:schemeClr val="accent1"/>
+          </a:fillRef>
+          <a:effectRef idx="2">
+            <a:schemeClr val="accent1"/>
+          </a:effectRef>
+          <a:fontRef idx="minor">
+            <a:schemeClr val="lt1"/>
+          </a:fontRef>
+        </p:style>
+        <p:txBody>
+          <a:bodyPr rtlCol="0" anchor="ctr"/>
+          <a:lstStyle/>
+          <a:p>
+            <a:pPr algn="ctr"/>
+          </a:p>
+        </p:txBody>
+      </p:sp>
+      <p:sp>
+        <p:nvSpPr>
+          <p:cNvPr id="68" name="TextBox 67"/>
+          <p:cNvSpPr txBox="1"/>
+          <p:nvPr/>
+        </p:nvSpPr>
+        <p:spPr>
+          <a:xfrm>
+            <a:off x="3420000" y="4014000"/>
+            <a:ext cx="2412000" cy="450000"/>
+          </a:xfrm>
+          <a:prstGeom prst="rect">
+            <a:avLst/>
+          </a:prstGeom>
+          <a:noFill/>
+        </p:spPr>
+        <p:txBody>
+          <a:bodyPr wrap="square">
+            <a:spAutoFit/>
+          </a:bodyPr>
+          <a:lstStyle/>
+          <a:p>
+            <a:pPr algn="l"/>
+            <a:r>
+              <a:rPr sz="750" b="0" i="0">
+                <a:solidFill>
+                  <a:srgbClr val="555555"/>
+                </a:solidFill>
+              </a:rPr>
+              <a:t>Reduction des stocks en distribution — impact sur volumes T1-T2 2026.</a:t>
+            </a:r>
+          </a:p>
+        </p:txBody>
+      </p:sp>
+      <p:sp>
+        <p:nvSpPr>
+          <p:cNvPr id="69" name="Rectangle 68"/>
+          <p:cNvSpPr/>
+          <p:nvPr/>
+        </p:nvSpPr>
+        <p:spPr>
+          <a:xfrm>
+            <a:off x="6083999" y="900000"/>
+            <a:ext cx="2736000" cy="4031999"/>
+          </a:xfrm>
+          <a:prstGeom prst="rect">
+            <a:avLst/>
+          </a:prstGeom>
+          <a:solidFill>
+            <a:srgbClr val="F5F7FA"/>
+          </a:solidFill>
+          <a:ln>
+            <a:noFill/>
+          </a:ln>
+        </p:spPr>
+        <p:style>
+          <a:lnRef idx="1">
+            <a:schemeClr val="accent1"/>
+          </a:lnRef>
+          <a:fillRef idx="3">
+            <a:schemeClr val="accent1"/>
+          </a:fillRef>
+          <a:effectRef idx="2">
+            <a:schemeClr val="accent1"/>
+          </a:effectRef>
+          <a:fontRef idx="minor">
+            <a:schemeClr val="lt1"/>
+          </a:fontRef>
+        </p:style>
+        <p:txBody>
+          <a:bodyPr rtlCol="0" anchor="ctr"/>
+          <a:lstStyle/>
+          <a:p>
+            <a:pPr algn="ctr"/>
+          </a:p>
+        </p:txBody>
+      </p:sp>
+      <p:sp>
+        <p:nvSpPr>
+          <p:cNvPr id="70" name="Rectangle 69"/>
+          <p:cNvSpPr/>
+          <p:nvPr/>
+        </p:nvSpPr>
+        <p:spPr>
+          <a:xfrm>
+            <a:off x="6083999" y="900000"/>
+            <a:ext cx="36000" cy="4031999"/>
           </a:xfrm>
           <a:prstGeom prst="rect">
             <a:avLst/>
@@ -8233,14 +9513,14 @@
       </p:sp>
       <p:sp>
         <p:nvSpPr>
-          <p:cNvPr id="46" name="TextBox 45"/>
+          <p:cNvPr id="71" name="TextBox 70"/>
           <p:cNvSpPr txBox="1"/>
           <p:nvPr/>
         </p:nvSpPr>
         <p:spPr>
           <a:xfrm>
-            <a:off x="5112000" y="979200"/>
-            <a:ext cx="792000" cy="234000"/>
+            <a:off x="6227999" y="972000"/>
+            <a:ext cx="1655999" cy="288000"/>
           </a:xfrm>
           <a:prstGeom prst="rect">
             <a:avLst/>
@@ -8253,28 +9533,71 @@
           </a:bodyPr>
           <a:lstStyle/>
           <a:p>
-            <a:pPr algn="ctr"/>
-            <a:r>
-              <a:rPr sz="900" b="1" i="0">
-                <a:solidFill>
-                  <a:srgbClr val="FFFFFF"/>
+            <a:pPr algn="l"/>
+            <a:r>
+              <a:rPr sz="1300" b="1" i="0">
+                <a:solidFill>
+                  <a:srgbClr val="1B3A6B"/>
                 </a:solidFill>
               </a:rPr>
-              <a:t>HOLD</a:t>
-            </a:r>
-          </a:p>
-        </p:txBody>
-      </p:sp>
-      <p:sp>
-        <p:nvSpPr>
-          <p:cNvPr id="47" name="TextBox 46"/>
+              <a:t>PG</a:t>
+            </a:r>
+          </a:p>
+        </p:txBody>
+      </p:sp>
+      <p:sp>
+        <p:nvSpPr>
+          <p:cNvPr id="72" name="Rectangle 71"/>
+          <p:cNvSpPr/>
+          <p:nvPr/>
+        </p:nvSpPr>
+        <p:spPr>
+          <a:xfrm>
+            <a:off x="7992000" y="972000"/>
+            <a:ext cx="792000" cy="251999"/>
+          </a:xfrm>
+          <a:prstGeom prst="rect">
+            <a:avLst/>
+          </a:prstGeom>
+          <a:solidFill>
+            <a:srgbClr val="B06000"/>
+          </a:solidFill>
+          <a:ln>
+            <a:noFill/>
+          </a:ln>
+        </p:spPr>
+        <p:style>
+          <a:lnRef idx="1">
+            <a:schemeClr val="accent1"/>
+          </a:lnRef>
+          <a:fillRef idx="3">
+            <a:schemeClr val="accent1"/>
+          </a:fillRef>
+          <a:effectRef idx="2">
+            <a:schemeClr val="accent1"/>
+          </a:effectRef>
+          <a:fontRef idx="minor">
+            <a:schemeClr val="lt1"/>
+          </a:fontRef>
+        </p:style>
+        <p:txBody>
+          <a:bodyPr rtlCol="0" anchor="ctr"/>
+          <a:lstStyle/>
+          <a:p>
+            <a:pPr algn="ctr"/>
+          </a:p>
+        </p:txBody>
+      </p:sp>
+      <p:sp>
+        <p:nvSpPr>
+          <p:cNvPr id="73" name="TextBox 72"/>
           <p:cNvSpPr txBox="1"/>
           <p:nvPr/>
         </p:nvSpPr>
         <p:spPr>
           <a:xfrm>
-            <a:off x="3348000" y="1260000"/>
-            <a:ext cx="2556000" cy="180000"/>
+            <a:off x="7992000" y="979200"/>
+            <a:ext cx="792000" cy="234000"/>
           </a:xfrm>
           <a:prstGeom prst="rect">
             <a:avLst/>
@@ -8287,6 +9610,40 @@
           </a:bodyPr>
           <a:lstStyle/>
           <a:p>
+            <a:pPr algn="ctr"/>
+            <a:r>
+              <a:rPr sz="900" b="1" i="0">
+                <a:solidFill>
+                  <a:srgbClr val="FFFFFF"/>
+                </a:solidFill>
+              </a:rPr>
+              <a:t>HOLD</a:t>
+            </a:r>
+          </a:p>
+        </p:txBody>
+      </p:sp>
+      <p:sp>
+        <p:nvSpPr>
+          <p:cNvPr id="74" name="TextBox 73"/>
+          <p:cNvSpPr txBox="1"/>
+          <p:nvPr/>
+        </p:nvSpPr>
+        <p:spPr>
+          <a:xfrm>
+            <a:off x="6227999" y="1260000"/>
+            <a:ext cx="2556000" cy="180000"/>
+          </a:xfrm>
+          <a:prstGeom prst="rect">
+            <a:avLst/>
+          </a:prstGeom>
+          <a:noFill/>
+        </p:spPr>
+        <p:txBody>
+          <a:bodyPr wrap="square">
+            <a:spAutoFit/>
+          </a:bodyPr>
+          <a:lstStyle/>
+          <a:p>
             <a:pPr algn="l"/>
             <a:r>
               <a:rPr sz="800" b="0" i="0">
@@ -8294,20 +9651,20 @@
                   <a:srgbClr val="555555"/>
                 </a:solidFill>
               </a:rPr>
-              <a:t>Consumer Defensive C</a:t>
-            </a:r>
-          </a:p>
-        </p:txBody>
-      </p:sp>
-      <p:sp>
-        <p:nvSpPr>
-          <p:cNvPr id="48" name="Rectangle 47"/>
+              <a:t>The Procter &amp; Gamble</a:t>
+            </a:r>
+          </a:p>
+        </p:txBody>
+      </p:sp>
+      <p:sp>
+        <p:nvSpPr>
+          <p:cNvPr id="75" name="Rectangle 74"/>
           <p:cNvSpPr/>
           <p:nvPr/>
         </p:nvSpPr>
         <p:spPr>
           <a:xfrm>
-            <a:off x="3348000" y="1512000"/>
+            <a:off x="6227999" y="1512000"/>
             <a:ext cx="2556000" cy="432000"/>
           </a:xfrm>
           <a:prstGeom prst="rect">
@@ -8344,13 +9701,13 @@
       </p:sp>
       <p:sp>
         <p:nvSpPr>
-          <p:cNvPr id="49" name="TextBox 48"/>
+          <p:cNvPr id="76" name="TextBox 75"/>
           <p:cNvSpPr txBox="1"/>
           <p:nvPr/>
         </p:nvSpPr>
         <p:spPr>
           <a:xfrm>
-            <a:off x="3384000" y="1548000"/>
+            <a:off x="6263999" y="1548000"/>
             <a:ext cx="1368000" cy="216000"/>
           </a:xfrm>
           <a:prstGeom prst="rect">
@@ -8371,20 +9728,20 @@
                   <a:srgbClr val="FFFFFF"/>
                 </a:solidFill>
               </a:rPr>
-              <a:t>Cible : 130</a:t>
-            </a:r>
-          </a:p>
-        </p:txBody>
-      </p:sp>
-      <p:sp>
-        <p:nvSpPr>
-          <p:cNvPr id="50" name="TextBox 49"/>
+              <a:t>Cible : 154</a:t>
+            </a:r>
+          </a:p>
+        </p:txBody>
+      </p:sp>
+      <p:sp>
+        <p:nvSpPr>
+          <p:cNvPr id="77" name="TextBox 76"/>
           <p:cNvSpPr txBox="1"/>
           <p:nvPr/>
         </p:nvSpPr>
         <p:spPr>
           <a:xfrm>
-            <a:off x="4788000" y="1548000"/>
+            <a:off x="7667999" y="1548000"/>
             <a:ext cx="1080000" cy="216000"/>
           </a:xfrm>
           <a:prstGeom prst="rect">
@@ -8412,13 +9769,13 @@
       </p:sp>
       <p:sp>
         <p:nvSpPr>
-          <p:cNvPr id="51" name="TextBox 50"/>
+          <p:cNvPr id="78" name="TextBox 77"/>
           <p:cNvSpPr txBox="1"/>
           <p:nvPr/>
         </p:nvSpPr>
         <p:spPr>
           <a:xfrm>
-            <a:off x="3348000" y="2015999"/>
+            <a:off x="6227999" y="2015999"/>
             <a:ext cx="2556000" cy="180000"/>
           </a:xfrm>
           <a:prstGeom prst="rect">
@@ -8446,13 +9803,13 @@
       </p:sp>
       <p:sp>
         <p:nvSpPr>
-          <p:cNvPr id="52" name="Rectangle 51"/>
+          <p:cNvPr id="79" name="Rectangle 78"/>
           <p:cNvSpPr/>
           <p:nvPr/>
         </p:nvSpPr>
         <p:spPr>
           <a:xfrm>
-            <a:off x="3348000" y="2196000"/>
+            <a:off x="6227999" y="2196000"/>
             <a:ext cx="2556000" cy="259200"/>
           </a:xfrm>
           <a:prstGeom prst="rect">
@@ -8489,13 +9846,13 @@
       </p:sp>
       <p:sp>
         <p:nvSpPr>
-          <p:cNvPr id="53" name="TextBox 52"/>
+          <p:cNvPr id="80" name="TextBox 79"/>
           <p:cNvSpPr txBox="1"/>
           <p:nvPr/>
         </p:nvSpPr>
         <p:spPr>
           <a:xfrm>
-            <a:off x="3384000" y="2214000"/>
+            <a:off x="6263999" y="2214000"/>
             <a:ext cx="1368000" cy="223200"/>
           </a:xfrm>
           <a:prstGeom prst="rect">
@@ -8523,13 +9880,13 @@
       </p:sp>
       <p:sp>
         <p:nvSpPr>
-          <p:cNvPr id="54" name="TextBox 53"/>
+          <p:cNvPr id="81" name="TextBox 80"/>
           <p:cNvSpPr txBox="1"/>
           <p:nvPr/>
         </p:nvSpPr>
         <p:spPr>
           <a:xfrm>
-            <a:off x="4788000" y="2214000"/>
+            <a:off x="7667999" y="2214000"/>
             <a:ext cx="1080000" cy="223200"/>
           </a:xfrm>
           <a:prstGeom prst="rect">
@@ -8550,20 +9907,20 @@
                   <a:srgbClr val="1B3A6B"/>
                 </a:solidFill>
               </a:rPr>
-              <a:t>14.0x</a:t>
-            </a:r>
-          </a:p>
-        </p:txBody>
-      </p:sp>
-      <p:sp>
-        <p:nvSpPr>
-          <p:cNvPr id="55" name="Rectangle 54"/>
+              <a:t>14.4x</a:t>
+            </a:r>
+          </a:p>
+        </p:txBody>
+      </p:sp>
+      <p:sp>
+        <p:nvSpPr>
+          <p:cNvPr id="82" name="Rectangle 81"/>
           <p:cNvSpPr/>
           <p:nvPr/>
         </p:nvSpPr>
         <p:spPr>
           <a:xfrm>
-            <a:off x="3348000" y="2466000"/>
+            <a:off x="6227999" y="2466000"/>
             <a:ext cx="2556000" cy="259200"/>
           </a:xfrm>
           <a:prstGeom prst="rect">
@@ -8600,13 +9957,13 @@
       </p:sp>
       <p:sp>
         <p:nvSpPr>
-          <p:cNvPr id="56" name="TextBox 55"/>
+          <p:cNvPr id="83" name="TextBox 82"/>
           <p:cNvSpPr txBox="1"/>
           <p:nvPr/>
         </p:nvSpPr>
         <p:spPr>
           <a:xfrm>
-            <a:off x="3384000" y="2484000"/>
+            <a:off x="6263999" y="2484000"/>
             <a:ext cx="1368000" cy="223200"/>
           </a:xfrm>
           <a:prstGeom prst="rect">
@@ -8634,13 +9991,13 @@
       </p:sp>
       <p:sp>
         <p:nvSpPr>
-          <p:cNvPr id="57" name="TextBox 56"/>
+          <p:cNvPr id="84" name="TextBox 83"/>
           <p:cNvSpPr txBox="1"/>
           <p:nvPr/>
         </p:nvSpPr>
         <p:spPr>
           <a:xfrm>
-            <a:off x="4788000" y="2484000"/>
+            <a:off x="7667999" y="2484000"/>
             <a:ext cx="1080000" cy="223200"/>
           </a:xfrm>
           <a:prstGeom prst="rect">
@@ -8661,20 +10018,20 @@
                   <a:srgbClr val="1B3A6B"/>
                 </a:solidFill>
               </a:rPr>
-              <a:t>23.2 %</a:t>
-            </a:r>
-          </a:p>
-        </p:txBody>
-      </p:sp>
-      <p:sp>
-        <p:nvSpPr>
-          <p:cNvPr id="58" name="Rectangle 57"/>
+              <a:t>29.0 %</a:t>
+            </a:r>
+          </a:p>
+        </p:txBody>
+      </p:sp>
+      <p:sp>
+        <p:nvSpPr>
+          <p:cNvPr id="85" name="Rectangle 84"/>
           <p:cNvSpPr/>
           <p:nvPr/>
         </p:nvSpPr>
         <p:spPr>
           <a:xfrm>
-            <a:off x="3348000" y="2736000"/>
+            <a:off x="6227999" y="2736000"/>
             <a:ext cx="2556000" cy="259200"/>
           </a:xfrm>
           <a:prstGeom prst="rect">
@@ -8711,13 +10068,13 @@
       </p:sp>
       <p:sp>
         <p:nvSpPr>
-          <p:cNvPr id="59" name="TextBox 58"/>
+          <p:cNvPr id="86" name="TextBox 85"/>
           <p:cNvSpPr txBox="1"/>
           <p:nvPr/>
         </p:nvSpPr>
         <p:spPr>
           <a:xfrm>
-            <a:off x="3384000" y="2754000"/>
+            <a:off x="6263999" y="2754000"/>
             <a:ext cx="1368000" cy="223200"/>
           </a:xfrm>
           <a:prstGeom prst="rect">
@@ -8745,13 +10102,13 @@
       </p:sp>
       <p:sp>
         <p:nvSpPr>
-          <p:cNvPr id="60" name="TextBox 59"/>
+          <p:cNvPr id="87" name="TextBox 86"/>
           <p:cNvSpPr txBox="1"/>
           <p:nvPr/>
         </p:nvSpPr>
         <p:spPr>
           <a:xfrm>
-            <a:off x="4788000" y="2754000"/>
+            <a:off x="7667999" y="2754000"/>
             <a:ext cx="1080000" cy="223200"/>
           </a:xfrm>
           <a:prstGeom prst="rect">
@@ -8772,1024 +10129,7 @@
                   <a:srgbClr val="1B3A6B"/>
                 </a:solidFill>
               </a:rPr>
-              <a:t>3.2</a:t>
-            </a:r>
-          </a:p>
-        </p:txBody>
-      </p:sp>
-      <p:sp>
-        <p:nvSpPr>
-          <p:cNvPr id="61" name="TextBox 60"/>
-          <p:cNvSpPr txBox="1"/>
-          <p:nvPr/>
-        </p:nvSpPr>
-        <p:spPr>
-          <a:xfrm>
-            <a:off x="3348000" y="3060000"/>
-            <a:ext cx="2556000" cy="180000"/>
-          </a:xfrm>
-          <a:prstGeom prst="rect">
-            <a:avLst/>
-          </a:prstGeom>
-          <a:noFill/>
-        </p:spPr>
-        <p:txBody>
-          <a:bodyPr wrap="square">
-            <a:spAutoFit/>
-          </a:bodyPr>
-          <a:lstStyle/>
-          <a:p>
-            <a:pPr algn="l"/>
-            <a:r>
-              <a:rPr sz="750" b="1" i="0">
-                <a:solidFill>
-                  <a:srgbClr val="1A7A4A"/>
-                </a:solidFill>
-              </a:rPr>
-              <a:t>Catalyseur</a:t>
-            </a:r>
-          </a:p>
-        </p:txBody>
-      </p:sp>
-      <p:sp>
-        <p:nvSpPr>
-          <p:cNvPr id="62" name="Rectangle 61"/>
-          <p:cNvSpPr/>
-          <p:nvPr/>
-        </p:nvSpPr>
-        <p:spPr>
-          <a:xfrm>
-            <a:off x="3348000" y="3240000"/>
-            <a:ext cx="2556000" cy="503999"/>
-          </a:xfrm>
-          <a:prstGeom prst="rect">
-            <a:avLst/>
-          </a:prstGeom>
-          <a:solidFill>
-            <a:srgbClr val="E8F5EE"/>
-          </a:solidFill>
-          <a:ln>
-            <a:noFill/>
-          </a:ln>
-        </p:spPr>
-        <p:style>
-          <a:lnRef idx="1">
-            <a:schemeClr val="accent1"/>
-          </a:lnRef>
-          <a:fillRef idx="3">
-            <a:schemeClr val="accent1"/>
-          </a:fillRef>
-          <a:effectRef idx="2">
-            <a:schemeClr val="accent1"/>
-          </a:effectRef>
-          <a:fontRef idx="minor">
-            <a:schemeClr val="lt1"/>
-          </a:fontRef>
-        </p:style>
-        <p:txBody>
-          <a:bodyPr rtlCol="0" anchor="ctr"/>
-          <a:lstStyle/>
-          <a:p>
-            <a:pPr algn="ctr"/>
-          </a:p>
-        </p:txBody>
-      </p:sp>
-      <p:sp>
-        <p:nvSpPr>
-          <p:cNvPr id="63" name="Rectangle 62"/>
-          <p:cNvSpPr/>
-          <p:nvPr/>
-        </p:nvSpPr>
-        <p:spPr>
-          <a:xfrm>
-            <a:off x="3348000" y="3240000"/>
-            <a:ext cx="36000" cy="503999"/>
-          </a:xfrm>
-          <a:prstGeom prst="rect">
-            <a:avLst/>
-          </a:prstGeom>
-          <a:solidFill>
-            <a:srgbClr val="1A7A4A"/>
-          </a:solidFill>
-          <a:ln>
-            <a:noFill/>
-          </a:ln>
-        </p:spPr>
-        <p:style>
-          <a:lnRef idx="1">
-            <a:schemeClr val="accent1"/>
-          </a:lnRef>
-          <a:fillRef idx="3">
-            <a:schemeClr val="accent1"/>
-          </a:fillRef>
-          <a:effectRef idx="2">
-            <a:schemeClr val="accent1"/>
-          </a:effectRef>
-          <a:fontRef idx="minor">
-            <a:schemeClr val="lt1"/>
-          </a:fontRef>
-        </p:style>
-        <p:txBody>
-          <a:bodyPr rtlCol="0" anchor="ctr"/>
-          <a:lstStyle/>
-          <a:p>
-            <a:pPr algn="ctr"/>
-          </a:p>
-        </p:txBody>
-      </p:sp>
-      <p:sp>
-        <p:nvSpPr>
-          <p:cNvPr id="64" name="TextBox 63"/>
-          <p:cNvSpPr txBox="1"/>
-          <p:nvPr/>
-        </p:nvSpPr>
-        <p:spPr>
-          <a:xfrm>
-            <a:off x="3420000" y="3258000"/>
-            <a:ext cx="2412000" cy="450000"/>
-          </a:xfrm>
-          <a:prstGeom prst="rect">
-            <a:avLst/>
-          </a:prstGeom>
-          <a:noFill/>
-        </p:spPr>
-        <p:txBody>
-          <a:bodyPr wrap="square">
-            <a:spAutoFit/>
-          </a:bodyPr>
-          <a:lstStyle/>
-          <a:p>
-            <a:pPr algn="l"/>
-            <a:r>
-              <a:rPr sz="750" b="0" i="0">
-                <a:solidFill>
-                  <a:srgbClr val="555555"/>
-                </a:solidFill>
-              </a:rPr>
-              <a:t>Croissance de la classe moyenne en Afrique et Asie du Sud-Est — expansion a double chiffre.</a:t>
-            </a:r>
-          </a:p>
-        </p:txBody>
-      </p:sp>
-      <p:sp>
-        <p:nvSpPr>
-          <p:cNvPr id="65" name="TextBox 64"/>
-          <p:cNvSpPr txBox="1"/>
-          <p:nvPr/>
-        </p:nvSpPr>
-        <p:spPr>
-          <a:xfrm>
-            <a:off x="3348000" y="3780000"/>
-            <a:ext cx="2556000" cy="180000"/>
-          </a:xfrm>
-          <a:prstGeom prst="rect">
-            <a:avLst/>
-          </a:prstGeom>
-          <a:noFill/>
-        </p:spPr>
-        <p:txBody>
-          <a:bodyPr wrap="square">
-            <a:spAutoFit/>
-          </a:bodyPr>
-          <a:lstStyle/>
-          <a:p>
-            <a:pPr algn="l"/>
-            <a:r>
-              <a:rPr sz="750" b="1" i="0">
-                <a:solidFill>
-                  <a:srgbClr val="A82020"/>
-                </a:solidFill>
-              </a:rPr>
-              <a:t>Risque principal</a:t>
-            </a:r>
-          </a:p>
-        </p:txBody>
-      </p:sp>
-      <p:sp>
-        <p:nvSpPr>
-          <p:cNvPr id="66" name="Rectangle 65"/>
-          <p:cNvSpPr/>
-          <p:nvPr/>
-        </p:nvSpPr>
-        <p:spPr>
-          <a:xfrm>
-            <a:off x="3348000" y="3996000"/>
-            <a:ext cx="2556000" cy="503999"/>
-          </a:xfrm>
-          <a:prstGeom prst="rect">
-            <a:avLst/>
-          </a:prstGeom>
-          <a:solidFill>
-            <a:srgbClr val="FBEBEB"/>
-          </a:solidFill>
-          <a:ln>
-            <a:noFill/>
-          </a:ln>
-        </p:spPr>
-        <p:style>
-          <a:lnRef idx="1">
-            <a:schemeClr val="accent1"/>
-          </a:lnRef>
-          <a:fillRef idx="3">
-            <a:schemeClr val="accent1"/>
-          </a:fillRef>
-          <a:effectRef idx="2">
-            <a:schemeClr val="accent1"/>
-          </a:effectRef>
-          <a:fontRef idx="minor">
-            <a:schemeClr val="lt1"/>
-          </a:fontRef>
-        </p:style>
-        <p:txBody>
-          <a:bodyPr rtlCol="0" anchor="ctr"/>
-          <a:lstStyle/>
-          <a:p>
-            <a:pPr algn="ctr"/>
-          </a:p>
-        </p:txBody>
-      </p:sp>
-      <p:sp>
-        <p:nvSpPr>
-          <p:cNvPr id="67" name="Rectangle 66"/>
-          <p:cNvSpPr/>
-          <p:nvPr/>
-        </p:nvSpPr>
-        <p:spPr>
-          <a:xfrm>
-            <a:off x="3348000" y="3996000"/>
-            <a:ext cx="36000" cy="503999"/>
-          </a:xfrm>
-          <a:prstGeom prst="rect">
-            <a:avLst/>
-          </a:prstGeom>
-          <a:solidFill>
-            <a:srgbClr val="A82020"/>
-          </a:solidFill>
-          <a:ln>
-            <a:noFill/>
-          </a:ln>
-        </p:spPr>
-        <p:style>
-          <a:lnRef idx="1">
-            <a:schemeClr val="accent1"/>
-          </a:lnRef>
-          <a:fillRef idx="3">
-            <a:schemeClr val="accent1"/>
-          </a:fillRef>
-          <a:effectRef idx="2">
-            <a:schemeClr val="accent1"/>
-          </a:effectRef>
-          <a:fontRef idx="minor">
-            <a:schemeClr val="lt1"/>
-          </a:fontRef>
-        </p:style>
-        <p:txBody>
-          <a:bodyPr rtlCol="0" anchor="ctr"/>
-          <a:lstStyle/>
-          <a:p>
-            <a:pPr algn="ctr"/>
-          </a:p>
-        </p:txBody>
-      </p:sp>
-      <p:sp>
-        <p:nvSpPr>
-          <p:cNvPr id="68" name="TextBox 67"/>
-          <p:cNvSpPr txBox="1"/>
-          <p:nvPr/>
-        </p:nvSpPr>
-        <p:spPr>
-          <a:xfrm>
-            <a:off x="3420000" y="4014000"/>
-            <a:ext cx="2412000" cy="450000"/>
-          </a:xfrm>
-          <a:prstGeom prst="rect">
-            <a:avLst/>
-          </a:prstGeom>
-          <a:noFill/>
-        </p:spPr>
-        <p:txBody>
-          <a:bodyPr wrap="square">
-            <a:spAutoFit/>
-          </a:bodyPr>
-          <a:lstStyle/>
-          <a:p>
-            <a:pPr algn="l"/>
-            <a:r>
-              <a:rPr sz="750" b="0" i="0">
-                <a:solidFill>
-                  <a:srgbClr val="555555"/>
-                </a:solidFill>
-              </a:rPr>
-              <a:t>Reduction des stocks en distribution — impact sur volumes T1-T2 2026.</a:t>
-            </a:r>
-          </a:p>
-        </p:txBody>
-      </p:sp>
-      <p:sp>
-        <p:nvSpPr>
-          <p:cNvPr id="69" name="Rectangle 68"/>
-          <p:cNvSpPr/>
-          <p:nvPr/>
-        </p:nvSpPr>
-        <p:spPr>
-          <a:xfrm>
-            <a:off x="6083999" y="900000"/>
-            <a:ext cx="2736000" cy="4031999"/>
-          </a:xfrm>
-          <a:prstGeom prst="rect">
-            <a:avLst/>
-          </a:prstGeom>
-          <a:solidFill>
-            <a:srgbClr val="F5F7FA"/>
-          </a:solidFill>
-          <a:ln>
-            <a:noFill/>
-          </a:ln>
-        </p:spPr>
-        <p:style>
-          <a:lnRef idx="1">
-            <a:schemeClr val="accent1"/>
-          </a:lnRef>
-          <a:fillRef idx="3">
-            <a:schemeClr val="accent1"/>
-          </a:fillRef>
-          <a:effectRef idx="2">
-            <a:schemeClr val="accent1"/>
-          </a:effectRef>
-          <a:fontRef idx="minor">
-            <a:schemeClr val="lt1"/>
-          </a:fontRef>
-        </p:style>
-        <p:txBody>
-          <a:bodyPr rtlCol="0" anchor="ctr"/>
-          <a:lstStyle/>
-          <a:p>
-            <a:pPr algn="ctr"/>
-          </a:p>
-        </p:txBody>
-      </p:sp>
-      <p:sp>
-        <p:nvSpPr>
-          <p:cNvPr id="70" name="Rectangle 69"/>
-          <p:cNvSpPr/>
-          <p:nvPr/>
-        </p:nvSpPr>
-        <p:spPr>
-          <a:xfrm>
-            <a:off x="6083999" y="900000"/>
-            <a:ext cx="36000" cy="4031999"/>
-          </a:xfrm>
-          <a:prstGeom prst="rect">
-            <a:avLst/>
-          </a:prstGeom>
-          <a:solidFill>
-            <a:srgbClr val="B06000"/>
-          </a:solidFill>
-          <a:ln>
-            <a:noFill/>
-          </a:ln>
-        </p:spPr>
-        <p:style>
-          <a:lnRef idx="1">
-            <a:schemeClr val="accent1"/>
-          </a:lnRef>
-          <a:fillRef idx="3">
-            <a:schemeClr val="accent1"/>
-          </a:fillRef>
-          <a:effectRef idx="2">
-            <a:schemeClr val="accent1"/>
-          </a:effectRef>
-          <a:fontRef idx="minor">
-            <a:schemeClr val="lt1"/>
-          </a:fontRef>
-        </p:style>
-        <p:txBody>
-          <a:bodyPr rtlCol="0" anchor="ctr"/>
-          <a:lstStyle/>
-          <a:p>
-            <a:pPr algn="ctr"/>
-          </a:p>
-        </p:txBody>
-      </p:sp>
-      <p:sp>
-        <p:nvSpPr>
-          <p:cNvPr id="71" name="TextBox 70"/>
-          <p:cNvSpPr txBox="1"/>
-          <p:nvPr/>
-        </p:nvSpPr>
-        <p:spPr>
-          <a:xfrm>
-            <a:off x="6227999" y="972000"/>
-            <a:ext cx="1655999" cy="288000"/>
-          </a:xfrm>
-          <a:prstGeom prst="rect">
-            <a:avLst/>
-          </a:prstGeom>
-          <a:noFill/>
-        </p:spPr>
-        <p:txBody>
-          <a:bodyPr wrap="square">
-            <a:spAutoFit/>
-          </a:bodyPr>
-          <a:lstStyle/>
-          <a:p>
-            <a:pPr algn="l"/>
-            <a:r>
-              <a:rPr sz="1300" b="1" i="0">
-                <a:solidFill>
-                  <a:srgbClr val="1B3A6B"/>
-                </a:solidFill>
-              </a:rPr>
-              <a:t>CON4</a:t>
-            </a:r>
-          </a:p>
-        </p:txBody>
-      </p:sp>
-      <p:sp>
-        <p:nvSpPr>
-          <p:cNvPr id="72" name="Rectangle 71"/>
-          <p:cNvSpPr/>
-          <p:nvPr/>
-        </p:nvSpPr>
-        <p:spPr>
-          <a:xfrm>
-            <a:off x="7992000" y="972000"/>
-            <a:ext cx="792000" cy="251999"/>
-          </a:xfrm>
-          <a:prstGeom prst="rect">
-            <a:avLst/>
-          </a:prstGeom>
-          <a:solidFill>
-            <a:srgbClr val="B06000"/>
-          </a:solidFill>
-          <a:ln>
-            <a:noFill/>
-          </a:ln>
-        </p:spPr>
-        <p:style>
-          <a:lnRef idx="1">
-            <a:schemeClr val="accent1"/>
-          </a:lnRef>
-          <a:fillRef idx="3">
-            <a:schemeClr val="accent1"/>
-          </a:fillRef>
-          <a:effectRef idx="2">
-            <a:schemeClr val="accent1"/>
-          </a:effectRef>
-          <a:fontRef idx="minor">
-            <a:schemeClr val="lt1"/>
-          </a:fontRef>
-        </p:style>
-        <p:txBody>
-          <a:bodyPr rtlCol="0" anchor="ctr"/>
-          <a:lstStyle/>
-          <a:p>
-            <a:pPr algn="ctr"/>
-          </a:p>
-        </p:txBody>
-      </p:sp>
-      <p:sp>
-        <p:nvSpPr>
-          <p:cNvPr id="73" name="TextBox 72"/>
-          <p:cNvSpPr txBox="1"/>
-          <p:nvPr/>
-        </p:nvSpPr>
-        <p:spPr>
-          <a:xfrm>
-            <a:off x="7992000" y="979200"/>
-            <a:ext cx="792000" cy="234000"/>
-          </a:xfrm>
-          <a:prstGeom prst="rect">
-            <a:avLst/>
-          </a:prstGeom>
-          <a:noFill/>
-        </p:spPr>
-        <p:txBody>
-          <a:bodyPr wrap="square">
-            <a:spAutoFit/>
-          </a:bodyPr>
-          <a:lstStyle/>
-          <a:p>
-            <a:pPr algn="ctr"/>
-            <a:r>
-              <a:rPr sz="900" b="1" i="0">
-                <a:solidFill>
-                  <a:srgbClr val="FFFFFF"/>
-                </a:solidFill>
-              </a:rPr>
-              <a:t>HOLD</a:t>
-            </a:r>
-          </a:p>
-        </p:txBody>
-      </p:sp>
-      <p:sp>
-        <p:nvSpPr>
-          <p:cNvPr id="74" name="TextBox 73"/>
-          <p:cNvSpPr txBox="1"/>
-          <p:nvPr/>
-        </p:nvSpPr>
-        <p:spPr>
-          <a:xfrm>
-            <a:off x="6227999" y="1260000"/>
-            <a:ext cx="2556000" cy="180000"/>
-          </a:xfrm>
-          <a:prstGeom prst="rect">
-            <a:avLst/>
-          </a:prstGeom>
-          <a:noFill/>
-        </p:spPr>
-        <p:txBody>
-          <a:bodyPr wrap="square">
-            <a:spAutoFit/>
-          </a:bodyPr>
-          <a:lstStyle/>
-          <a:p>
-            <a:pPr algn="l"/>
-            <a:r>
-              <a:rPr sz="800" b="0" i="0">
-                <a:solidFill>
-                  <a:srgbClr val="555555"/>
-                </a:solidFill>
-              </a:rPr>
-              <a:t>Consumer Defensive C</a:t>
-            </a:r>
-          </a:p>
-        </p:txBody>
-      </p:sp>
-      <p:sp>
-        <p:nvSpPr>
-          <p:cNvPr id="75" name="Rectangle 74"/>
-          <p:cNvSpPr/>
-          <p:nvPr/>
-        </p:nvSpPr>
-        <p:spPr>
-          <a:xfrm>
-            <a:off x="6227999" y="1512000"/>
-            <a:ext cx="2556000" cy="432000"/>
-          </a:xfrm>
-          <a:prstGeom prst="rect">
-            <a:avLst/>
-          </a:prstGeom>
-          <a:solidFill>
-            <a:srgbClr val="2A5298"/>
-          </a:solidFill>
-          <a:ln>
-            <a:noFill/>
-          </a:ln>
-        </p:spPr>
-        <p:style>
-          <a:lnRef idx="1">
-            <a:schemeClr val="accent1"/>
-          </a:lnRef>
-          <a:fillRef idx="3">
-            <a:schemeClr val="accent1"/>
-          </a:fillRef>
-          <a:effectRef idx="2">
-            <a:schemeClr val="accent1"/>
-          </a:effectRef>
-          <a:fontRef idx="minor">
-            <a:schemeClr val="lt1"/>
-          </a:fontRef>
-        </p:style>
-        <p:txBody>
-          <a:bodyPr rtlCol="0" anchor="ctr"/>
-          <a:lstStyle/>
-          <a:p>
-            <a:pPr algn="ctr"/>
-          </a:p>
-        </p:txBody>
-      </p:sp>
-      <p:sp>
-        <p:nvSpPr>
-          <p:cNvPr id="76" name="TextBox 75"/>
-          <p:cNvSpPr txBox="1"/>
-          <p:nvPr/>
-        </p:nvSpPr>
-        <p:spPr>
-          <a:xfrm>
-            <a:off x="6263999" y="1548000"/>
-            <a:ext cx="1368000" cy="216000"/>
-          </a:xfrm>
-          <a:prstGeom prst="rect">
-            <a:avLst/>
-          </a:prstGeom>
-          <a:noFill/>
-        </p:spPr>
-        <p:txBody>
-          <a:bodyPr wrap="square">
-            <a:spAutoFit/>
-          </a:bodyPr>
-          <a:lstStyle/>
-          <a:p>
-            <a:pPr algn="l"/>
-            <a:r>
-              <a:rPr sz="900" b="1" i="0">
-                <a:solidFill>
-                  <a:srgbClr val="FFFFFF"/>
-                </a:solidFill>
-              </a:rPr>
-              <a:t>Cible : 119</a:t>
-            </a:r>
-          </a:p>
-        </p:txBody>
-      </p:sp>
-      <p:sp>
-        <p:nvSpPr>
-          <p:cNvPr id="77" name="TextBox 76"/>
-          <p:cNvSpPr txBox="1"/>
-          <p:nvPr/>
-        </p:nvSpPr>
-        <p:spPr>
-          <a:xfrm>
-            <a:off x="7667999" y="1548000"/>
-            <a:ext cx="1080000" cy="216000"/>
-          </a:xfrm>
-          <a:prstGeom prst="rect">
-            <a:avLst/>
-          </a:prstGeom>
-          <a:noFill/>
-        </p:spPr>
-        <p:txBody>
-          <a:bodyPr wrap="square">
-            <a:spAutoFit/>
-          </a:bodyPr>
-          <a:lstStyle/>
-          <a:p>
-            <a:pPr algn="l"/>
-            <a:r>
-              <a:rPr sz="900" b="0" i="0">
-                <a:solidFill>
-                  <a:srgbClr val="FFFFFF"/>
-                </a:solidFill>
-              </a:rPr>
-              <a:t>Upside : +8 %</a:t>
-            </a:r>
-          </a:p>
-        </p:txBody>
-      </p:sp>
-      <p:sp>
-        <p:nvSpPr>
-          <p:cNvPr id="78" name="TextBox 77"/>
-          <p:cNvSpPr txBox="1"/>
-          <p:nvPr/>
-        </p:nvSpPr>
-        <p:spPr>
-          <a:xfrm>
-            <a:off x="6227999" y="2015999"/>
-            <a:ext cx="2556000" cy="180000"/>
-          </a:xfrm>
-          <a:prstGeom prst="rect">
-            <a:avLst/>
-          </a:prstGeom>
-          <a:noFill/>
-        </p:spPr>
-        <p:txBody>
-          <a:bodyPr wrap="square">
-            <a:spAutoFit/>
-          </a:bodyPr>
-          <a:lstStyle/>
-          <a:p>
-            <a:pPr algn="l"/>
-            <a:r>
-              <a:rPr sz="750" b="1" i="0">
-                <a:solidFill>
-                  <a:srgbClr val="1B3A6B"/>
-                </a:solidFill>
-              </a:rPr>
-              <a:t>Ratios cles</a:t>
-            </a:r>
-          </a:p>
-        </p:txBody>
-      </p:sp>
-      <p:sp>
-        <p:nvSpPr>
-          <p:cNvPr id="79" name="Rectangle 78"/>
-          <p:cNvSpPr/>
-          <p:nvPr/>
-        </p:nvSpPr>
-        <p:spPr>
-          <a:xfrm>
-            <a:off x="6227999" y="2196000"/>
-            <a:ext cx="2556000" cy="259200"/>
-          </a:xfrm>
-          <a:prstGeom prst="rect">
-            <a:avLst/>
-          </a:prstGeom>
-          <a:solidFill>
-            <a:srgbClr val="E8ECF0"/>
-          </a:solidFill>
-          <a:ln>
-            <a:noFill/>
-          </a:ln>
-        </p:spPr>
-        <p:style>
-          <a:lnRef idx="1">
-            <a:schemeClr val="accent1"/>
-          </a:lnRef>
-          <a:fillRef idx="3">
-            <a:schemeClr val="accent1"/>
-          </a:fillRef>
-          <a:effectRef idx="2">
-            <a:schemeClr val="accent1"/>
-          </a:effectRef>
-          <a:fontRef idx="minor">
-            <a:schemeClr val="lt1"/>
-          </a:fontRef>
-        </p:style>
-        <p:txBody>
-          <a:bodyPr rtlCol="0" anchor="ctr"/>
-          <a:lstStyle/>
-          <a:p>
-            <a:pPr algn="ctr"/>
-          </a:p>
-        </p:txBody>
-      </p:sp>
-      <p:sp>
-        <p:nvSpPr>
-          <p:cNvPr id="80" name="TextBox 79"/>
-          <p:cNvSpPr txBox="1"/>
-          <p:nvPr/>
-        </p:nvSpPr>
-        <p:spPr>
-          <a:xfrm>
-            <a:off x="6263999" y="2214000"/>
-            <a:ext cx="1368000" cy="223200"/>
-          </a:xfrm>
-          <a:prstGeom prst="rect">
-            <a:avLst/>
-          </a:prstGeom>
-          <a:noFill/>
-        </p:spPr>
-        <p:txBody>
-          <a:bodyPr wrap="square">
-            <a:spAutoFit/>
-          </a:bodyPr>
-          <a:lstStyle/>
-          <a:p>
-            <a:pPr algn="l"/>
-            <a:r>
-              <a:rPr sz="800" b="0" i="0">
-                <a:solidFill>
-                  <a:srgbClr val="555555"/>
-                </a:solidFill>
-              </a:rPr>
-              <a:t>EV/EBITDA</a:t>
-            </a:r>
-          </a:p>
-        </p:txBody>
-      </p:sp>
-      <p:sp>
-        <p:nvSpPr>
-          <p:cNvPr id="81" name="TextBox 80"/>
-          <p:cNvSpPr txBox="1"/>
-          <p:nvPr/>
-        </p:nvSpPr>
-        <p:spPr>
-          <a:xfrm>
-            <a:off x="7667999" y="2214000"/>
-            <a:ext cx="1080000" cy="223200"/>
-          </a:xfrm>
-          <a:prstGeom prst="rect">
-            <a:avLst/>
-          </a:prstGeom>
-          <a:noFill/>
-        </p:spPr>
-        <p:txBody>
-          <a:bodyPr wrap="square">
-            <a:spAutoFit/>
-          </a:bodyPr>
-          <a:lstStyle/>
-          <a:p>
-            <a:pPr algn="r"/>
-            <a:r>
-              <a:rPr sz="850" b="1" i="0">
-                <a:solidFill>
-                  <a:srgbClr val="1B3A6B"/>
-                </a:solidFill>
-              </a:rPr>
-              <a:t>12.5x</a:t>
-            </a:r>
-          </a:p>
-        </p:txBody>
-      </p:sp>
-      <p:sp>
-        <p:nvSpPr>
-          <p:cNvPr id="82" name="Rectangle 81"/>
-          <p:cNvSpPr/>
-          <p:nvPr/>
-        </p:nvSpPr>
-        <p:spPr>
-          <a:xfrm>
-            <a:off x="6227999" y="2466000"/>
-            <a:ext cx="2556000" cy="259200"/>
-          </a:xfrm>
-          <a:prstGeom prst="rect">
-            <a:avLst/>
-          </a:prstGeom>
-          <a:solidFill>
-            <a:srgbClr val="E8ECF0"/>
-          </a:solidFill>
-          <a:ln>
-            <a:noFill/>
-          </a:ln>
-        </p:spPr>
-        <p:style>
-          <a:lnRef idx="1">
-            <a:schemeClr val="accent1"/>
-          </a:lnRef>
-          <a:fillRef idx="3">
-            <a:schemeClr val="accent1"/>
-          </a:fillRef>
-          <a:effectRef idx="2">
-            <a:schemeClr val="accent1"/>
-          </a:effectRef>
-          <a:fontRef idx="minor">
-            <a:schemeClr val="lt1"/>
-          </a:fontRef>
-        </p:style>
-        <p:txBody>
-          <a:bodyPr rtlCol="0" anchor="ctr"/>
-          <a:lstStyle/>
-          <a:p>
-            <a:pPr algn="ctr"/>
-          </a:p>
-        </p:txBody>
-      </p:sp>
-      <p:sp>
-        <p:nvSpPr>
-          <p:cNvPr id="83" name="TextBox 82"/>
-          <p:cNvSpPr txBox="1"/>
-          <p:nvPr/>
-        </p:nvSpPr>
-        <p:spPr>
-          <a:xfrm>
-            <a:off x="6263999" y="2484000"/>
-            <a:ext cx="1368000" cy="223200"/>
-          </a:xfrm>
-          <a:prstGeom prst="rect">
-            <a:avLst/>
-          </a:prstGeom>
-          <a:noFill/>
-        </p:spPr>
-        <p:txBody>
-          <a:bodyPr wrap="square">
-            <a:spAutoFit/>
-          </a:bodyPr>
-          <a:lstStyle/>
-          <a:p>
-            <a:pPr algn="l"/>
-            <a:r>
-              <a:rPr sz="800" b="0" i="0">
-                <a:solidFill>
-                  <a:srgbClr val="555555"/>
-                </a:solidFill>
-              </a:rPr>
-              <a:t>Marge EBITDA</a:t>
-            </a:r>
-          </a:p>
-        </p:txBody>
-      </p:sp>
-      <p:sp>
-        <p:nvSpPr>
-          <p:cNvPr id="84" name="TextBox 83"/>
-          <p:cNvSpPr txBox="1"/>
-          <p:nvPr/>
-        </p:nvSpPr>
-        <p:spPr>
-          <a:xfrm>
-            <a:off x="7667999" y="2484000"/>
-            <a:ext cx="1080000" cy="223200"/>
-          </a:xfrm>
-          <a:prstGeom prst="rect">
-            <a:avLst/>
-          </a:prstGeom>
-          <a:noFill/>
-        </p:spPr>
-        <p:txBody>
-          <a:bodyPr wrap="square">
-            <a:spAutoFit/>
-          </a:bodyPr>
-          <a:lstStyle/>
-          <a:p>
-            <a:pPr algn="r"/>
-            <a:r>
-              <a:rPr sz="850" b="1" i="0">
-                <a:solidFill>
-                  <a:srgbClr val="1B3A6B"/>
-                </a:solidFill>
-              </a:rPr>
-              <a:t>22.4 %</a:t>
-            </a:r>
-          </a:p>
-        </p:txBody>
-      </p:sp>
-      <p:sp>
-        <p:nvSpPr>
-          <p:cNvPr id="85" name="Rectangle 84"/>
-          <p:cNvSpPr/>
-          <p:nvPr/>
-        </p:nvSpPr>
-        <p:spPr>
-          <a:xfrm>
-            <a:off x="6227999" y="2736000"/>
-            <a:ext cx="2556000" cy="259200"/>
-          </a:xfrm>
-          <a:prstGeom prst="rect">
-            <a:avLst/>
-          </a:prstGeom>
-          <a:solidFill>
-            <a:srgbClr val="E8ECF0"/>
-          </a:solidFill>
-          <a:ln>
-            <a:noFill/>
-          </a:ln>
-        </p:spPr>
-        <p:style>
-          <a:lnRef idx="1">
-            <a:schemeClr val="accent1"/>
-          </a:lnRef>
-          <a:fillRef idx="3">
-            <a:schemeClr val="accent1"/>
-          </a:fillRef>
-          <a:effectRef idx="2">
-            <a:schemeClr val="accent1"/>
-          </a:effectRef>
-          <a:fontRef idx="minor">
-            <a:schemeClr val="lt1"/>
-          </a:fontRef>
-        </p:style>
-        <p:txBody>
-          <a:bodyPr rtlCol="0" anchor="ctr"/>
-          <a:lstStyle/>
-          <a:p>
-            <a:pPr algn="ctr"/>
-          </a:p>
-        </p:txBody>
-      </p:sp>
-      <p:sp>
-        <p:nvSpPr>
-          <p:cNvPr id="86" name="TextBox 85"/>
-          <p:cNvSpPr txBox="1"/>
-          <p:nvPr/>
-        </p:nvSpPr>
-        <p:spPr>
-          <a:xfrm>
-            <a:off x="6263999" y="2754000"/>
-            <a:ext cx="1368000" cy="223200"/>
-          </a:xfrm>
-          <a:prstGeom prst="rect">
-            <a:avLst/>
-          </a:prstGeom>
-          <a:noFill/>
-        </p:spPr>
-        <p:txBody>
-          <a:bodyPr wrap="square">
-            <a:spAutoFit/>
-          </a:bodyPr>
-          <a:lstStyle/>
-          <a:p>
-            <a:pPr algn="l"/>
-            <a:r>
-              <a:rPr sz="800" b="0" i="0">
-                <a:solidFill>
-                  <a:srgbClr val="555555"/>
-                </a:solidFill>
-              </a:rPr>
-              <a:t>Altman Z</a:t>
-            </a:r>
-          </a:p>
-        </p:txBody>
-      </p:sp>
-      <p:sp>
-        <p:nvSpPr>
-          <p:cNvPr id="87" name="TextBox 86"/>
-          <p:cNvSpPr txBox="1"/>
-          <p:nvPr/>
-        </p:nvSpPr>
-        <p:spPr>
-          <a:xfrm>
-            <a:off x="7667999" y="2754000"/>
-            <a:ext cx="1080000" cy="223200"/>
-          </a:xfrm>
-          <a:prstGeom prst="rect">
-            <a:avLst/>
-          </a:prstGeom>
-          <a:noFill/>
-        </p:spPr>
-        <p:txBody>
-          <a:bodyPr wrap="square">
-            <a:spAutoFit/>
-          </a:bodyPr>
-          <a:lstStyle/>
-          <a:p>
-            <a:pPr algn="r"/>
-            <a:r>
-              <a:rPr sz="850" b="1" i="0">
-                <a:solidFill>
-                  <a:srgbClr val="1B3A6B"/>
-                </a:solidFill>
-              </a:rPr>
-              <a:t>3.1</a:t>
+              <a:t>2.5</a:t>
             </a:r>
           </a:p>
         </p:txBody>
@@ -10688,7 +11028,7 @@
                   <a:srgbClr val="555555"/>
                 </a:solidFill>
               </a:rPr>
-              <a:t>EV/EBITDA par societe vs médiane sectorielle (11.8x)  ·  Vert = sous médiane  ·  Rouge = prime</a:t>
+              <a:t>EV/EBITDA par societe vs médiane sectorielle (17.4x)  ·  Vert = sous médiane  ·  Rouge = prime</a:t>
             </a:r>
           </a:p>
         </p:txBody>
@@ -10866,8 +11206,8 @@
                   <a:srgbClr val="555555"/>
                 </a:solidFill>
               </a:rPr>
-              <a:t>La distribution est bimodale — 2 acteur(s) se detachent nettement du reste du secteur, creant une prime de valorisation significative vs la médiane de 11.8x.
-2 societe(s) se traitent sous la médiane — potentiellement les meilleures asymetries risque/rendement sous reserve de catalyseurs fondamentaux.
+              <a:t>La distribution est bimodale — 3 acteur(s) se detachent nettement du reste du secteur, creant une prime de valorisation significative vs la médiane de 17.4x.
+3 societe(s) se traitent sous la médiane — potentiellement les meilleures asymetries risque/rendement sous reserve de catalyseurs fondamentaux.
 La dispersion des multiples est caracteristique d'un secteur Consumer Defensive en phase de differentiation — les investisseurs selectifs peuvent exploiter cet ecart.</a:t>
             </a:r>
           </a:p>
@@ -11594,7 +11934,7 @@
         </p:nvGraphicFramePr>
         <p:xfrm>
           <a:off x="324000" y="1260000"/>
-          <a:ext cx="8495997" cy="1411200"/>
+          <a:ext cx="8495997" cy="1814400"/>
         </p:xfrm>
         <a:graphic>
           <a:graphicData uri="http://schemas.openxmlformats.org/drawingml/2006/table">
@@ -11780,7 +12120,7 @@
                             <a:srgbClr val="1A1A1A"/>
                           </a:solidFill>
                         </a:rPr>
-                        <a:t>CON6</a:t>
+                        <a:t>PM</a:t>
                       </a:r>
                     </a:p>
                   </a:txBody>
@@ -11800,7 +12140,7 @@
                             <a:srgbClr val="1A1A1A"/>
                           </a:solidFill>
                         </a:rPr>
-                        <a:t>Consumer Defensi</a:t>
+                        <a:t>Philip Morris In</a:t>
                       </a:r>
                     </a:p>
                   </a:txBody>
@@ -11820,7 +12160,7 @@
                             <a:srgbClr val="1A1A1A"/>
                           </a:solidFill>
                         </a:rPr>
-                        <a:t>130</a:t>
+                        <a:t>162.49</a:t>
                       </a:r>
                     </a:p>
                   </a:txBody>
@@ -11840,7 +12180,7 @@
                             <a:srgbClr val="1A1A1A"/>
                           </a:solidFill>
                         </a:rPr>
-                        <a:t>149.5</a:t>
+                        <a:t>186.9</a:t>
                       </a:r>
                     </a:p>
                   </a:txBody>
@@ -11860,7 +12200,7 @@
                             <a:srgbClr val="1A1A1A"/>
                           </a:solidFill>
                         </a:rPr>
-                        <a:t>&lt; 123.5</a:t>
+                        <a:t>&lt; 154.4</a:t>
                       </a:r>
                     </a:p>
                   </a:txBody>
@@ -11922,7 +12262,7 @@
                             <a:srgbClr val="1A1A1A"/>
                           </a:solidFill>
                         </a:rPr>
-                        <a:t>CON5</a:t>
+                        <a:t>KO</a:t>
                       </a:r>
                     </a:p>
                   </a:txBody>
@@ -11944,7 +12284,7 @@
                             <a:srgbClr val="1A1A1A"/>
                           </a:solidFill>
                         </a:rPr>
-                        <a:t>Consumer Defensi</a:t>
+                        <a:t>The Coca-Cola Co</a:t>
                       </a:r>
                     </a:p>
                   </a:txBody>
@@ -11966,7 +12306,7 @@
                             <a:srgbClr val="1A1A1A"/>
                           </a:solidFill>
                         </a:rPr>
-                        <a:t>120</a:t>
+                        <a:t>74.69</a:t>
                       </a:r>
                     </a:p>
                   </a:txBody>
@@ -11988,7 +12328,7 @@
                             <a:srgbClr val="1A1A1A"/>
                           </a:solidFill>
                         </a:rPr>
-                        <a:t>138.0</a:t>
+                        <a:t>85.9</a:t>
                       </a:r>
                     </a:p>
                   </a:txBody>
@@ -12010,7 +12350,7 @@
                             <a:srgbClr val="1A1A1A"/>
                           </a:solidFill>
                         </a:rPr>
-                        <a:t>&lt; 114.0</a:t>
+                        <a:t>&lt; 71.0</a:t>
                       </a:r>
                     </a:p>
                   </a:txBody>
@@ -12032,7 +12372,7 @@
                             <a:srgbClr val="1A1A1A"/>
                           </a:solidFill>
                         </a:rPr>
-                        <a:t>Proche zone</a:t>
+                        <a:t>Entree attractive</a:t>
                       </a:r>
                     </a:p>
                   </a:txBody>
@@ -12054,7 +12394,7 @@
                             <a:srgbClr val="1A1A1A"/>
                           </a:solidFill>
                         </a:rPr>
-                        <a:t>~52 %</a:t>
+                        <a:t>~68 %</a:t>
                       </a:r>
                     </a:p>
                   </a:txBody>
@@ -12078,7 +12418,7 @@
                             <a:srgbClr val="1A1A1A"/>
                           </a:solidFill>
                         </a:rPr>
-                        <a:t>CON4</a:t>
+                        <a:t>PG</a:t>
                       </a:r>
                     </a:p>
                   </a:txBody>
@@ -12098,7 +12438,7 @@
                             <a:srgbClr val="1A1A1A"/>
                           </a:solidFill>
                         </a:rPr>
-                        <a:t>Consumer Defensi</a:t>
+                        <a:t>The Procter &amp; Ga</a:t>
                       </a:r>
                     </a:p>
                   </a:txBody>
@@ -12118,7 +12458,7 @@
                             <a:srgbClr val="1A1A1A"/>
                           </a:solidFill>
                         </a:rPr>
-                        <a:t>110</a:t>
+                        <a:t>142.42</a:t>
                       </a:r>
                     </a:p>
                   </a:txBody>
@@ -12138,7 +12478,7 @@
                             <a:srgbClr val="1A1A1A"/>
                           </a:solidFill>
                         </a:rPr>
-                        <a:t>126.5</a:t>
+                        <a:t>163.8</a:t>
                       </a:r>
                     </a:p>
                   </a:txBody>
@@ -12158,7 +12498,7 @@
                             <a:srgbClr val="1A1A1A"/>
                           </a:solidFill>
                         </a:rPr>
-                        <a:t>&lt; 104.5</a:t>
+                        <a:t>&lt; 135.3</a:t>
                       </a:r>
                     </a:p>
                   </a:txBody>
@@ -12220,7 +12560,7 @@
                             <a:srgbClr val="1A1A1A"/>
                           </a:solidFill>
                         </a:rPr>
-                        <a:t>CON3</a:t>
+                        <a:t>PEP</a:t>
                       </a:r>
                     </a:p>
                   </a:txBody>
@@ -12242,7 +12582,7 @@
                             <a:srgbClr val="1A1A1A"/>
                           </a:solidFill>
                         </a:rPr>
-                        <a:t>Consumer Defensi</a:t>
+                        <a:t>PepsiCo, Inc.</a:t>
                       </a:r>
                     </a:p>
                   </a:txBody>
@@ -12264,7 +12604,7 @@
                             <a:srgbClr val="1A1A1A"/>
                           </a:solidFill>
                         </a:rPr>
-                        <a:t>100</a:t>
+                        <a:t>150.83</a:t>
                       </a:r>
                     </a:p>
                   </a:txBody>
@@ -12286,7 +12626,7 @@
                             <a:srgbClr val="1A1A1A"/>
                           </a:solidFill>
                         </a:rPr>
-                        <a:t>115.0</a:t>
+                        <a:t>173.5</a:t>
                       </a:r>
                     </a:p>
                   </a:txBody>
@@ -12308,7 +12648,7 @@
                             <a:srgbClr val="1A1A1A"/>
                           </a:solidFill>
                         </a:rPr>
-                        <a:t>&lt; 95.0</a:t>
+                        <a:t>&lt; 143.3</a:t>
                       </a:r>
                     </a:p>
                   </a:txBody>
@@ -12376,7 +12716,7 @@
                             <a:srgbClr val="1A1A1A"/>
                           </a:solidFill>
                         </a:rPr>
-                        <a:t>CON2</a:t>
+                        <a:t>MDLZ</a:t>
                       </a:r>
                     </a:p>
                   </a:txBody>
@@ -12396,7 +12736,7 @@
                             <a:srgbClr val="1A1A1A"/>
                           </a:solidFill>
                         </a:rPr>
-                        <a:t>Consumer Defensi</a:t>
+                        <a:t>Mondelez Interna</a:t>
                       </a:r>
                     </a:p>
                   </a:txBody>
@@ -12416,7 +12756,7 @@
                             <a:srgbClr val="1A1A1A"/>
                           </a:solidFill>
                         </a:rPr>
-                        <a:t>90</a:t>
+                        <a:t>57.58</a:t>
                       </a:r>
                     </a:p>
                   </a:txBody>
@@ -12436,7 +12776,7 @@
                             <a:srgbClr val="1A1A1A"/>
                           </a:solidFill>
                         </a:rPr>
-                        <a:t>103.5</a:t>
+                        <a:t>66.2</a:t>
                       </a:r>
                     </a:p>
                   </a:txBody>
@@ -12456,7 +12796,7 @@
                             <a:srgbClr val="1A1A1A"/>
                           </a:solidFill>
                         </a:rPr>
-                        <a:t>&lt; 85.5</a:t>
+                        <a:t>&lt; 54.7</a:t>
                       </a:r>
                     </a:p>
                   </a:txBody>
@@ -12518,7 +12858,7 @@
                             <a:srgbClr val="1A1A1A"/>
                           </a:solidFill>
                         </a:rPr>
-                        <a:t>CON1</a:t>
+                        <a:t>WMT</a:t>
                       </a:r>
                     </a:p>
                   </a:txBody>
@@ -12540,7 +12880,7 @@
                             <a:srgbClr val="1A1A1A"/>
                           </a:solidFill>
                         </a:rPr>
-                        <a:t>Consumer Defensi</a:t>
+                        <a:t>Walmart Inc.</a:t>
                       </a:r>
                     </a:p>
                   </a:txBody>
@@ -12562,7 +12902,7 @@
                             <a:srgbClr val="1A1A1A"/>
                           </a:solidFill>
                         </a:rPr>
-                        <a:t>80</a:t>
+                        <a:t>122.18</a:t>
                       </a:r>
                     </a:p>
                   </a:txBody>
@@ -12584,7 +12924,7 @@
                             <a:srgbClr val="1A1A1A"/>
                           </a:solidFill>
                         </a:rPr>
-                        <a:t>92.0</a:t>
+                        <a:t>140.5</a:t>
                       </a:r>
                     </a:p>
                   </a:txBody>
@@ -12606,7 +12946,305 @@
                             <a:srgbClr val="1A1A1A"/>
                           </a:solidFill>
                         </a:rPr>
-                        <a:t>&lt; 76.0</a:t>
+                        <a:t>&lt; 116.1</a:t>
+                      </a:r>
+                    </a:p>
+                  </a:txBody>
+                  <a:tcPr>
+                    <a:solidFill>
+                      <a:srgbClr val="F5F7FA"/>
+                    </a:solidFill>
+                  </a:tcPr>
+                </a:tc>
+                <a:tc>
+                  <a:txBody>
+                    <a:bodyPr/>
+                    <a:lstStyle/>
+                    <a:p>
+                      <a:pPr algn="ctr"/>
+                      <a:r>
+                        <a:rPr sz="750" b="0">
+                          <a:solidFill>
+                            <a:srgbClr val="1A1A1A"/>
+                          </a:solidFill>
+                        </a:rPr>
+                        <a:t>Proche zone</a:t>
+                      </a:r>
+                    </a:p>
+                  </a:txBody>
+                  <a:tcPr>
+                    <a:solidFill>
+                      <a:srgbClr val="F5F7FA"/>
+                    </a:solidFill>
+                  </a:tcPr>
+                </a:tc>
+                <a:tc>
+                  <a:txBody>
+                    <a:bodyPr/>
+                    <a:lstStyle/>
+                    <a:p>
+                      <a:pPr algn="ctr"/>
+                      <a:r>
+                        <a:rPr sz="750" b="0">
+                          <a:solidFill>
+                            <a:srgbClr val="1A1A1A"/>
+                          </a:solidFill>
+                        </a:rPr>
+                        <a:t>~52 %</a:t>
+                      </a:r>
+                    </a:p>
+                  </a:txBody>
+                  <a:tcPr>
+                    <a:solidFill>
+                      <a:srgbClr val="F5F7FA"/>
+                    </a:solidFill>
+                  </a:tcPr>
+                </a:tc>
+              </a:tr>
+              <a:tr h="201600">
+                <a:tc>
+                  <a:txBody>
+                    <a:bodyPr/>
+                    <a:lstStyle/>
+                    <a:p>
+                      <a:pPr algn="ctr"/>
+                      <a:r>
+                        <a:rPr sz="750" b="0">
+                          <a:solidFill>
+                            <a:srgbClr val="1A1A1A"/>
+                          </a:solidFill>
+                        </a:rPr>
+                        <a:t>GIS</a:t>
+                      </a:r>
+                    </a:p>
+                  </a:txBody>
+                  <a:tcPr>
+                    <a:noFill/>
+                  </a:tcPr>
+                </a:tc>
+                <a:tc>
+                  <a:txBody>
+                    <a:bodyPr/>
+                    <a:lstStyle/>
+                    <a:p>
+                      <a:pPr algn="ctr"/>
+                      <a:r>
+                        <a:rPr sz="750" b="0">
+                          <a:solidFill>
+                            <a:srgbClr val="1A1A1A"/>
+                          </a:solidFill>
+                        </a:rPr>
+                        <a:t>General Mills, I</a:t>
+                      </a:r>
+                    </a:p>
+                  </a:txBody>
+                  <a:tcPr>
+                    <a:noFill/>
+                  </a:tcPr>
+                </a:tc>
+                <a:tc>
+                  <a:txBody>
+                    <a:bodyPr/>
+                    <a:lstStyle/>
+                    <a:p>
+                      <a:pPr algn="ctr"/>
+                      <a:r>
+                        <a:rPr sz="750" b="0">
+                          <a:solidFill>
+                            <a:srgbClr val="1A1A1A"/>
+                          </a:solidFill>
+                        </a:rPr>
+                        <a:t>36.02</a:t>
+                      </a:r>
+                    </a:p>
+                  </a:txBody>
+                  <a:tcPr>
+                    <a:noFill/>
+                  </a:tcPr>
+                </a:tc>
+                <a:tc>
+                  <a:txBody>
+                    <a:bodyPr/>
+                    <a:lstStyle/>
+                    <a:p>
+                      <a:pPr algn="ctr"/>
+                      <a:r>
+                        <a:rPr sz="750" b="0">
+                          <a:solidFill>
+                            <a:srgbClr val="1A1A1A"/>
+                          </a:solidFill>
+                        </a:rPr>
+                        <a:t>41.4</a:t>
+                      </a:r>
+                    </a:p>
+                  </a:txBody>
+                  <a:tcPr>
+                    <a:noFill/>
+                  </a:tcPr>
+                </a:tc>
+                <a:tc>
+                  <a:txBody>
+                    <a:bodyPr/>
+                    <a:lstStyle/>
+                    <a:p>
+                      <a:pPr algn="ctr"/>
+                      <a:r>
+                        <a:rPr sz="750" b="0">
+                          <a:solidFill>
+                            <a:srgbClr val="1A1A1A"/>
+                          </a:solidFill>
+                        </a:rPr>
+                        <a:t>&lt; 34.2</a:t>
+                      </a:r>
+                    </a:p>
+                  </a:txBody>
+                  <a:tcPr>
+                    <a:noFill/>
+                  </a:tcPr>
+                </a:tc>
+                <a:tc>
+                  <a:txBody>
+                    <a:bodyPr/>
+                    <a:lstStyle/>
+                    <a:p>
+                      <a:pPr algn="ctr"/>
+                      <a:r>
+                        <a:rPr sz="750" b="0">
+                          <a:solidFill>
+                            <a:srgbClr val="1A1A1A"/>
+                          </a:solidFill>
+                        </a:rPr>
+                        <a:t>Proche zone</a:t>
+                      </a:r>
+                    </a:p>
+                  </a:txBody>
+                  <a:tcPr>
+                    <a:noFill/>
+                  </a:tcPr>
+                </a:tc>
+                <a:tc>
+                  <a:txBody>
+                    <a:bodyPr/>
+                    <a:lstStyle/>
+                    <a:p>
+                      <a:pPr algn="ctr"/>
+                      <a:r>
+                        <a:rPr sz="750" b="0">
+                          <a:solidFill>
+                            <a:srgbClr val="1A1A1A"/>
+                          </a:solidFill>
+                        </a:rPr>
+                        <a:t>~52 %</a:t>
+                      </a:r>
+                    </a:p>
+                  </a:txBody>
+                  <a:tcPr>
+                    <a:noFill/>
+                  </a:tcPr>
+                </a:tc>
+              </a:tr>
+              <a:tr h="201600">
+                <a:tc>
+                  <a:txBody>
+                    <a:bodyPr/>
+                    <a:lstStyle/>
+                    <a:p>
+                      <a:pPr algn="ctr"/>
+                      <a:r>
+                        <a:rPr sz="750" b="0">
+                          <a:solidFill>
+                            <a:srgbClr val="1A1A1A"/>
+                          </a:solidFill>
+                        </a:rPr>
+                        <a:t>COST</a:t>
+                      </a:r>
+                    </a:p>
+                  </a:txBody>
+                  <a:tcPr>
+                    <a:solidFill>
+                      <a:srgbClr val="F5F7FA"/>
+                    </a:solidFill>
+                  </a:tcPr>
+                </a:tc>
+                <a:tc>
+                  <a:txBody>
+                    <a:bodyPr/>
+                    <a:lstStyle/>
+                    <a:p>
+                      <a:pPr algn="ctr"/>
+                      <a:r>
+                        <a:rPr sz="750" b="0">
+                          <a:solidFill>
+                            <a:srgbClr val="1A1A1A"/>
+                          </a:solidFill>
+                        </a:rPr>
+                        <a:t>Costco Wholesale</a:t>
+                      </a:r>
+                    </a:p>
+                  </a:txBody>
+                  <a:tcPr>
+                    <a:solidFill>
+                      <a:srgbClr val="F5F7FA"/>
+                    </a:solidFill>
+                  </a:tcPr>
+                </a:tc>
+                <a:tc>
+                  <a:txBody>
+                    <a:bodyPr/>
+                    <a:lstStyle/>
+                    <a:p>
+                      <a:pPr algn="ctr"/>
+                      <a:r>
+                        <a:rPr sz="750" b="0">
+                          <a:solidFill>
+                            <a:srgbClr val="1A1A1A"/>
+                          </a:solidFill>
+                        </a:rPr>
+                        <a:t>979.65</a:t>
+                      </a:r>
+                    </a:p>
+                  </a:txBody>
+                  <a:tcPr>
+                    <a:solidFill>
+                      <a:srgbClr val="F5F7FA"/>
+                    </a:solidFill>
+                  </a:tcPr>
+                </a:tc>
+                <a:tc>
+                  <a:txBody>
+                    <a:bodyPr/>
+                    <a:lstStyle/>
+                    <a:p>
+                      <a:pPr algn="ctr"/>
+                      <a:r>
+                        <a:rPr sz="750" b="0">
+                          <a:solidFill>
+                            <a:srgbClr val="1A1A1A"/>
+                          </a:solidFill>
+                        </a:rPr>
+                        <a:t>1126.6</a:t>
+                      </a:r>
+                    </a:p>
+                  </a:txBody>
+                  <a:tcPr>
+                    <a:solidFill>
+                      <a:srgbClr val="F5F7FA"/>
+                    </a:solidFill>
+                  </a:tcPr>
+                </a:tc>
+                <a:tc>
+                  <a:txBody>
+                    <a:bodyPr/>
+                    <a:lstStyle/>
+                    <a:p>
+                      <a:pPr algn="ctr"/>
+                      <a:r>
+                        <a:rPr sz="750" b="0">
+                          <a:solidFill>
+                            <a:srgbClr val="1A1A1A"/>
+                          </a:solidFill>
+                        </a:rPr>
+                        <a:t>&lt; 930.7</a:t>
                       </a:r>
                     </a:p>
                   </a:txBody>
@@ -13122,7 +13760,7 @@
                   <a:srgbClr val="1B3A6B"/>
                 </a:solidFill>
               </a:rPr>
-              <a:t>1 / 6</a:t>
+              <a:t>2 / 8</a:t>
             </a:r>
           </a:p>
         </p:txBody>
@@ -15651,7 +16289,7 @@
                   <a:srgbClr val="555555"/>
                 </a:solidFill>
               </a:rPr>
-              <a:t>Analyse semantique FinBERT  ·  Articles recents  ·  6 sociétés</a:t>
+              <a:t>Analyse semantique FinBERT  ·  Articles recents  ·  8 sociétés</a:t>
             </a:r>
           </a:p>
         </p:txBody>
@@ -15771,7 +16409,7 @@
                   <a:srgbClr val="1B3A6B"/>
                 </a:solidFill>
               </a:rPr>
-              <a:t>0.18</a:t>
+              <a:t>0.00</a:t>
             </a:r>
           </a:p>
         </p:txBody>
@@ -15839,7 +16477,7 @@
                   <a:srgbClr val="AAAAAA"/>
                 </a:solidFill>
               </a:rPr>
-              <a:t>Neutre positif modere</a:t>
+              <a:t>Neutre</a:t>
             </a:r>
           </a:p>
         </p:txBody>
@@ -15853,7 +16491,7 @@
         <p:spPr>
           <a:xfrm>
             <a:off x="2412000" y="900000"/>
-            <a:ext cx="599999" cy="234000"/>
+            <a:ext cx="900000" cy="234000"/>
           </a:xfrm>
           <a:prstGeom prst="rect">
             <a:avLst/>
@@ -15950,7 +16588,7 @@
                   <a:srgbClr val="555555"/>
                 </a:solidFill>
               </a:rPr>
-              <a:t>1 articles (17 %)</a:t>
+              <a:t>2 articles (25 %)</a:t>
             </a:r>
           </a:p>
         </p:txBody>
@@ -16061,7 +16699,7 @@
                   <a:srgbClr val="555555"/>
                 </a:solidFill>
               </a:rPr>
-              <a:t>3 articles (50 %)</a:t>
+              <a:t>4 articles (50 %)</a:t>
             </a:r>
           </a:p>
         </p:txBody>
@@ -16075,7 +16713,7 @@
         <p:spPr>
           <a:xfrm>
             <a:off x="2412000" y="1548000"/>
-            <a:ext cx="1199999" cy="234000"/>
+            <a:ext cx="900000" cy="234000"/>
           </a:xfrm>
           <a:prstGeom prst="rect">
             <a:avLst/>
@@ -16172,7 +16810,7 @@
                   <a:srgbClr val="555555"/>
                 </a:solidFill>
               </a:rPr>
-              <a:t>2 articles (33 %)</a:t>
+              <a:t>2 articles (25 %)</a:t>
             </a:r>
           </a:p>
         </p:txBody>
@@ -16600,7 +17238,7 @@
                   <a:srgbClr val="555555"/>
                 </a:solidFill>
               </a:rPr>
-              <a:t>Le sentiment agrégé sur le secteur Consumer Defensive S&amp;P 500 ressort legerement positif (0.18). La dispersion est forte — les leaders sectoriels tirent le sentiment vers le haut tandis que les valeurs en restructuration drainent la composante negative. Cette hétérogénéité valide une approche selective plut que directionelle sur le secteur.</a:t>
+              <a:t>Le sentiment agrégé sur le secteur Consumer Defensive S&amp;P 500 ressort neutre (0.00). La dispersion est forte — les leaders sectoriels tirent le sentiment vers le haut tandis que les valeurs en restructuration drainent la composante negative. Cette hétérogénéité valide une approche selective plut que directionelle sur le secteur.</a:t>
             </a:r>
           </a:p>
         </p:txBody>
@@ -18647,7 +19285,7 @@
                   <a:srgbClr val="555555"/>
                 </a:solidFill>
               </a:rPr>
-              <a:t>Consumer Defensive  ·  S&amp;P 500  ·  6 sociétés analysées</a:t>
+              <a:t>Consumer Defensive  ·  S&amp;P 500  ·  8 sociétés analysées</a:t>
             </a:r>
           </a:p>
         </p:txBody>
@@ -18801,7 +19439,7 @@
                   <a:srgbClr val="1B3A6B"/>
                 </a:solidFill>
               </a:rPr>
-              <a:t>EV/EBITDA med. : 11.8x  ·  Croissance med. : +8.8 %  ·  Marge EBITDA med. : 22.0 %  ·  Score moyen : 58/100</a:t>
+              <a:t>EV/EBITDA med. : 17.4x  ·  Croissance med. : +5.6 %  ·  Marge EBITDA med. : 18.7 %  ·  Score moyen : 58/100</a:t>
             </a:r>
           </a:p>
         </p:txBody>
@@ -19999,7 +20637,7 @@
                   <a:srgbClr val="1B3A6B"/>
                 </a:solidFill>
               </a:rPr>
-              <a:t>11.8x</a:t>
+              <a:t>17.4x</a:t>
             </a:r>
           </a:p>
         </p:txBody>
@@ -20187,7 +20825,7 @@
                   <a:srgbClr val="1B3A6B"/>
                 </a:solidFill>
               </a:rPr>
-              <a:t>+8.8 %</a:t>
+              <a:t>+5.6 %</a:t>
             </a:r>
           </a:p>
         </p:txBody>
@@ -20375,7 +21013,7 @@
                   <a:srgbClr val="1B3A6B"/>
                 </a:solidFill>
               </a:rPr>
-              <a:t>22.0 %</a:t>
+              <a:t>18.7 %</a:t>
             </a:r>
           </a:p>
         </p:txBody>
@@ -20563,7 +21201,7 @@
                   <a:srgbClr val="1B3A6B"/>
                 </a:solidFill>
               </a:rPr>
-              <a:t>+12.5 %</a:t>
+              <a:t>+3.8 %</a:t>
             </a:r>
           </a:p>
         </p:txBody>
@@ -21443,7 +22081,7 @@
                   <a:srgbClr val="1B3A6B"/>
                 </a:solidFill>
               </a:rPr>
-              <a:t>CON1  —  Consumer Defensive Corp 1</a:t>
+              <a:t>WMT  —  Walmart Inc.</a:t>
             </a:r>
           </a:p>
         </p:txBody>
@@ -21477,7 +22115,7 @@
                   <a:srgbClr val="555555"/>
                 </a:solidFill>
               </a:rPr>
-              <a:t>Score 48/100  ·  SELL</a:t>
+              <a:t>Score 50/100  ·  HOLD</a:t>
             </a:r>
           </a:p>
         </p:txBody>
@@ -21554,7 +22192,7 @@
                   <a:srgbClr val="1B3A6B"/>
                 </a:solidFill>
               </a:rPr>
-              <a:t>CON2  —  Consumer Defensive Corp 2</a:t>
+              <a:t>COST  —  Costco Wholesale Corporation</a:t>
             </a:r>
           </a:p>
         </p:txBody>
@@ -21588,7 +22226,7 @@
                   <a:srgbClr val="555555"/>
                 </a:solidFill>
               </a:rPr>
-              <a:t>Score 52/100  ·  HOLD</a:t>
+              <a:t>Score 46/100  ·  SELL</a:t>
             </a:r>
           </a:p>
         </p:txBody>
@@ -21665,7 +22303,7 @@
                   <a:srgbClr val="1B3A6B"/>
                 </a:solidFill>
               </a:rPr>
-              <a:t>CON3  —  Consumer Defensive Corp 3</a:t>
+              <a:t>PG  —  The Procter &amp; Gamble Company</a:t>
             </a:r>
           </a:p>
         </p:txBody>
@@ -21699,7 +22337,7 @@
                   <a:srgbClr val="555555"/>
                 </a:solidFill>
               </a:rPr>
-              <a:t>Score 56/100  ·  HOLD</a:t>
+              <a:t>Score 63/100  ·  HOLD</a:t>
             </a:r>
           </a:p>
         </p:txBody>
@@ -21776,7 +22414,7 @@
                   <a:srgbClr val="1B3A6B"/>
                 </a:solidFill>
               </a:rPr>
-              <a:t>CON4  —  Consumer Defensive Corp 4</a:t>
+              <a:t>KO  —  The Coca-Cola Company</a:t>
             </a:r>
           </a:p>
         </p:txBody>
@@ -21810,7 +22448,7 @@
                   <a:srgbClr val="555555"/>
                 </a:solidFill>
               </a:rPr>
-              <a:t>Score 60/100  ·  HOLD</a:t>
+              <a:t>Score 65/100  ·  HOLD</a:t>
             </a:r>
           </a:p>
         </p:txBody>
@@ -21887,7 +22525,7 @@
                   <a:srgbClr val="1B3A6B"/>
                 </a:solidFill>
               </a:rPr>
-              <a:t>CON5  —  Consumer Defensive Corp 5</a:t>
+              <a:t>PM  —  Philip Morris International </a:t>
             </a:r>
           </a:p>
         </p:txBody>
@@ -21921,7 +22559,7 @@
                   <a:srgbClr val="555555"/>
                 </a:solidFill>
               </a:rPr>
-              <a:t>Score 64/100  ·  HOLD</a:t>
+              <a:t>Score 71/100  ·  BUY</a:t>
             </a:r>
           </a:p>
         </p:txBody>
@@ -21998,7 +22636,7 @@
                   <a:srgbClr val="1B3A6B"/>
                 </a:solidFill>
               </a:rPr>
-              <a:t>CON6  —  Consumer Defensive Corp 6</a:t>
+              <a:t>PEP  —  PepsiCo, Inc.</a:t>
             </a:r>
           </a:p>
         </p:txBody>
@@ -22032,7 +22670,7 @@
                   <a:srgbClr val="555555"/>
                 </a:solidFill>
               </a:rPr>
-              <a:t>Score 68/100  ·  HOLD</a:t>
+              <a:t>Score 59/100  ·  HOLD</a:t>
             </a:r>
           </a:p>
         </p:txBody>
@@ -22040,6 +22678,228 @@
       <p:sp>
         <p:nvSpPr>
           <p:cNvPr id="37" name="Rectangle 36"/>
+          <p:cNvSpPr/>
+          <p:nvPr/>
+        </p:nvSpPr>
+        <p:spPr>
+          <a:xfrm>
+            <a:off x="5940000" y="3888000"/>
+            <a:ext cx="180000" cy="125999"/>
+          </a:xfrm>
+          <a:prstGeom prst="rect">
+            <a:avLst/>
+          </a:prstGeom>
+          <a:solidFill>
+            <a:srgbClr val="3A6B1B"/>
+          </a:solidFill>
+          <a:ln>
+            <a:noFill/>
+          </a:ln>
+        </p:spPr>
+        <p:style>
+          <a:lnRef idx="1">
+            <a:schemeClr val="accent1"/>
+          </a:lnRef>
+          <a:fillRef idx="3">
+            <a:schemeClr val="accent1"/>
+          </a:fillRef>
+          <a:effectRef idx="2">
+            <a:schemeClr val="accent1"/>
+          </a:effectRef>
+          <a:fontRef idx="minor">
+            <a:schemeClr val="lt1"/>
+          </a:fontRef>
+        </p:style>
+        <p:txBody>
+          <a:bodyPr rtlCol="0" anchor="ctr"/>
+          <a:lstStyle/>
+          <a:p>
+            <a:pPr algn="ctr"/>
+          </a:p>
+        </p:txBody>
+      </p:sp>
+      <p:sp>
+        <p:nvSpPr>
+          <p:cNvPr id="38" name="TextBox 37"/>
+          <p:cNvSpPr txBox="1"/>
+          <p:nvPr/>
+        </p:nvSpPr>
+        <p:spPr>
+          <a:xfrm>
+            <a:off x="6192000" y="3834000"/>
+            <a:ext cx="2556000" cy="198000"/>
+          </a:xfrm>
+          <a:prstGeom prst="rect">
+            <a:avLst/>
+          </a:prstGeom>
+          <a:noFill/>
+        </p:spPr>
+        <p:txBody>
+          <a:bodyPr wrap="square">
+            <a:spAutoFit/>
+          </a:bodyPr>
+          <a:lstStyle/>
+          <a:p>
+            <a:pPr algn="l"/>
+            <a:r>
+              <a:rPr sz="750" b="1" i="0">
+                <a:solidFill>
+                  <a:srgbClr val="1B3A6B"/>
+                </a:solidFill>
+              </a:rPr>
+              <a:t>MDLZ  —  Mondelez International, Inc.</a:t>
+            </a:r>
+          </a:p>
+        </p:txBody>
+      </p:sp>
+      <p:sp>
+        <p:nvSpPr>
+          <p:cNvPr id="39" name="TextBox 38"/>
+          <p:cNvSpPr txBox="1"/>
+          <p:nvPr/>
+        </p:nvSpPr>
+        <p:spPr>
+          <a:xfrm>
+            <a:off x="6192000" y="4032000"/>
+            <a:ext cx="2556000" cy="198000"/>
+          </a:xfrm>
+          <a:prstGeom prst="rect">
+            <a:avLst/>
+          </a:prstGeom>
+          <a:noFill/>
+        </p:spPr>
+        <p:txBody>
+          <a:bodyPr wrap="square">
+            <a:spAutoFit/>
+          </a:bodyPr>
+          <a:lstStyle/>
+          <a:p>
+            <a:pPr algn="l"/>
+            <a:r>
+              <a:rPr sz="700" b="0" i="0">
+                <a:solidFill>
+                  <a:srgbClr val="555555"/>
+                </a:solidFill>
+              </a:rPr>
+              <a:t>Score 56/100  ·  HOLD</a:t>
+            </a:r>
+          </a:p>
+        </p:txBody>
+      </p:sp>
+      <p:sp>
+        <p:nvSpPr>
+          <p:cNvPr id="40" name="Rectangle 39"/>
+          <p:cNvSpPr/>
+          <p:nvPr/>
+        </p:nvSpPr>
+        <p:spPr>
+          <a:xfrm>
+            <a:off x="5940000" y="4338000"/>
+            <a:ext cx="180000" cy="125999"/>
+          </a:xfrm>
+          <a:prstGeom prst="rect">
+            <a:avLst/>
+          </a:prstGeom>
+          <a:solidFill>
+            <a:srgbClr val="6B1B3A"/>
+          </a:solidFill>
+          <a:ln>
+            <a:noFill/>
+          </a:ln>
+        </p:spPr>
+        <p:style>
+          <a:lnRef idx="1">
+            <a:schemeClr val="accent1"/>
+          </a:lnRef>
+          <a:fillRef idx="3">
+            <a:schemeClr val="accent1"/>
+          </a:fillRef>
+          <a:effectRef idx="2">
+            <a:schemeClr val="accent1"/>
+          </a:effectRef>
+          <a:fontRef idx="minor">
+            <a:schemeClr val="lt1"/>
+          </a:fontRef>
+        </p:style>
+        <p:txBody>
+          <a:bodyPr rtlCol="0" anchor="ctr"/>
+          <a:lstStyle/>
+          <a:p>
+            <a:pPr algn="ctr"/>
+          </a:p>
+        </p:txBody>
+      </p:sp>
+      <p:sp>
+        <p:nvSpPr>
+          <p:cNvPr id="41" name="TextBox 40"/>
+          <p:cNvSpPr txBox="1"/>
+          <p:nvPr/>
+        </p:nvSpPr>
+        <p:spPr>
+          <a:xfrm>
+            <a:off x="6192000" y="4284000"/>
+            <a:ext cx="2556000" cy="198000"/>
+          </a:xfrm>
+          <a:prstGeom prst="rect">
+            <a:avLst/>
+          </a:prstGeom>
+          <a:noFill/>
+        </p:spPr>
+        <p:txBody>
+          <a:bodyPr wrap="square">
+            <a:spAutoFit/>
+          </a:bodyPr>
+          <a:lstStyle/>
+          <a:p>
+            <a:pPr algn="l"/>
+            <a:r>
+              <a:rPr sz="750" b="1" i="0">
+                <a:solidFill>
+                  <a:srgbClr val="1B3A6B"/>
+                </a:solidFill>
+              </a:rPr>
+              <a:t>GIS  —  General Mills, Inc.</a:t>
+            </a:r>
+          </a:p>
+        </p:txBody>
+      </p:sp>
+      <p:sp>
+        <p:nvSpPr>
+          <p:cNvPr id="42" name="TextBox 41"/>
+          <p:cNvSpPr txBox="1"/>
+          <p:nvPr/>
+        </p:nvSpPr>
+        <p:spPr>
+          <a:xfrm>
+            <a:off x="6192000" y="4482000"/>
+            <a:ext cx="2556000" cy="198000"/>
+          </a:xfrm>
+          <a:prstGeom prst="rect">
+            <a:avLst/>
+          </a:prstGeom>
+          <a:noFill/>
+        </p:spPr>
+        <p:txBody>
+          <a:bodyPr wrap="square">
+            <a:spAutoFit/>
+          </a:bodyPr>
+          <a:lstStyle/>
+          <a:p>
+            <a:pPr algn="l"/>
+            <a:r>
+              <a:rPr sz="700" b="0" i="0">
+                <a:solidFill>
+                  <a:srgbClr val="555555"/>
+                </a:solidFill>
+              </a:rPr>
+              <a:t>Score 50/100  ·  HOLD</a:t>
+            </a:r>
+          </a:p>
+        </p:txBody>
+      </p:sp>
+      <p:sp>
+        <p:nvSpPr>
+          <p:cNvPr id="43" name="Rectangle 42"/>
           <p:cNvSpPr/>
           <p:nvPr/>
         </p:nvSpPr>
@@ -22082,7 +22942,7 @@
       </p:sp>
       <p:sp>
         <p:nvSpPr>
-          <p:cNvPr id="38" name="TextBox 37"/>
+          <p:cNvPr id="44" name="TextBox 43"/>
           <p:cNvSpPr txBox="1"/>
           <p:nvPr/>
         </p:nvSpPr>
@@ -22116,7 +22976,7 @@
       </p:sp>
       <p:sp>
         <p:nvSpPr>
-          <p:cNvPr id="39" name="TextBox 38"/>
+          <p:cNvPr id="45" name="TextBox 44"/>
           <p:cNvSpPr txBox="1"/>
           <p:nvPr/>
         </p:nvSpPr>
@@ -22143,14 +23003,14 @@
                   <a:srgbClr val="555555"/>
                 </a:solidFill>
               </a:rPr>
-              <a:t>Sur 52 semaines, CON6 affiche la meilleure performance (+20%) tandis que CON1 est en retard (+5%). La dispersion des trajectoires illustre la bifurcation sectorielle. Le momentum 52W est integre dans le score FinSight comme signal de confirmation.</a:t>
-            </a:r>
-          </a:p>
-        </p:txBody>
-      </p:sp>
-      <p:sp>
-        <p:nvSpPr>
-          <p:cNvPr id="40" name="Rectangle 39"/>
+              <a:t>Sur 52 semaines, WMT affiche la meilleure performance (+36%) tandis que GIS est en retard (-36%). La dispersion des trajectoires illustre la bifurcation sectorielle. Le momentum 52W est integre dans le score FinSight comme signal de confirmation.</a:t>
+            </a:r>
+          </a:p>
+        </p:txBody>
+      </p:sp>
+      <p:sp>
+        <p:nvSpPr>
+          <p:cNvPr id="46" name="Rectangle 45"/>
           <p:cNvSpPr/>
           <p:nvPr/>
         </p:nvSpPr>
@@ -22193,7 +23053,7 @@
       </p:sp>
       <p:sp>
         <p:nvSpPr>
-          <p:cNvPr id="41" name="TextBox 40"/>
+          <p:cNvPr id="47" name="TextBox 46"/>
           <p:cNvSpPr txBox="1"/>
           <p:nvPr/>
         </p:nvSpPr>
@@ -23144,7 +24004,7 @@
                   <a:srgbClr val="555555"/>
                 </a:solidFill>
               </a:rPr>
-              <a:t>6 sociétés · Scatter valorisation · Scores FinSight detailles</a:t>
+              <a:t>8 sociétés · Scatter valorisation · Scores FinSight detailles</a:t>
             </a:r>
           </a:p>
         </p:txBody>
@@ -26059,7 +26919,7 @@
                   <a:srgbClr val="555555"/>
                 </a:solidFill>
               </a:rPr>
-              <a:t>Consumer Defensive  ·  Comparaison multiples LTM — 6 sociétés vs médiane sectorielle</a:t>
+              <a:t>Consumer Defensive  ·  Comparaison multiples LTM — 8 sociétés vs médiane sectorielle</a:t>
             </a:r>
           </a:p>
         </p:txBody>
@@ -26074,7 +26934,7 @@
         </p:nvGraphicFramePr>
         <p:xfrm>
           <a:off x="324000" y="900000"/>
-          <a:ext cx="8495998" cy="1584000"/>
+          <a:ext cx="8495998" cy="1980000"/>
         </p:xfrm>
         <a:graphic>
           <a:graphicData uri="http://schemas.openxmlformats.org/drawingml/2006/table">
@@ -26260,7 +27120,7 @@
                             <a:srgbClr val="1A1A1A"/>
                           </a:solidFill>
                         </a:rPr>
-                        <a:t>Consumer Defensive C</a:t>
+                        <a:t>Philip Morris Intern</a:t>
                       </a:r>
                     </a:p>
                   </a:txBody>
@@ -26280,7 +27140,7 @@
                             <a:srgbClr val="1A1A1A"/>
                           </a:solidFill>
                         </a:rPr>
-                        <a:t>15.5x</a:t>
+                        <a:t>16.0x</a:t>
                       </a:r>
                     </a:p>
                   </a:txBody>
@@ -26300,7 +27160,7 @@
                             <a:srgbClr val="1A1A1A"/>
                           </a:solidFill>
                         </a:rPr>
-                        <a:t>4.0x</a:t>
+                        <a:t>7.4x</a:t>
                       </a:r>
                     </a:p>
                   </a:txBody>
@@ -26320,7 +27180,7 @@
                             <a:srgbClr val="1A1A1A"/>
                           </a:solidFill>
                         </a:rPr>
-                        <a:t>25.0x</a:t>
+                        <a:t>22.4x</a:t>
                       </a:r>
                     </a:p>
                   </a:txBody>
@@ -26340,7 +27200,7 @@
                             <a:srgbClr val="1A1A1A"/>
                           </a:solidFill>
                         </a:rPr>
-                        <a:t>42.5 %</a:t>
+                        <a:t>67.1 %</a:t>
                       </a:r>
                     </a:p>
                   </a:txBody>
@@ -26360,7 +27220,7 @@
                             <a:srgbClr val="1A1A1A"/>
                           </a:solidFill>
                         </a:rPr>
-                        <a:t>24.0 %</a:t>
+                        <a:t>46.1 %</a:t>
                       </a:r>
                     </a:p>
                   </a:txBody>
@@ -26380,7 +27240,7 @@
                             <a:srgbClr val="1A1A1A"/>
                           </a:solidFill>
                         </a:rPr>
-                        <a:t>20.0 %</a:t>
+                        <a:t>0.0 %</a:t>
                       </a:r>
                     </a:p>
                   </a:txBody>
@@ -26402,7 +27262,7 @@
                             <a:srgbClr val="1A1A1A"/>
                           </a:solidFill>
                         </a:rPr>
-                        <a:t>Consumer Defensive C</a:t>
+                        <a:t>The Coca-Cola Compan</a:t>
                       </a:r>
                     </a:p>
                   </a:txBody>
@@ -26424,7 +27284,7 @@
                             <a:srgbClr val="1A1A1A"/>
                           </a:solidFill>
                         </a:rPr>
-                        <a:t>14.0x</a:t>
+                        <a:t>22.1x</a:t>
                       </a:r>
                     </a:p>
                   </a:txBody>
@@ -26446,7 +27306,7 @@
                             <a:srgbClr val="1A1A1A"/>
                           </a:solidFill>
                         </a:rPr>
-                        <a:t>3.6x</a:t>
+                        <a:t>7.4x</a:t>
                       </a:r>
                     </a:p>
                   </a:txBody>
@@ -26468,7 +27328,7 @@
                             <a:srgbClr val="1A1A1A"/>
                           </a:solidFill>
                         </a:rPr>
-                        <a:t>23.0x</a:t>
+                        <a:t>24.6x</a:t>
                       </a:r>
                     </a:p>
                   </a:txBody>
@@ -26490,7 +27350,7 @@
                             <a:srgbClr val="1A1A1A"/>
                           </a:solidFill>
                         </a:rPr>
-                        <a:t>42.0 %</a:t>
+                        <a:t>61.6 %</a:t>
                       </a:r>
                     </a:p>
                   </a:txBody>
@@ -26512,7 +27372,7 @@
                             <a:srgbClr val="1A1A1A"/>
                           </a:solidFill>
                         </a:rPr>
-                        <a:t>23.2 %</a:t>
+                        <a:t>33.5 %</a:t>
                       </a:r>
                     </a:p>
                   </a:txBody>
@@ -26534,7 +27394,7 @@
                             <a:srgbClr val="1A1A1A"/>
                           </a:solidFill>
                         </a:rPr>
-                        <a:t>19.0 %</a:t>
+                        <a:t>43.3 %</a:t>
                       </a:r>
                     </a:p>
                   </a:txBody>
@@ -26558,7 +27418,7 @@
                             <a:srgbClr val="1A1A1A"/>
                           </a:solidFill>
                         </a:rPr>
-                        <a:t>Consumer Defensive C</a:t>
+                        <a:t>The Procter &amp; Gamble</a:t>
                       </a:r>
                     </a:p>
                   </a:txBody>
@@ -26578,7 +27438,7 @@
                             <a:srgbClr val="1A1A1A"/>
                           </a:solidFill>
                         </a:rPr>
-                        <a:t>12.5x</a:t>
+                        <a:t>14.4x</a:t>
                       </a:r>
                     </a:p>
                   </a:txBody>
@@ -26598,7 +27458,7 @@
                             <a:srgbClr val="1A1A1A"/>
                           </a:solidFill>
                         </a:rPr>
-                        <a:t>3.2x</a:t>
+                        <a:t>4.2x</a:t>
                       </a:r>
                     </a:p>
                   </a:txBody>
@@ -26618,7 +27478,7 @@
                             <a:srgbClr val="1A1A1A"/>
                           </a:solidFill>
                         </a:rPr>
-                        <a:t>21.0x</a:t>
+                        <a:t>21.1x</a:t>
                       </a:r>
                     </a:p>
                   </a:txBody>
@@ -26638,7 +27498,7 @@
                             <a:srgbClr val="1A1A1A"/>
                           </a:solidFill>
                         </a:rPr>
-                        <a:t>41.5 %</a:t>
+                        <a:t>51.2 %</a:t>
                       </a:r>
                     </a:p>
                   </a:txBody>
@@ -26658,7 +27518,7 @@
                             <a:srgbClr val="1A1A1A"/>
                           </a:solidFill>
                         </a:rPr>
-                        <a:t>22.4 %</a:t>
+                        <a:t>29.0 %</a:t>
                       </a:r>
                     </a:p>
                   </a:txBody>
@@ -26678,7 +27538,7 @@
                             <a:srgbClr val="1A1A1A"/>
                           </a:solidFill>
                         </a:rPr>
-                        <a:t>18.0 %</a:t>
+                        <a:t>31.6 %</a:t>
                       </a:r>
                     </a:p>
                   </a:txBody>
@@ -26700,7 +27560,7 @@
                             <a:srgbClr val="1A1A1A"/>
                           </a:solidFill>
                         </a:rPr>
-                        <a:t>Consumer Defensive C</a:t>
+                        <a:t>PepsiCo, Inc.</a:t>
                       </a:r>
                     </a:p>
                   </a:txBody>
@@ -26722,7 +27582,7 @@
                             <a:srgbClr val="1A1A1A"/>
                           </a:solidFill>
                         </a:rPr>
-                        <a:t>11.0x</a:t>
+                        <a:t>13.7x</a:t>
                       </a:r>
                     </a:p>
                   </a:txBody>
@@ -26744,7 +27604,7 @@
                             <a:srgbClr val="1A1A1A"/>
                           </a:solidFill>
                         </a:rPr>
-                        <a:t>2.8x</a:t>
+                        <a:t>2.7x</a:t>
                       </a:r>
                     </a:p>
                   </a:txBody>
@@ -26766,7 +27626,7 @@
                             <a:srgbClr val="1A1A1A"/>
                           </a:solidFill>
                         </a:rPr>
-                        <a:t>19.0x</a:t>
+                        <a:t>25.1x</a:t>
                       </a:r>
                     </a:p>
                   </a:txBody>
@@ -26788,7 +27648,7 @@
                             <a:srgbClr val="1A1A1A"/>
                           </a:solidFill>
                         </a:rPr>
-                        <a:t>41.0 %</a:t>
+                        <a:t>54.5 %</a:t>
                       </a:r>
                     </a:p>
                   </a:txBody>
@@ -26810,7 +27670,7 @@
                             <a:srgbClr val="1A1A1A"/>
                           </a:solidFill>
                         </a:rPr>
-                        <a:t>21.6 %</a:t>
+                        <a:t>19.3 %</a:t>
                       </a:r>
                     </a:p>
                   </a:txBody>
@@ -26832,7 +27692,7 @@
                             <a:srgbClr val="1A1A1A"/>
                           </a:solidFill>
                         </a:rPr>
-                        <a:t>17.0 %</a:t>
+                        <a:t>42.8 %</a:t>
                       </a:r>
                     </a:p>
                   </a:txBody>
@@ -26856,7 +27716,7 @@
                             <a:srgbClr val="1A1A1A"/>
                           </a:solidFill>
                         </a:rPr>
-                        <a:t>Consumer Defensive C</a:t>
+                        <a:t>Mondelez Internation</a:t>
                       </a:r>
                     </a:p>
                   </a:txBody>
@@ -26876,7 +27736,7 @@
                             <a:srgbClr val="1A1A1A"/>
                           </a:solidFill>
                         </a:rPr>
-                        <a:t>9.5x</a:t>
+                        <a:t>18.8x</a:t>
                       </a:r>
                     </a:p>
                   </a:txBody>
@@ -26916,7 +27776,7 @@
                             <a:srgbClr val="1A1A1A"/>
                           </a:solidFill>
                         </a:rPr>
-                        <a:t>17.0x</a:t>
+                        <a:t>30.5x</a:t>
                       </a:r>
                     </a:p>
                   </a:txBody>
@@ -26936,7 +27796,7 @@
                             <a:srgbClr val="1A1A1A"/>
                           </a:solidFill>
                         </a:rPr>
-                        <a:t>40.5 %</a:t>
+                        <a:t>28.4 %</a:t>
                       </a:r>
                     </a:p>
                   </a:txBody>
@@ -26956,7 +27816,7 @@
                             <a:srgbClr val="1A1A1A"/>
                           </a:solidFill>
                         </a:rPr>
-                        <a:t>20.8 %</a:t>
+                        <a:t>12.9 %</a:t>
                       </a:r>
                     </a:p>
                   </a:txBody>
@@ -26976,7 +27836,7 @@
                             <a:srgbClr val="1A1A1A"/>
                           </a:solidFill>
                         </a:rPr>
-                        <a:t>16.0 %</a:t>
+                        <a:t>9.3 %</a:t>
                       </a:r>
                     </a:p>
                   </a:txBody>
@@ -26998,7 +27858,7 @@
                             <a:srgbClr val="1A1A1A"/>
                           </a:solidFill>
                         </a:rPr>
-                        <a:t>Consumer Defensive C</a:t>
+                        <a:t>Walmart Inc.</a:t>
                       </a:r>
                     </a:p>
                   </a:txBody>
@@ -27020,7 +27880,7 @@
                             <a:srgbClr val="1A1A1A"/>
                           </a:solidFill>
                         </a:rPr>
-                        <a:t>8.0x</a:t>
+                        <a:t>23.6x</a:t>
                       </a:r>
                     </a:p>
                   </a:txBody>
@@ -27042,7 +27902,7 @@
                             <a:srgbClr val="1A1A1A"/>
                           </a:solidFill>
                         </a:rPr>
-                        <a:t>2.0x</a:t>
+                        <a:t>1.5x</a:t>
                       </a:r>
                     </a:p>
                   </a:txBody>
@@ -27064,7 +27924,7 @@
                             <a:srgbClr val="1A1A1A"/>
                           </a:solidFill>
                         </a:rPr>
-                        <a:t>15.0x</a:t>
+                        <a:t>44.9x</a:t>
                       </a:r>
                     </a:p>
                   </a:txBody>
@@ -27086,7 +27946,7 @@
                             <a:srgbClr val="1A1A1A"/>
                           </a:solidFill>
                         </a:rPr>
-                        <a:t>40.0 %</a:t>
+                        <a:t>24.9 %</a:t>
                       </a:r>
                     </a:p>
                   </a:txBody>
@@ -27108,7 +27968,7 @@
                             <a:srgbClr val="1A1A1A"/>
                           </a:solidFill>
                         </a:rPr>
-                        <a:t>20.0 %</a:t>
+                        <a:t>6.2 %</a:t>
                       </a:r>
                     </a:p>
                   </a:txBody>
@@ -27130,7 +27990,7 @@
                             <a:srgbClr val="1A1A1A"/>
                           </a:solidFill>
                         </a:rPr>
-                        <a:t>15.0 %</a:t>
+                        <a:t>21.8 %</a:t>
                       </a:r>
                     </a:p>
                   </a:txBody>
@@ -27154,6 +28014,304 @@
                             <a:srgbClr val="1A1A1A"/>
                           </a:solidFill>
                         </a:rPr>
+                        <a:t>General Mills, Inc.</a:t>
+                      </a:r>
+                    </a:p>
+                  </a:txBody>
+                  <a:tcPr>
+                    <a:noFill/>
+                  </a:tcPr>
+                </a:tc>
+                <a:tc>
+                  <a:txBody>
+                    <a:bodyPr/>
+                    <a:lstStyle/>
+                    <a:p>
+                      <a:pPr algn="ctr"/>
+                      <a:r>
+                        <a:rPr sz="750" b="0">
+                          <a:solidFill>
+                            <a:srgbClr val="1A1A1A"/>
+                          </a:solidFill>
+                        </a:rPr>
+                        <a:t>9.8x</a:t>
+                      </a:r>
+                    </a:p>
+                  </a:txBody>
+                  <a:tcPr>
+                    <a:noFill/>
+                  </a:tcPr>
+                </a:tc>
+                <a:tc>
+                  <a:txBody>
+                    <a:bodyPr/>
+                    <a:lstStyle/>
+                    <a:p>
+                      <a:pPr algn="ctr"/>
+                      <a:r>
+                        <a:rPr sz="750" b="0">
+                          <a:solidFill>
+                            <a:srgbClr val="1A1A1A"/>
+                          </a:solidFill>
+                        </a:rPr>
+                        <a:t>1.8x</a:t>
+                      </a:r>
+                    </a:p>
+                  </a:txBody>
+                  <a:tcPr>
+                    <a:noFill/>
+                  </a:tcPr>
+                </a:tc>
+                <a:tc>
+                  <a:txBody>
+                    <a:bodyPr/>
+                    <a:lstStyle/>
+                    <a:p>
+                      <a:pPr algn="ctr"/>
+                      <a:r>
+                        <a:rPr sz="750" b="0">
+                          <a:solidFill>
+                            <a:srgbClr val="1A1A1A"/>
+                          </a:solidFill>
+                        </a:rPr>
+                        <a:t>8.8x</a:t>
+                      </a:r>
+                    </a:p>
+                  </a:txBody>
+                  <a:tcPr>
+                    <a:noFill/>
+                  </a:tcPr>
+                </a:tc>
+                <a:tc>
+                  <a:txBody>
+                    <a:bodyPr/>
+                    <a:lstStyle/>
+                    <a:p>
+                      <a:pPr algn="ctr"/>
+                      <a:r>
+                        <a:rPr sz="750" b="0">
+                          <a:solidFill>
+                            <a:srgbClr val="1A1A1A"/>
+                          </a:solidFill>
+                        </a:rPr>
+                        <a:t>33.1 %</a:t>
+                      </a:r>
+                    </a:p>
+                  </a:txBody>
+                  <a:tcPr>
+                    <a:noFill/>
+                  </a:tcPr>
+                </a:tc>
+                <a:tc>
+                  <a:txBody>
+                    <a:bodyPr/>
+                    <a:lstStyle/>
+                    <a:p>
+                      <a:pPr algn="ctr"/>
+                      <a:r>
+                        <a:rPr sz="750" b="0">
+                          <a:solidFill>
+                            <a:srgbClr val="1A1A1A"/>
+                          </a:solidFill>
+                        </a:rPr>
+                        <a:t>18.1 %</a:t>
+                      </a:r>
+                    </a:p>
+                  </a:txBody>
+                  <a:tcPr>
+                    <a:noFill/>
+                  </a:tcPr>
+                </a:tc>
+                <a:tc>
+                  <a:txBody>
+                    <a:bodyPr/>
+                    <a:lstStyle/>
+                    <a:p>
+                      <a:pPr algn="ctr"/>
+                      <a:r>
+                        <a:rPr sz="750" b="0">
+                          <a:solidFill>
+                            <a:srgbClr val="1A1A1A"/>
+                          </a:solidFill>
+                        </a:rPr>
+                        <a:t>23.6 %</a:t>
+                      </a:r>
+                    </a:p>
+                  </a:txBody>
+                  <a:tcPr>
+                    <a:noFill/>
+                  </a:tcPr>
+                </a:tc>
+              </a:tr>
+              <a:tr h="198000">
+                <a:tc>
+                  <a:txBody>
+                    <a:bodyPr/>
+                    <a:lstStyle/>
+                    <a:p>
+                      <a:pPr algn="ctr"/>
+                      <a:r>
+                        <a:rPr sz="750" b="0">
+                          <a:solidFill>
+                            <a:srgbClr val="1A1A1A"/>
+                          </a:solidFill>
+                        </a:rPr>
+                        <a:t>Costco Wholesale Cor</a:t>
+                      </a:r>
+                    </a:p>
+                  </a:txBody>
+                  <a:tcPr>
+                    <a:solidFill>
+                      <a:srgbClr val="F5F7FA"/>
+                    </a:solidFill>
+                  </a:tcPr>
+                </a:tc>
+                <a:tc>
+                  <a:txBody>
+                    <a:bodyPr/>
+                    <a:lstStyle/>
+                    <a:p>
+                      <a:pPr algn="ctr"/>
+                      <a:r>
+                        <a:rPr sz="750" b="0">
+                          <a:solidFill>
+                            <a:srgbClr val="1A1A1A"/>
+                          </a:solidFill>
+                        </a:rPr>
+                        <a:t>31.6x</a:t>
+                      </a:r>
+                    </a:p>
+                  </a:txBody>
+                  <a:tcPr>
+                    <a:solidFill>
+                      <a:srgbClr val="F5F7FA"/>
+                    </a:solidFill>
+                  </a:tcPr>
+                </a:tc>
+                <a:tc>
+                  <a:txBody>
+                    <a:bodyPr/>
+                    <a:lstStyle/>
+                    <a:p>
+                      <a:pPr algn="ctr"/>
+                      <a:r>
+                        <a:rPr sz="750" b="0">
+                          <a:solidFill>
+                            <a:srgbClr val="1A1A1A"/>
+                          </a:solidFill>
+                        </a:rPr>
+                        <a:t>1.5x</a:t>
+                      </a:r>
+                    </a:p>
+                  </a:txBody>
+                  <a:tcPr>
+                    <a:solidFill>
+                      <a:srgbClr val="F5F7FA"/>
+                    </a:solidFill>
+                  </a:tcPr>
+                </a:tc>
+                <a:tc>
+                  <a:txBody>
+                    <a:bodyPr/>
+                    <a:lstStyle/>
+                    <a:p>
+                      <a:pPr algn="ctr"/>
+                      <a:r>
+                        <a:rPr sz="750" b="0">
+                          <a:solidFill>
+                            <a:srgbClr val="1A1A1A"/>
+                          </a:solidFill>
+                        </a:rPr>
+                        <a:t>51.0x</a:t>
+                      </a:r>
+                    </a:p>
+                  </a:txBody>
+                  <a:tcPr>
+                    <a:solidFill>
+                      <a:srgbClr val="F5F7FA"/>
+                    </a:solidFill>
+                  </a:tcPr>
+                </a:tc>
+                <a:tc>
+                  <a:txBody>
+                    <a:bodyPr/>
+                    <a:lstStyle/>
+                    <a:p>
+                      <a:pPr algn="ctr"/>
+                      <a:r>
+                        <a:rPr sz="750" b="0">
+                          <a:solidFill>
+                            <a:srgbClr val="1A1A1A"/>
+                          </a:solidFill>
+                        </a:rPr>
+                        <a:t>12.9 %</a:t>
+                      </a:r>
+                    </a:p>
+                  </a:txBody>
+                  <a:tcPr>
+                    <a:solidFill>
+                      <a:srgbClr val="F5F7FA"/>
+                    </a:solidFill>
+                  </a:tcPr>
+                </a:tc>
+                <a:tc>
+                  <a:txBody>
+                    <a:bodyPr/>
+                    <a:lstStyle/>
+                    <a:p>
+                      <a:pPr algn="ctr"/>
+                      <a:r>
+                        <a:rPr sz="750" b="0">
+                          <a:solidFill>
+                            <a:srgbClr val="1A1A1A"/>
+                          </a:solidFill>
+                        </a:rPr>
+                        <a:t>4.7 %</a:t>
+                      </a:r>
+                    </a:p>
+                  </a:txBody>
+                  <a:tcPr>
+                    <a:solidFill>
+                      <a:srgbClr val="F5F7FA"/>
+                    </a:solidFill>
+                  </a:tcPr>
+                </a:tc>
+                <a:tc>
+                  <a:txBody>
+                    <a:bodyPr/>
+                    <a:lstStyle/>
+                    <a:p>
+                      <a:pPr algn="ctr"/>
+                      <a:r>
+                        <a:rPr sz="750" b="0">
+                          <a:solidFill>
+                            <a:srgbClr val="1A1A1A"/>
+                          </a:solidFill>
+                        </a:rPr>
+                        <a:t>29.7 %</a:t>
+                      </a:r>
+                    </a:p>
+                  </a:txBody>
+                  <a:tcPr>
+                    <a:solidFill>
+                      <a:srgbClr val="F5F7FA"/>
+                    </a:solidFill>
+                  </a:tcPr>
+                </a:tc>
+              </a:tr>
+              <a:tr h="198000">
+                <a:tc>
+                  <a:txBody>
+                    <a:bodyPr/>
+                    <a:lstStyle/>
+                    <a:p>
+                      <a:pPr algn="ctr"/>
+                      <a:r>
+                        <a:rPr sz="750" b="0">
+                          <a:solidFill>
+                            <a:srgbClr val="1A1A1A"/>
+                          </a:solidFill>
+                        </a:rPr>
                         <a:t>MEDIANE</a:t>
                       </a:r>
                     </a:p>
@@ -27174,7 +28332,7 @@
                             <a:srgbClr val="1A1A1A"/>
                           </a:solidFill>
                         </a:rPr>
-                        <a:t>11.8x</a:t>
+                        <a:t>17.4x</a:t>
                       </a:r>
                     </a:p>
                   </a:txBody>
@@ -27194,7 +28352,7 @@
                             <a:srgbClr val="1A1A1A"/>
                           </a:solidFill>
                         </a:rPr>
-                        <a:t>3.0x</a:t>
+                        <a:t>2.5x</a:t>
                       </a:r>
                     </a:p>
                   </a:txBody>
@@ -27214,7 +28372,7 @@
                             <a:srgbClr val="1A1A1A"/>
                           </a:solidFill>
                         </a:rPr>
-                        <a:t>20.0x</a:t>
+                        <a:t>24.9x</a:t>
                       </a:r>
                     </a:p>
                   </a:txBody>
@@ -27234,7 +28392,7 @@
                             <a:srgbClr val="1A1A1A"/>
                           </a:solidFill>
                         </a:rPr>
-                        <a:t>41.2 %</a:t>
+                        <a:t>42.2 %</a:t>
                       </a:r>
                     </a:p>
                   </a:txBody>
@@ -27254,7 +28412,7 @@
                             <a:srgbClr val="1A1A1A"/>
                           </a:solidFill>
                         </a:rPr>
-                        <a:t>22.0 %</a:t>
+                        <a:t>18.7 %</a:t>
                       </a:r>
                     </a:p>
                   </a:txBody>
@@ -27274,7 +28432,7 @@
                             <a:srgbClr val="1A1A1A"/>
                           </a:solidFill>
                         </a:rPr>
-                        <a:t>17.5 %</a:t>
+                        <a:t>29.7 %</a:t>
                       </a:r>
                     </a:p>
                   </a:txBody>
@@ -27436,7 +28594,7 @@
                   <a:srgbClr val="555555"/>
                 </a:solidFill>
               </a:rPr>
-              <a:t>La médiane EV/EBITDA sectorielle s etablit a 11.8x LTM. Consumer Defensive C (15.5x) se distingue comme le leader de qualité, combine a une marge EBITDA de 24.0 % et une croissance de +12.5 %. La dispersion des multiples revele la hétérogénéité des profils au sein du secteur Consumer Defensive — une lecture croisee P/E vs EV/EBITDA permet d'isoler les effets de structure de capital et les distorsions comptables.</a:t>
+              <a:t>La médiane EV/EBITDA sectorielle s etablit a 17.4x LTM. Philip Morris Intern (16.0x) se distingue comme le leader de qualité, combine a une marge EBITDA de 46.1 % et une croissance de +6.8 %. La dispersion des multiples revele la hétérogénéité des profils au sein du secteur Consumer Defensive — une lecture croisee P/E vs EV/EBITDA permet d'isoler les effets de structure de capital et les distorsions comptables.</a:t>
             </a:r>
           </a:p>
         </p:txBody>
@@ -29035,7 +30193,7 @@
                   <a:srgbClr val="555555"/>
                 </a:solidFill>
               </a:rPr>
-              <a:t>WACC median : 8.9 %</a:t>
+              <a:t>WACC median : 5.4 %</a:t>
             </a:r>
           </a:p>
         </p:txBody>
@@ -29386,7 +30544,7 @@
                   <a:srgbClr val="AAAAAA"/>
                 </a:solidFill>
               </a:rPr>
-              <a:t>6 sociétés analysées — scores FinSight, scatter &amp; décomposition</a:t>
+              <a:t>8 sociétés analysées — scores FinSight, scatter &amp; décomposition</a:t>
             </a:r>
           </a:p>
         </p:txBody>
@@ -29934,7 +31092,7 @@
                   <a:srgbClr val="555555"/>
                 </a:solidFill>
               </a:rPr>
-              <a:t>6 sociétés analysées  ·  Consumer Defensive  ·  S&amp;P 500  ·  Tri par score FinSight decroissant</a:t>
+              <a:t>8 sociétés analysées  ·  Consumer Defensive  ·  S&amp;P 500  ·  Tri par score FinSight decroissant</a:t>
             </a:r>
           </a:p>
         </p:txBody>
@@ -29949,7 +31107,7 @@
         </p:nvGraphicFramePr>
         <p:xfrm>
           <a:off x="324000" y="900000"/>
-          <a:ext cx="8495998" cy="1411200"/>
+          <a:ext cx="8495998" cy="1814400"/>
         </p:xfrm>
         <a:graphic>
           <a:graphicData uri="http://schemas.openxmlformats.org/drawingml/2006/table">
@@ -30224,7 +31382,7 @@
                             <a:srgbClr val="1A1A1A"/>
                           </a:solidFill>
                         </a:rPr>
-                        <a:t>CON6</a:t>
+                        <a:t>PM</a:t>
                       </a:r>
                     </a:p>
                   </a:txBody>
@@ -30244,7 +31402,7 @@
                             <a:srgbClr val="1A1A1A"/>
                           </a:solidFill>
                         </a:rPr>
-                        <a:t>Consumer Defensive</a:t>
+                        <a:t>Philip Morris Inte</a:t>
                       </a:r>
                     </a:p>
                   </a:txBody>
@@ -30264,7 +31422,7 @@
                             <a:srgbClr val="1A1A1A"/>
                           </a:solidFill>
                         </a:rPr>
-                        <a:t>68/100</a:t>
+                        <a:t>71/100</a:t>
                       </a:r>
                     </a:p>
                   </a:txBody>
@@ -30304,7 +31462,7 @@
                             <a:srgbClr val="1A1A1A"/>
                           </a:solidFill>
                         </a:rPr>
-                        <a:t>130</a:t>
+                        <a:t>162.49</a:t>
                       </a:r>
                     </a:p>
                   </a:txBody>
@@ -30324,7 +31482,7 @@
                             <a:srgbClr val="1A1A1A"/>
                           </a:solidFill>
                         </a:rPr>
-                        <a:t>15.5x</a:t>
+                        <a:t>16.0x</a:t>
                       </a:r>
                     </a:p>
                   </a:txBody>
@@ -30344,7 +31502,7 @@
                             <a:srgbClr val="1A1A1A"/>
                           </a:solidFill>
                         </a:rPr>
-                        <a:t>24.0 %</a:t>
+                        <a:t>46.1 %</a:t>
                       </a:r>
                     </a:p>
                   </a:txBody>
@@ -30364,7 +31522,7 @@
                             <a:srgbClr val="1A1A1A"/>
                           </a:solidFill>
                         </a:rPr>
-                        <a:t>+12.5 %</a:t>
+                        <a:t>+6.8 %</a:t>
                       </a:r>
                     </a:p>
                   </a:txBody>
@@ -30384,7 +31542,7 @@
                             <a:srgbClr val="1A1A1A"/>
                           </a:solidFill>
                         </a:rPr>
-                        <a:t>+20.0 %</a:t>
+                        <a:t>+7.6 %</a:t>
                       </a:r>
                     </a:p>
                   </a:txBody>
@@ -30428,7 +31586,7 @@
                             <a:srgbClr val="1A1A1A"/>
                           </a:solidFill>
                         </a:rPr>
-                        <a:t>CON5</a:t>
+                        <a:t>KO</a:t>
                       </a:r>
                     </a:p>
                   </a:txBody>
@@ -30450,7 +31608,7 @@
                             <a:srgbClr val="1A1A1A"/>
                           </a:solidFill>
                         </a:rPr>
-                        <a:t>Consumer Defensive</a:t>
+                        <a:t>The Coca-Cola Comp</a:t>
                       </a:r>
                     </a:p>
                   </a:txBody>
@@ -30472,7 +31630,7 @@
                             <a:srgbClr val="1A1A1A"/>
                           </a:solidFill>
                         </a:rPr>
-                        <a:t>64/100</a:t>
+                        <a:t>65/100</a:t>
                       </a:r>
                     </a:p>
                   </a:txBody>
@@ -30494,7 +31652,7 @@
                             <a:srgbClr val="1A1A1A"/>
                           </a:solidFill>
                         </a:rPr>
-                        <a:t>HOLD</a:t>
+                        <a:t>BUY</a:t>
                       </a:r>
                     </a:p>
                   </a:txBody>
@@ -30516,7 +31674,7 @@
                             <a:srgbClr val="1A1A1A"/>
                           </a:solidFill>
                         </a:rPr>
-                        <a:t>120</a:t>
+                        <a:t>74.69</a:t>
                       </a:r>
                     </a:p>
                   </a:txBody>
@@ -30538,7 +31696,7 @@
                             <a:srgbClr val="1A1A1A"/>
                           </a:solidFill>
                         </a:rPr>
-                        <a:t>14.0x</a:t>
+                        <a:t>22.1x</a:t>
                       </a:r>
                     </a:p>
                   </a:txBody>
@@ -30560,7 +31718,7 @@
                             <a:srgbClr val="1A1A1A"/>
                           </a:solidFill>
                         </a:rPr>
-                        <a:t>23.2 %</a:t>
+                        <a:t>33.5 %</a:t>
                       </a:r>
                     </a:p>
                   </a:txBody>
@@ -30582,7 +31740,7 @@
                             <a:srgbClr val="1A1A1A"/>
                           </a:solidFill>
                         </a:rPr>
-                        <a:t>+11.0 %</a:t>
+                        <a:t>+2.4 %</a:t>
                       </a:r>
                     </a:p>
                   </a:txBody>
@@ -30604,7 +31762,7 @@
                             <a:srgbClr val="1A1A1A"/>
                           </a:solidFill>
                         </a:rPr>
-                        <a:t>+17.0 %</a:t>
+                        <a:t>+8.4 %</a:t>
                       </a:r>
                     </a:p>
                   </a:txBody>
@@ -30648,7 +31806,7 @@
                             <a:srgbClr val="1A1A1A"/>
                           </a:solidFill>
                         </a:rPr>
-                        <a:t>CON4</a:t>
+                        <a:t>PG</a:t>
                       </a:r>
                     </a:p>
                   </a:txBody>
@@ -30668,7 +31826,7 @@
                             <a:srgbClr val="1A1A1A"/>
                           </a:solidFill>
                         </a:rPr>
-                        <a:t>Consumer Defensive</a:t>
+                        <a:t>The Procter &amp; Gamb</a:t>
                       </a:r>
                     </a:p>
                   </a:txBody>
@@ -30688,7 +31846,7 @@
                             <a:srgbClr val="1A1A1A"/>
                           </a:solidFill>
                         </a:rPr>
-                        <a:t>60/100</a:t>
+                        <a:t>63/100</a:t>
                       </a:r>
                     </a:p>
                   </a:txBody>
@@ -30728,7 +31886,7 @@
                             <a:srgbClr val="1A1A1A"/>
                           </a:solidFill>
                         </a:rPr>
-                        <a:t>110</a:t>
+                        <a:t>142.42</a:t>
                       </a:r>
                     </a:p>
                   </a:txBody>
@@ -30748,7 +31906,7 @@
                             <a:srgbClr val="1A1A1A"/>
                           </a:solidFill>
                         </a:rPr>
-                        <a:t>12.5x</a:t>
+                        <a:t>14.4x</a:t>
                       </a:r>
                     </a:p>
                   </a:txBody>
@@ -30768,7 +31926,7 @@
                             <a:srgbClr val="1A1A1A"/>
                           </a:solidFill>
                         </a:rPr>
-                        <a:t>22.4 %</a:t>
+                        <a:t>29.0 %</a:t>
                       </a:r>
                     </a:p>
                   </a:txBody>
@@ -30788,7 +31946,7 @@
                             <a:srgbClr val="1A1A1A"/>
                           </a:solidFill>
                         </a:rPr>
-                        <a:t>+9.5 %</a:t>
+                        <a:t>+1.5 %</a:t>
                       </a:r>
                     </a:p>
                   </a:txBody>
@@ -30808,7 +31966,7 @@
                             <a:srgbClr val="1A1A1A"/>
                           </a:solidFill>
                         </a:rPr>
-                        <a:t>+14.0 %</a:t>
+                        <a:t>-12.9 %</a:t>
                       </a:r>
                     </a:p>
                   </a:txBody>
@@ -30852,7 +32010,7 @@
                             <a:srgbClr val="1A1A1A"/>
                           </a:solidFill>
                         </a:rPr>
-                        <a:t>CON3</a:t>
+                        <a:t>PEP</a:t>
                       </a:r>
                     </a:p>
                   </a:txBody>
@@ -30874,7 +32032,7 @@
                             <a:srgbClr val="1A1A1A"/>
                           </a:solidFill>
                         </a:rPr>
-                        <a:t>Consumer Defensive</a:t>
+                        <a:t>PepsiCo, Inc.</a:t>
                       </a:r>
                     </a:p>
                   </a:txBody>
@@ -30896,7 +32054,7 @@
                             <a:srgbClr val="1A1A1A"/>
                           </a:solidFill>
                         </a:rPr>
-                        <a:t>56/100</a:t>
+                        <a:t>59/100</a:t>
                       </a:r>
                     </a:p>
                   </a:txBody>
@@ -30940,7 +32098,7 @@
                             <a:srgbClr val="1A1A1A"/>
                           </a:solidFill>
                         </a:rPr>
-                        <a:t>100</a:t>
+                        <a:t>150.83</a:t>
                       </a:r>
                     </a:p>
                   </a:txBody>
@@ -30962,7 +32120,7 @@
                             <a:srgbClr val="1A1A1A"/>
                           </a:solidFill>
                         </a:rPr>
-                        <a:t>11.0x</a:t>
+                        <a:t>13.7x</a:t>
                       </a:r>
                     </a:p>
                   </a:txBody>
@@ -30984,7 +32142,7 @@
                             <a:srgbClr val="1A1A1A"/>
                           </a:solidFill>
                         </a:rPr>
-                        <a:t>21.6 %</a:t>
+                        <a:t>19.3 %</a:t>
                       </a:r>
                     </a:p>
                   </a:txBody>
@@ -31006,7 +32164,7 @@
                             <a:srgbClr val="1A1A1A"/>
                           </a:solidFill>
                         </a:rPr>
-                        <a:t>+8.0 %</a:t>
+                        <a:t>+5.6 %</a:t>
                       </a:r>
                     </a:p>
                   </a:txBody>
@@ -31028,7 +32186,7 @@
                             <a:srgbClr val="1A1A1A"/>
                           </a:solidFill>
                         </a:rPr>
-                        <a:t>+11.0 %</a:t>
+                        <a:t>+2.5 %</a:t>
                       </a:r>
                     </a:p>
                   </a:txBody>
@@ -31072,7 +32230,7 @@
                             <a:srgbClr val="1A1A1A"/>
                           </a:solidFill>
                         </a:rPr>
-                        <a:t>CON2</a:t>
+                        <a:t>MDLZ</a:t>
                       </a:r>
                     </a:p>
                   </a:txBody>
@@ -31092,7 +32250,7 @@
                             <a:srgbClr val="1A1A1A"/>
                           </a:solidFill>
                         </a:rPr>
-                        <a:t>Consumer Defensive</a:t>
+                        <a:t>Mondelez Internati</a:t>
                       </a:r>
                     </a:p>
                   </a:txBody>
@@ -31112,7 +32270,7 @@
                             <a:srgbClr val="1A1A1A"/>
                           </a:solidFill>
                         </a:rPr>
-                        <a:t>52/100</a:t>
+                        <a:t>56/100</a:t>
                       </a:r>
                     </a:p>
                   </a:txBody>
@@ -31152,7 +32310,7 @@
                             <a:srgbClr val="1A1A1A"/>
                           </a:solidFill>
                         </a:rPr>
-                        <a:t>90</a:t>
+                        <a:t>57.58</a:t>
                       </a:r>
                     </a:p>
                   </a:txBody>
@@ -31172,7 +32330,7 @@
                             <a:srgbClr val="1A1A1A"/>
                           </a:solidFill>
                         </a:rPr>
-                        <a:t>9.5x</a:t>
+                        <a:t>18.8x</a:t>
                       </a:r>
                     </a:p>
                   </a:txBody>
@@ -31192,7 +32350,7 @@
                             <a:srgbClr val="1A1A1A"/>
                           </a:solidFill>
                         </a:rPr>
-                        <a:t>20.8 %</a:t>
+                        <a:t>12.9 %</a:t>
                       </a:r>
                     </a:p>
                   </a:txBody>
@@ -31212,7 +32370,7 @@
                             <a:srgbClr val="1A1A1A"/>
                           </a:solidFill>
                         </a:rPr>
-                        <a:t>+6.5 %</a:t>
+                        <a:t>+9.3 %</a:t>
                       </a:r>
                     </a:p>
                   </a:txBody>
@@ -31232,7 +32390,7 @@
                             <a:srgbClr val="1A1A1A"/>
                           </a:solidFill>
                         </a:rPr>
-                        <a:t>+8.0 %</a:t>
+                        <a:t>-13.5 %</a:t>
                       </a:r>
                     </a:p>
                   </a:txBody>
@@ -31276,7 +32434,7 @@
                             <a:srgbClr val="1A1A1A"/>
                           </a:solidFill>
                         </a:rPr>
-                        <a:t>CON1</a:t>
+                        <a:t>WMT</a:t>
                       </a:r>
                     </a:p>
                   </a:txBody>
@@ -31298,7 +32456,7 @@
                             <a:srgbClr val="1A1A1A"/>
                           </a:solidFill>
                         </a:rPr>
-                        <a:t>Consumer Defensive</a:t>
+                        <a:t>Walmart Inc.</a:t>
                       </a:r>
                     </a:p>
                   </a:txBody>
@@ -31320,7 +32478,7 @@
                             <a:srgbClr val="1A1A1A"/>
                           </a:solidFill>
                         </a:rPr>
-                        <a:t>48/100</a:t>
+                        <a:t>50/100</a:t>
                       </a:r>
                     </a:p>
                   </a:txBody>
@@ -31364,7 +32522,7 @@
                             <a:srgbClr val="1A1A1A"/>
                           </a:solidFill>
                         </a:rPr>
-                        <a:t>80</a:t>
+                        <a:t>122.18</a:t>
                       </a:r>
                     </a:p>
                   </a:txBody>
@@ -31386,7 +32544,7 @@
                             <a:srgbClr val="1A1A1A"/>
                           </a:solidFill>
                         </a:rPr>
-                        <a:t>8.0x</a:t>
+                        <a:t>23.6x</a:t>
                       </a:r>
                     </a:p>
                   </a:txBody>
@@ -31408,7 +32566,7 @@
                             <a:srgbClr val="1A1A1A"/>
                           </a:solidFill>
                         </a:rPr>
-                        <a:t>20.0 %</a:t>
+                        <a:t>6.2 %</a:t>
                       </a:r>
                     </a:p>
                   </a:txBody>
@@ -31430,7 +32588,431 @@
                             <a:srgbClr val="1A1A1A"/>
                           </a:solidFill>
                         </a:rPr>
-                        <a:t>+5.0 %</a:t>
+                        <a:t>+5.6 %</a:t>
+                      </a:r>
+                    </a:p>
+                  </a:txBody>
+                  <a:tcPr>
+                    <a:solidFill>
+                      <a:srgbClr val="F5F7FA"/>
+                    </a:solidFill>
+                  </a:tcPr>
+                </a:tc>
+                <a:tc>
+                  <a:txBody>
+                    <a:bodyPr/>
+                    <a:lstStyle/>
+                    <a:p>
+                      <a:pPr algn="ctr"/>
+                      <a:r>
+                        <a:rPr sz="750" b="0">
+                          <a:solidFill>
+                            <a:srgbClr val="1A1A1A"/>
+                          </a:solidFill>
+                        </a:rPr>
+                        <a:t>+36.0 %</a:t>
+                      </a:r>
+                    </a:p>
+                  </a:txBody>
+                  <a:tcPr>
+                    <a:solidFill>
+                      <a:srgbClr val="F5F7FA"/>
+                    </a:solidFill>
+                  </a:tcPr>
+                </a:tc>
+              </a:tr>
+              <a:tr h="201600">
+                <a:tc>
+                  <a:txBody>
+                    <a:bodyPr/>
+                    <a:lstStyle/>
+                    <a:p>
+                      <a:pPr algn="ctr"/>
+                      <a:r>
+                        <a:rPr sz="750" b="0">
+                          <a:solidFill>
+                            <a:srgbClr val="1A1A1A"/>
+                          </a:solidFill>
+                        </a:rPr>
+                        <a:t>7</a:t>
+                      </a:r>
+                    </a:p>
+                  </a:txBody>
+                  <a:tcPr>
+                    <a:noFill/>
+                  </a:tcPr>
+                </a:tc>
+                <a:tc>
+                  <a:txBody>
+                    <a:bodyPr/>
+                    <a:lstStyle/>
+                    <a:p>
+                      <a:pPr algn="ctr"/>
+                      <a:r>
+                        <a:rPr sz="750" b="0">
+                          <a:solidFill>
+                            <a:srgbClr val="1A1A1A"/>
+                          </a:solidFill>
+                        </a:rPr>
+                        <a:t>GIS</a:t>
+                      </a:r>
+                    </a:p>
+                  </a:txBody>
+                  <a:tcPr>
+                    <a:noFill/>
+                  </a:tcPr>
+                </a:tc>
+                <a:tc>
+                  <a:txBody>
+                    <a:bodyPr/>
+                    <a:lstStyle/>
+                    <a:p>
+                      <a:pPr algn="ctr"/>
+                      <a:r>
+                        <a:rPr sz="750" b="0">
+                          <a:solidFill>
+                            <a:srgbClr val="1A1A1A"/>
+                          </a:solidFill>
+                        </a:rPr>
+                        <a:t>General Mills, Inc</a:t>
+                      </a:r>
+                    </a:p>
+                  </a:txBody>
+                  <a:tcPr>
+                    <a:noFill/>
+                  </a:tcPr>
+                </a:tc>
+                <a:tc>
+                  <a:txBody>
+                    <a:bodyPr/>
+                    <a:lstStyle/>
+                    <a:p>
+                      <a:pPr algn="ctr"/>
+                      <a:r>
+                        <a:rPr sz="750" b="0">
+                          <a:solidFill>
+                            <a:srgbClr val="1A1A1A"/>
+                          </a:solidFill>
+                        </a:rPr>
+                        <a:t>50/100</a:t>
+                      </a:r>
+                    </a:p>
+                  </a:txBody>
+                  <a:tcPr>
+                    <a:noFill/>
+                  </a:tcPr>
+                </a:tc>
+                <a:tc>
+                  <a:txBody>
+                    <a:bodyPr/>
+                    <a:lstStyle/>
+                    <a:p>
+                      <a:pPr algn="ctr"/>
+                      <a:r>
+                        <a:rPr sz="750" b="0">
+                          <a:solidFill>
+                            <a:srgbClr val="1A1A1A"/>
+                          </a:solidFill>
+                        </a:rPr>
+                        <a:t>HOLD</a:t>
+                      </a:r>
+                    </a:p>
+                  </a:txBody>
+                  <a:tcPr>
+                    <a:noFill/>
+                  </a:tcPr>
+                </a:tc>
+                <a:tc>
+                  <a:txBody>
+                    <a:bodyPr/>
+                    <a:lstStyle/>
+                    <a:p>
+                      <a:pPr algn="ctr"/>
+                      <a:r>
+                        <a:rPr sz="750" b="0">
+                          <a:solidFill>
+                            <a:srgbClr val="1A1A1A"/>
+                          </a:solidFill>
+                        </a:rPr>
+                        <a:t>36.02</a:t>
+                      </a:r>
+                    </a:p>
+                  </a:txBody>
+                  <a:tcPr>
+                    <a:noFill/>
+                  </a:tcPr>
+                </a:tc>
+                <a:tc>
+                  <a:txBody>
+                    <a:bodyPr/>
+                    <a:lstStyle/>
+                    <a:p>
+                      <a:pPr algn="ctr"/>
+                      <a:r>
+                        <a:rPr sz="750" b="0">
+                          <a:solidFill>
+                            <a:srgbClr val="1A1A1A"/>
+                          </a:solidFill>
+                        </a:rPr>
+                        <a:t>9.8x</a:t>
+                      </a:r>
+                    </a:p>
+                  </a:txBody>
+                  <a:tcPr>
+                    <a:noFill/>
+                  </a:tcPr>
+                </a:tc>
+                <a:tc>
+                  <a:txBody>
+                    <a:bodyPr/>
+                    <a:lstStyle/>
+                    <a:p>
+                      <a:pPr algn="ctr"/>
+                      <a:r>
+                        <a:rPr sz="750" b="0">
+                          <a:solidFill>
+                            <a:srgbClr val="1A1A1A"/>
+                          </a:solidFill>
+                        </a:rPr>
+                        <a:t>18.1 %</a:t>
+                      </a:r>
+                    </a:p>
+                  </a:txBody>
+                  <a:tcPr>
+                    <a:noFill/>
+                  </a:tcPr>
+                </a:tc>
+                <a:tc>
+                  <a:txBody>
+                    <a:bodyPr/>
+                    <a:lstStyle/>
+                    <a:p>
+                      <a:pPr algn="ctr"/>
+                      <a:r>
+                        <a:rPr sz="750" b="0">
+                          <a:solidFill>
+                            <a:srgbClr val="1A1A1A"/>
+                          </a:solidFill>
+                        </a:rPr>
+                        <a:t>-8.4 %</a:t>
+                      </a:r>
+                    </a:p>
+                  </a:txBody>
+                  <a:tcPr>
+                    <a:noFill/>
+                  </a:tcPr>
+                </a:tc>
+                <a:tc>
+                  <a:txBody>
+                    <a:bodyPr/>
+                    <a:lstStyle/>
+                    <a:p>
+                      <a:pPr algn="ctr"/>
+                      <a:r>
+                        <a:rPr sz="750" b="0">
+                          <a:solidFill>
+                            <a:srgbClr val="1A1A1A"/>
+                          </a:solidFill>
+                        </a:rPr>
+                        <a:t>-36.4 %</a:t>
+                      </a:r>
+                    </a:p>
+                  </a:txBody>
+                  <a:tcPr>
+                    <a:noFill/>
+                  </a:tcPr>
+                </a:tc>
+              </a:tr>
+              <a:tr h="201600">
+                <a:tc>
+                  <a:txBody>
+                    <a:bodyPr/>
+                    <a:lstStyle/>
+                    <a:p>
+                      <a:pPr algn="ctr"/>
+                      <a:r>
+                        <a:rPr sz="750" b="0">
+                          <a:solidFill>
+                            <a:srgbClr val="1A1A1A"/>
+                          </a:solidFill>
+                        </a:rPr>
+                        <a:t>8</a:t>
+                      </a:r>
+                    </a:p>
+                  </a:txBody>
+                  <a:tcPr>
+                    <a:solidFill>
+                      <a:srgbClr val="F5F7FA"/>
+                    </a:solidFill>
+                  </a:tcPr>
+                </a:tc>
+                <a:tc>
+                  <a:txBody>
+                    <a:bodyPr/>
+                    <a:lstStyle/>
+                    <a:p>
+                      <a:pPr algn="ctr"/>
+                      <a:r>
+                        <a:rPr sz="750" b="0">
+                          <a:solidFill>
+                            <a:srgbClr val="1A1A1A"/>
+                          </a:solidFill>
+                        </a:rPr>
+                        <a:t>COST</a:t>
+                      </a:r>
+                    </a:p>
+                  </a:txBody>
+                  <a:tcPr>
+                    <a:solidFill>
+                      <a:srgbClr val="F5F7FA"/>
+                    </a:solidFill>
+                  </a:tcPr>
+                </a:tc>
+                <a:tc>
+                  <a:txBody>
+                    <a:bodyPr/>
+                    <a:lstStyle/>
+                    <a:p>
+                      <a:pPr algn="ctr"/>
+                      <a:r>
+                        <a:rPr sz="750" b="0">
+                          <a:solidFill>
+                            <a:srgbClr val="1A1A1A"/>
+                          </a:solidFill>
+                        </a:rPr>
+                        <a:t>Costco Wholesale C</a:t>
+                      </a:r>
+                    </a:p>
+                  </a:txBody>
+                  <a:tcPr>
+                    <a:solidFill>
+                      <a:srgbClr val="F5F7FA"/>
+                    </a:solidFill>
+                  </a:tcPr>
+                </a:tc>
+                <a:tc>
+                  <a:txBody>
+                    <a:bodyPr/>
+                    <a:lstStyle/>
+                    <a:p>
+                      <a:pPr algn="ctr"/>
+                      <a:r>
+                        <a:rPr sz="750" b="0">
+                          <a:solidFill>
+                            <a:srgbClr val="1A1A1A"/>
+                          </a:solidFill>
+                        </a:rPr>
+                        <a:t>46/100</a:t>
+                      </a:r>
+                    </a:p>
+                  </a:txBody>
+                  <a:tcPr>
+                    <a:solidFill>
+                      <a:srgbClr val="F5F7FA"/>
+                    </a:solidFill>
+                  </a:tcPr>
+                </a:tc>
+                <a:tc>
+                  <a:txBody>
+                    <a:bodyPr/>
+                    <a:lstStyle/>
+                    <a:p>
+                      <a:pPr algn="ctr"/>
+                      <a:r>
+                        <a:rPr sz="750" b="0">
+                          <a:solidFill>
+                            <a:srgbClr val="1A1A1A"/>
+                          </a:solidFill>
+                        </a:rPr>
+                        <a:t>HOLD</a:t>
+                      </a:r>
+                    </a:p>
+                  </a:txBody>
+                  <a:tcPr>
+                    <a:solidFill>
+                      <a:srgbClr val="F5F7FA"/>
+                    </a:solidFill>
+                  </a:tcPr>
+                </a:tc>
+                <a:tc>
+                  <a:txBody>
+                    <a:bodyPr/>
+                    <a:lstStyle/>
+                    <a:p>
+                      <a:pPr algn="ctr"/>
+                      <a:r>
+                        <a:rPr sz="750" b="0">
+                          <a:solidFill>
+                            <a:srgbClr val="1A1A1A"/>
+                          </a:solidFill>
+                        </a:rPr>
+                        <a:t>979.65</a:t>
+                      </a:r>
+                    </a:p>
+                  </a:txBody>
+                  <a:tcPr>
+                    <a:solidFill>
+                      <a:srgbClr val="F5F7FA"/>
+                    </a:solidFill>
+                  </a:tcPr>
+                </a:tc>
+                <a:tc>
+                  <a:txBody>
+                    <a:bodyPr/>
+                    <a:lstStyle/>
+                    <a:p>
+                      <a:pPr algn="ctr"/>
+                      <a:r>
+                        <a:rPr sz="750" b="0">
+                          <a:solidFill>
+                            <a:srgbClr val="1A1A1A"/>
+                          </a:solidFill>
+                        </a:rPr>
+                        <a:t>31.6x</a:t>
+                      </a:r>
+                    </a:p>
+                  </a:txBody>
+                  <a:tcPr>
+                    <a:solidFill>
+                      <a:srgbClr val="F5F7FA"/>
+                    </a:solidFill>
+                  </a:tcPr>
+                </a:tc>
+                <a:tc>
+                  <a:txBody>
+                    <a:bodyPr/>
+                    <a:lstStyle/>
+                    <a:p>
+                      <a:pPr algn="ctr"/>
+                      <a:r>
+                        <a:rPr sz="750" b="0">
+                          <a:solidFill>
+                            <a:srgbClr val="1A1A1A"/>
+                          </a:solidFill>
+                        </a:rPr>
+                        <a:t>4.7 %</a:t>
+                      </a:r>
+                    </a:p>
+                  </a:txBody>
+                  <a:tcPr>
+                    <a:solidFill>
+                      <a:srgbClr val="F5F7FA"/>
+                    </a:solidFill>
+                  </a:tcPr>
+                </a:tc>
+                <a:tc>
+                  <a:txBody>
+                    <a:bodyPr/>
+                    <a:lstStyle/>
+                    <a:p>
+                      <a:pPr algn="ctr"/>
+                      <a:r>
+                        <a:rPr sz="750" b="0">
+                          <a:solidFill>
+                            <a:srgbClr val="1A1A1A"/>
+                          </a:solidFill>
+                        </a:rPr>
+                        <a:t>+9.2 %</a:t>
                       </a:r>
                     </a:p>
                   </a:txBody>
@@ -31616,7 +33198,7 @@
                   <a:srgbClr val="555555"/>
                 </a:solidFill>
               </a:rPr>
-              <a:t>Le secteur Consumer Defensive presente 1 BUY / 5 HOLD / 0 SELL sur 6 valeurs analysées. Consumer Defensive Cor (score 68/100) constitue le coeur offensif recommande — fondamentaux solides et visibilite supérieure sur les revenus. La répartition des recommandations reflete un positionnement selectif cohérent avec la phase sectorielle actuelle. Les catalyseurs identifies — resultats trimestriels, guidance annuel, operations M&amp;A — constituent les événements cles a surveiller pour un renforcement conditionnel des positions.</a:t>
+              <a:t>Le secteur Consumer Defensive presente 2 BUY / 6 HOLD / 0 SELL sur 8 valeurs analysées. Philip Morris Internat (score 71/100) constitue le coeur offensif recommande — fondamentaux solides et visibilite supérieure sur les revenus. La répartition des recommandations reflete un positionnement selectif cohérent avec la phase sectorielle actuelle. Les catalyseurs identifies — resultats trimestriels, guidance annuel, operations M&amp;A — constituent les événements cles a surveiller pour un renforcement conditionnel des positions.</a:t>
             </a:r>
           </a:p>
         </p:txBody>

--- a/preview/secteur_Consumer_Defensive_S&P_500/secteur_Consumer_Defensive_S&P_500.pptx
+++ b/preview/secteur_Consumer_Defensive_S&P_500/secteur_Consumer_Defensive_S&P_500.pptx
@@ -7694,7 +7694,7 @@
                   <a:srgbClr val="FFFFFF"/>
                 </a:solidFill>
               </a:rPr>
-              <a:t>Cible : 195</a:t>
+              <a:t>Cible : 198</a:t>
             </a:r>
           </a:p>
         </p:txBody>
@@ -8711,7 +8711,7 @@
                   <a:srgbClr val="FFFFFF"/>
                 </a:solidFill>
               </a:rPr>
-              <a:t>Cible : 90</a:t>
+              <a:t>Cible : 91</a:t>
             </a:r>
           </a:p>
         </p:txBody>
@@ -9728,7 +9728,7 @@
                   <a:srgbClr val="FFFFFF"/>
                 </a:solidFill>
               </a:rPr>
-              <a:t>Cible : 154</a:t>
+              <a:t>Cible : 155</a:t>
             </a:r>
           </a:p>
         </p:txBody>
@@ -12160,7 +12160,7 @@
                             <a:srgbClr val="1A1A1A"/>
                           </a:solidFill>
                         </a:rPr>
-                        <a:t>162.49</a:t>
+                        <a:t>164.72</a:t>
                       </a:r>
                     </a:p>
                   </a:txBody>
@@ -12180,7 +12180,7 @@
                             <a:srgbClr val="1A1A1A"/>
                           </a:solidFill>
                         </a:rPr>
-                        <a:t>186.9</a:t>
+                        <a:t>189.4</a:t>
                       </a:r>
                     </a:p>
                   </a:txBody>
@@ -12200,7 +12200,7 @@
                             <a:srgbClr val="1A1A1A"/>
                           </a:solidFill>
                         </a:rPr>
-                        <a:t>&lt; 154.4</a:t>
+                        <a:t>&lt; 156.5</a:t>
                       </a:r>
                     </a:p>
                   </a:txBody>
@@ -12306,7 +12306,7 @@
                             <a:srgbClr val="1A1A1A"/>
                           </a:solidFill>
                         </a:rPr>
-                        <a:t>74.69</a:t>
+                        <a:t>75.83</a:t>
                       </a:r>
                     </a:p>
                   </a:txBody>
@@ -12328,7 +12328,7 @@
                             <a:srgbClr val="1A1A1A"/>
                           </a:solidFill>
                         </a:rPr>
-                        <a:t>85.9</a:t>
+                        <a:t>87.2</a:t>
                       </a:r>
                     </a:p>
                   </a:txBody>
@@ -12350,7 +12350,7 @@
                             <a:srgbClr val="1A1A1A"/>
                           </a:solidFill>
                         </a:rPr>
-                        <a:t>&lt; 71.0</a:t>
+                        <a:t>&lt; 72.0</a:t>
                       </a:r>
                     </a:p>
                   </a:txBody>
@@ -12458,7 +12458,7 @@
                             <a:srgbClr val="1A1A1A"/>
                           </a:solidFill>
                         </a:rPr>
-                        <a:t>142.42</a:t>
+                        <a:t>143.945</a:t>
                       </a:r>
                     </a:p>
                   </a:txBody>
@@ -12478,7 +12478,7 @@
                             <a:srgbClr val="1A1A1A"/>
                           </a:solidFill>
                         </a:rPr>
-                        <a:t>163.8</a:t>
+                        <a:t>165.5</a:t>
                       </a:r>
                     </a:p>
                   </a:txBody>
@@ -12498,7 +12498,7 @@
                             <a:srgbClr val="1A1A1A"/>
                           </a:solidFill>
                         </a:rPr>
-                        <a:t>&lt; 135.3</a:t>
+                        <a:t>&lt; 136.7</a:t>
                       </a:r>
                     </a:p>
                   </a:txBody>
@@ -12604,7 +12604,7 @@
                             <a:srgbClr val="1A1A1A"/>
                           </a:solidFill>
                         </a:rPr>
-                        <a:t>150.83</a:t>
+                        <a:t>152.64</a:t>
                       </a:r>
                     </a:p>
                   </a:txBody>
@@ -12626,7 +12626,7 @@
                             <a:srgbClr val="1A1A1A"/>
                           </a:solidFill>
                         </a:rPr>
-                        <a:t>173.5</a:t>
+                        <a:t>175.5</a:t>
                       </a:r>
                     </a:p>
                   </a:txBody>
@@ -12648,7 +12648,7 @@
                             <a:srgbClr val="1A1A1A"/>
                           </a:solidFill>
                         </a:rPr>
-                        <a:t>&lt; 143.3</a:t>
+                        <a:t>&lt; 145.0</a:t>
                       </a:r>
                     </a:p>
                   </a:txBody>
@@ -12756,7 +12756,7 @@
                             <a:srgbClr val="1A1A1A"/>
                           </a:solidFill>
                         </a:rPr>
-                        <a:t>57.58</a:t>
+                        <a:t>58.55</a:t>
                       </a:r>
                     </a:p>
                   </a:txBody>
@@ -12776,7 +12776,7 @@
                             <a:srgbClr val="1A1A1A"/>
                           </a:solidFill>
                         </a:rPr>
-                        <a:t>66.2</a:t>
+                        <a:t>67.3</a:t>
                       </a:r>
                     </a:p>
                   </a:txBody>
@@ -12796,7 +12796,7 @@
                             <a:srgbClr val="1A1A1A"/>
                           </a:solidFill>
                         </a:rPr>
-                        <a:t>&lt; 54.7</a:t>
+                        <a:t>&lt; 55.6</a:t>
                       </a:r>
                     </a:p>
                   </a:txBody>
@@ -12902,7 +12902,7 @@
                             <a:srgbClr val="1A1A1A"/>
                           </a:solidFill>
                         </a:rPr>
-                        <a:t>122.18</a:t>
+                        <a:t>123.27</a:t>
                       </a:r>
                     </a:p>
                   </a:txBody>
@@ -12924,7 +12924,7 @@
                             <a:srgbClr val="1A1A1A"/>
                           </a:solidFill>
                         </a:rPr>
-                        <a:t>140.5</a:t>
+                        <a:t>141.8</a:t>
                       </a:r>
                     </a:p>
                   </a:txBody>
@@ -12946,7 +12946,7 @@
                             <a:srgbClr val="1A1A1A"/>
                           </a:solidFill>
                         </a:rPr>
-                        <a:t>&lt; 116.1</a:t>
+                        <a:t>&lt; 117.1</a:t>
                       </a:r>
                     </a:p>
                   </a:txBody>
@@ -13054,7 +13054,7 @@
                             <a:srgbClr val="1A1A1A"/>
                           </a:solidFill>
                         </a:rPr>
-                        <a:t>36.02</a:t>
+                        <a:t>36.7999</a:t>
                       </a:r>
                     </a:p>
                   </a:txBody>
@@ -13074,7 +13074,7 @@
                             <a:srgbClr val="1A1A1A"/>
                           </a:solidFill>
                         </a:rPr>
-                        <a:t>41.4</a:t>
+                        <a:t>42.3</a:t>
                       </a:r>
                     </a:p>
                   </a:txBody>
@@ -13094,7 +13094,7 @@
                             <a:srgbClr val="1A1A1A"/>
                           </a:solidFill>
                         </a:rPr>
-                        <a:t>&lt; 34.2</a:t>
+                        <a:t>&lt; 35.0</a:t>
                       </a:r>
                     </a:p>
                   </a:txBody>
@@ -13200,7 +13200,7 @@
                             <a:srgbClr val="1A1A1A"/>
                           </a:solidFill>
                         </a:rPr>
-                        <a:t>979.65</a:t>
+                        <a:t>985.14</a:t>
                       </a:r>
                     </a:p>
                   </a:txBody>
@@ -13222,7 +13222,7 @@
                             <a:srgbClr val="1A1A1A"/>
                           </a:solidFill>
                         </a:rPr>
-                        <a:t>1126.6</a:t>
+                        <a:t>1132.9</a:t>
                       </a:r>
                     </a:p>
                   </a:txBody>
@@ -13244,7 +13244,7 @@
                             <a:srgbClr val="1A1A1A"/>
                           </a:solidFill>
                         </a:rPr>
-                        <a:t>&lt; 930.7</a:t>
+                        <a:t>&lt; 935.9</a:t>
                       </a:r>
                     </a:p>
                   </a:txBody>
@@ -27180,7 +27180,7 @@
                             <a:srgbClr val="1A1A1A"/>
                           </a:solidFill>
                         </a:rPr>
-                        <a:t>22.4x</a:t>
+                        <a:t>22.7x</a:t>
                       </a:r>
                     </a:p>
                   </a:txBody>
@@ -27328,7 +27328,7 @@
                             <a:srgbClr val="1A1A1A"/>
                           </a:solidFill>
                         </a:rPr>
-                        <a:t>24.6x</a:t>
+                        <a:t>24.9x</a:t>
                       </a:r>
                     </a:p>
                   </a:txBody>
@@ -27478,7 +27478,7 @@
                             <a:srgbClr val="1A1A1A"/>
                           </a:solidFill>
                         </a:rPr>
-                        <a:t>21.1x</a:t>
+                        <a:t>21.3x</a:t>
                       </a:r>
                     </a:p>
                   </a:txBody>
@@ -27626,7 +27626,7 @@
                             <a:srgbClr val="1A1A1A"/>
                           </a:solidFill>
                         </a:rPr>
-                        <a:t>25.1x</a:t>
+                        <a:t>25.4x</a:t>
                       </a:r>
                     </a:p>
                   </a:txBody>
@@ -27776,7 +27776,7 @@
                             <a:srgbClr val="1A1A1A"/>
                           </a:solidFill>
                         </a:rPr>
-                        <a:t>30.5x</a:t>
+                        <a:t>31.0x</a:t>
                       </a:r>
                     </a:p>
                   </a:txBody>
@@ -27924,7 +27924,7 @@
                             <a:srgbClr val="1A1A1A"/>
                           </a:solidFill>
                         </a:rPr>
-                        <a:t>44.9x</a:t>
+                        <a:t>45.3x</a:t>
                       </a:r>
                     </a:p>
                   </a:txBody>
@@ -28074,7 +28074,7 @@
                             <a:srgbClr val="1A1A1A"/>
                           </a:solidFill>
                         </a:rPr>
-                        <a:t>8.8x</a:t>
+                        <a:t>9.0x</a:t>
                       </a:r>
                     </a:p>
                   </a:txBody>
@@ -28222,7 +28222,7 @@
                             <a:srgbClr val="1A1A1A"/>
                           </a:solidFill>
                         </a:rPr>
-                        <a:t>51.0x</a:t>
+                        <a:t>51.3x</a:t>
                       </a:r>
                     </a:p>
                   </a:txBody>
@@ -28372,7 +28372,7 @@
                             <a:srgbClr val="1A1A1A"/>
                           </a:solidFill>
                         </a:rPr>
-                        <a:t>24.9x</a:t>
+                        <a:t>25.2x</a:t>
                       </a:r>
                     </a:p>
                   </a:txBody>
@@ -31462,7 +31462,7 @@
                             <a:srgbClr val="1A1A1A"/>
                           </a:solidFill>
                         </a:rPr>
-                        <a:t>162.49</a:t>
+                        <a:t>164.72</a:t>
                       </a:r>
                     </a:p>
                   </a:txBody>
@@ -31674,7 +31674,7 @@
                             <a:srgbClr val="1A1A1A"/>
                           </a:solidFill>
                         </a:rPr>
-                        <a:t>74.69</a:t>
+                        <a:t>75.83</a:t>
                       </a:r>
                     </a:p>
                   </a:txBody>
@@ -31886,7 +31886,7 @@
                             <a:srgbClr val="1A1A1A"/>
                           </a:solidFill>
                         </a:rPr>
-                        <a:t>142.42</a:t>
+                        <a:t>143.945</a:t>
                       </a:r>
                     </a:p>
                   </a:txBody>
@@ -32098,7 +32098,7 @@
                             <a:srgbClr val="1A1A1A"/>
                           </a:solidFill>
                         </a:rPr>
-                        <a:t>150.83</a:t>
+                        <a:t>152.64</a:t>
                       </a:r>
                     </a:p>
                   </a:txBody>
@@ -32310,7 +32310,7 @@
                             <a:srgbClr val="1A1A1A"/>
                           </a:solidFill>
                         </a:rPr>
-                        <a:t>57.58</a:t>
+                        <a:t>58.55</a:t>
                       </a:r>
                     </a:p>
                   </a:txBody>
@@ -32522,7 +32522,7 @@
                             <a:srgbClr val="1A1A1A"/>
                           </a:solidFill>
                         </a:rPr>
-                        <a:t>122.18</a:t>
+                        <a:t>123.27</a:t>
                       </a:r>
                     </a:p>
                   </a:txBody>
@@ -32734,7 +32734,7 @@
                             <a:srgbClr val="1A1A1A"/>
                           </a:solidFill>
                         </a:rPr>
-                        <a:t>36.02</a:t>
+                        <a:t>36.7999</a:t>
                       </a:r>
                     </a:p>
                   </a:txBody>
@@ -32946,7 +32946,7 @@
                             <a:srgbClr val="1A1A1A"/>
                           </a:solidFill>
                         </a:rPr>
-                        <a:t>979.65</a:t>
+                        <a:t>985.14</a:t>
                       </a:r>
                     </a:p>
                   </a:txBody>

--- a/preview/secteur_Consumer_Defensive_S&P_500/secteur_Consumer_Defensive_S&P_500.pptx
+++ b/preview/secteur_Consumer_Defensive_S&P_500/secteur_Consumer_Defensive_S&P_500.pptx
@@ -12160,7 +12160,7 @@
                             <a:srgbClr val="1A1A1A"/>
                           </a:solidFill>
                         </a:rPr>
-                        <a:t>164.72</a:t>
+                        <a:t>164.74</a:t>
                       </a:r>
                     </a:p>
                   </a:txBody>
@@ -12180,7 +12180,7 @@
                             <a:srgbClr val="1A1A1A"/>
                           </a:solidFill>
                         </a:rPr>
-                        <a:t>189.4</a:t>
+                        <a:t>189.5</a:t>
                       </a:r>
                     </a:p>
                   </a:txBody>
@@ -12306,7 +12306,7 @@
                             <a:srgbClr val="1A1A1A"/>
                           </a:solidFill>
                         </a:rPr>
-                        <a:t>75.83</a:t>
+                        <a:t>75.915</a:t>
                       </a:r>
                     </a:p>
                   </a:txBody>
@@ -12328,7 +12328,7 @@
                             <a:srgbClr val="1A1A1A"/>
                           </a:solidFill>
                         </a:rPr>
-                        <a:t>87.2</a:t>
+                        <a:t>87.3</a:t>
                       </a:r>
                     </a:p>
                   </a:txBody>
@@ -12350,7 +12350,7 @@
                             <a:srgbClr val="1A1A1A"/>
                           </a:solidFill>
                         </a:rPr>
-                        <a:t>&lt; 72.0</a:t>
+                        <a:t>&lt; 72.1</a:t>
                       </a:r>
                     </a:p>
                   </a:txBody>
@@ -12458,7 +12458,7 @@
                             <a:srgbClr val="1A1A1A"/>
                           </a:solidFill>
                         </a:rPr>
-                        <a:t>143.945</a:t>
+                        <a:t>143.7</a:t>
                       </a:r>
                     </a:p>
                   </a:txBody>
@@ -12478,7 +12478,7 @@
                             <a:srgbClr val="1A1A1A"/>
                           </a:solidFill>
                         </a:rPr>
-                        <a:t>165.5</a:t>
+                        <a:t>165.3</a:t>
                       </a:r>
                     </a:p>
                   </a:txBody>
@@ -12498,7 +12498,7 @@
                             <a:srgbClr val="1A1A1A"/>
                           </a:solidFill>
                         </a:rPr>
-                        <a:t>&lt; 136.7</a:t>
+                        <a:t>&lt; 136.5</a:t>
                       </a:r>
                     </a:p>
                   </a:txBody>
@@ -12604,7 +12604,7 @@
                             <a:srgbClr val="1A1A1A"/>
                           </a:solidFill>
                         </a:rPr>
-                        <a:t>152.64</a:t>
+                        <a:t>153.33</a:t>
                       </a:r>
                     </a:p>
                   </a:txBody>
@@ -12626,7 +12626,7 @@
                             <a:srgbClr val="1A1A1A"/>
                           </a:solidFill>
                         </a:rPr>
-                        <a:t>175.5</a:t>
+                        <a:t>176.3</a:t>
                       </a:r>
                     </a:p>
                   </a:txBody>
@@ -12648,7 +12648,7 @@
                             <a:srgbClr val="1A1A1A"/>
                           </a:solidFill>
                         </a:rPr>
-                        <a:t>&lt; 145.0</a:t>
+                        <a:t>&lt; 145.7</a:t>
                       </a:r>
                     </a:p>
                   </a:txBody>
@@ -12756,7 +12756,7 @@
                             <a:srgbClr val="1A1A1A"/>
                           </a:solidFill>
                         </a:rPr>
-                        <a:t>58.55</a:t>
+                        <a:t>58.37</a:t>
                       </a:r>
                     </a:p>
                   </a:txBody>
@@ -12776,7 +12776,7 @@
                             <a:srgbClr val="1A1A1A"/>
                           </a:solidFill>
                         </a:rPr>
-                        <a:t>67.3</a:t>
+                        <a:t>67.1</a:t>
                       </a:r>
                     </a:p>
                   </a:txBody>
@@ -12796,7 +12796,7 @@
                             <a:srgbClr val="1A1A1A"/>
                           </a:solidFill>
                         </a:rPr>
-                        <a:t>&lt; 55.6</a:t>
+                        <a:t>&lt; 55.5</a:t>
                       </a:r>
                     </a:p>
                   </a:txBody>
@@ -12902,7 +12902,7 @@
                             <a:srgbClr val="1A1A1A"/>
                           </a:solidFill>
                         </a:rPr>
-                        <a:t>123.27</a:t>
+                        <a:t>123.455</a:t>
                       </a:r>
                     </a:p>
                   </a:txBody>
@@ -12924,7 +12924,7 @@
                             <a:srgbClr val="1A1A1A"/>
                           </a:solidFill>
                         </a:rPr>
-                        <a:t>141.8</a:t>
+                        <a:t>142.0</a:t>
                       </a:r>
                     </a:p>
                   </a:txBody>
@@ -12946,7 +12946,7 @@
                             <a:srgbClr val="1A1A1A"/>
                           </a:solidFill>
                         </a:rPr>
-                        <a:t>&lt; 117.1</a:t>
+                        <a:t>&lt; 117.3</a:t>
                       </a:r>
                     </a:p>
                   </a:txBody>
@@ -13054,7 +13054,7 @@
                             <a:srgbClr val="1A1A1A"/>
                           </a:solidFill>
                         </a:rPr>
-                        <a:t>36.7999</a:t>
+                        <a:t>36.66</a:t>
                       </a:r>
                     </a:p>
                   </a:txBody>
@@ -13074,7 +13074,7 @@
                             <a:srgbClr val="1A1A1A"/>
                           </a:solidFill>
                         </a:rPr>
-                        <a:t>42.3</a:t>
+                        <a:t>42.2</a:t>
                       </a:r>
                     </a:p>
                   </a:txBody>
@@ -13094,7 +13094,7 @@
                             <a:srgbClr val="1A1A1A"/>
                           </a:solidFill>
                         </a:rPr>
-                        <a:t>&lt; 35.0</a:t>
+                        <a:t>&lt; 34.8</a:t>
                       </a:r>
                     </a:p>
                   </a:txBody>
@@ -13200,7 +13200,7 @@
                             <a:srgbClr val="1A1A1A"/>
                           </a:solidFill>
                         </a:rPr>
-                        <a:t>985.14</a:t>
+                        <a:t>983.15</a:t>
                       </a:r>
                     </a:p>
                   </a:txBody>
@@ -13222,7 +13222,7 @@
                             <a:srgbClr val="1A1A1A"/>
                           </a:solidFill>
                         </a:rPr>
-                        <a:t>1132.9</a:t>
+                        <a:t>1130.6</a:t>
                       </a:r>
                     </a:p>
                   </a:txBody>
@@ -13244,7 +13244,7 @@
                             <a:srgbClr val="1A1A1A"/>
                           </a:solidFill>
                         </a:rPr>
-                        <a:t>&lt; 935.9</a:t>
+                        <a:t>&lt; 934.0</a:t>
                       </a:r>
                     </a:p>
                   </a:txBody>
@@ -22017,8 +22017,8 @@
         </p:nvSpPr>
         <p:spPr>
           <a:xfrm>
-            <a:off x="5940000" y="1188000"/>
-            <a:ext cx="180000" cy="125999"/>
+            <a:off x="5940000" y="1177200"/>
+            <a:ext cx="180000" cy="108000"/>
           </a:xfrm>
           <a:prstGeom prst="rect">
             <a:avLst/>
@@ -22061,7 +22061,7 @@
         <p:spPr>
           <a:xfrm>
             <a:off x="6192000" y="1134000"/>
-            <a:ext cx="2556000" cy="198000"/>
+            <a:ext cx="2556000" cy="180000"/>
           </a:xfrm>
           <a:prstGeom prst="rect">
             <a:avLst/>
@@ -22094,8 +22094,8 @@
         </p:nvSpPr>
         <p:spPr>
           <a:xfrm>
-            <a:off x="6192000" y="1332000"/>
-            <a:ext cx="2556000" cy="198000"/>
+            <a:off x="6192000" y="1314000"/>
+            <a:ext cx="2556000" cy="162000"/>
           </a:xfrm>
           <a:prstGeom prst="rect">
             <a:avLst/>
@@ -22128,8 +22128,8 @@
         </p:nvSpPr>
         <p:spPr>
           <a:xfrm>
-            <a:off x="5940000" y="1638000"/>
-            <a:ext cx="180000" cy="125999"/>
+            <a:off x="5940000" y="1507950"/>
+            <a:ext cx="180000" cy="108000"/>
           </a:xfrm>
           <a:prstGeom prst="rect">
             <a:avLst/>
@@ -22171,8 +22171,8 @@
         </p:nvSpPr>
         <p:spPr>
           <a:xfrm>
-            <a:off x="6192000" y="1584000"/>
-            <a:ext cx="2556000" cy="198000"/>
+            <a:off x="6192000" y="1464749"/>
+            <a:ext cx="2556000" cy="180000"/>
           </a:xfrm>
           <a:prstGeom prst="rect">
             <a:avLst/>
@@ -22205,8 +22205,8 @@
         </p:nvSpPr>
         <p:spPr>
           <a:xfrm>
-            <a:off x="6192000" y="1782000"/>
-            <a:ext cx="2556000" cy="198000"/>
+            <a:off x="6192000" y="1644749"/>
+            <a:ext cx="2556000" cy="162000"/>
           </a:xfrm>
           <a:prstGeom prst="rect">
             <a:avLst/>
@@ -22239,8 +22239,8 @@
         </p:nvSpPr>
         <p:spPr>
           <a:xfrm>
-            <a:off x="5940000" y="2088000"/>
-            <a:ext cx="180000" cy="125999"/>
+            <a:off x="5940000" y="1838700"/>
+            <a:ext cx="180000" cy="108000"/>
           </a:xfrm>
           <a:prstGeom prst="rect">
             <a:avLst/>
@@ -22282,8 +22282,8 @@
         </p:nvSpPr>
         <p:spPr>
           <a:xfrm>
-            <a:off x="6192000" y="2034000"/>
-            <a:ext cx="2556000" cy="198000"/>
+            <a:off x="6192000" y="1795500"/>
+            <a:ext cx="2556000" cy="180000"/>
           </a:xfrm>
           <a:prstGeom prst="rect">
             <a:avLst/>
@@ -22316,8 +22316,8 @@
         </p:nvSpPr>
         <p:spPr>
           <a:xfrm>
-            <a:off x="6192000" y="2232000"/>
-            <a:ext cx="2556000" cy="198000"/>
+            <a:off x="6192000" y="1975500"/>
+            <a:ext cx="2556000" cy="162000"/>
           </a:xfrm>
           <a:prstGeom prst="rect">
             <a:avLst/>
@@ -22350,8 +22350,8 @@
         </p:nvSpPr>
         <p:spPr>
           <a:xfrm>
-            <a:off x="5940000" y="2538000"/>
-            <a:ext cx="180000" cy="125999"/>
+            <a:off x="5940000" y="2169450"/>
+            <a:ext cx="180000" cy="108000"/>
           </a:xfrm>
           <a:prstGeom prst="rect">
             <a:avLst/>
@@ -22393,8 +22393,8 @@
         </p:nvSpPr>
         <p:spPr>
           <a:xfrm>
-            <a:off x="6192000" y="2484000"/>
-            <a:ext cx="2556000" cy="198000"/>
+            <a:off x="6192000" y="2126250"/>
+            <a:ext cx="2556000" cy="180000"/>
           </a:xfrm>
           <a:prstGeom prst="rect">
             <a:avLst/>
@@ -22427,8 +22427,8 @@
         </p:nvSpPr>
         <p:spPr>
           <a:xfrm>
-            <a:off x="6192000" y="2682000"/>
-            <a:ext cx="2556000" cy="198000"/>
+            <a:off x="6192000" y="2306250"/>
+            <a:ext cx="2556000" cy="162000"/>
           </a:xfrm>
           <a:prstGeom prst="rect">
             <a:avLst/>
@@ -22461,8 +22461,8 @@
         </p:nvSpPr>
         <p:spPr>
           <a:xfrm>
-            <a:off x="5940000" y="2988000"/>
-            <a:ext cx="180000" cy="125999"/>
+            <a:off x="5940000" y="2500200"/>
+            <a:ext cx="180000" cy="108000"/>
           </a:xfrm>
           <a:prstGeom prst="rect">
             <a:avLst/>
@@ -22504,8 +22504,8 @@
         </p:nvSpPr>
         <p:spPr>
           <a:xfrm>
-            <a:off x="6192000" y="2934000"/>
-            <a:ext cx="2556000" cy="198000"/>
+            <a:off x="6192000" y="2456999"/>
+            <a:ext cx="2556000" cy="180000"/>
           </a:xfrm>
           <a:prstGeom prst="rect">
             <a:avLst/>
@@ -22538,8 +22538,8 @@
         </p:nvSpPr>
         <p:spPr>
           <a:xfrm>
-            <a:off x="6192000" y="3132000"/>
-            <a:ext cx="2556000" cy="198000"/>
+            <a:off x="6192000" y="2636999"/>
+            <a:ext cx="2556000" cy="162000"/>
           </a:xfrm>
           <a:prstGeom prst="rect">
             <a:avLst/>
@@ -22572,8 +22572,8 @@
         </p:nvSpPr>
         <p:spPr>
           <a:xfrm>
-            <a:off x="5940000" y="3438000"/>
-            <a:ext cx="180000" cy="125999"/>
+            <a:off x="5940000" y="2830950"/>
+            <a:ext cx="180000" cy="108000"/>
           </a:xfrm>
           <a:prstGeom prst="rect">
             <a:avLst/>
@@ -22615,8 +22615,8 @@
         </p:nvSpPr>
         <p:spPr>
           <a:xfrm>
-            <a:off x="6192000" y="3384000"/>
-            <a:ext cx="2556000" cy="198000"/>
+            <a:off x="6192000" y="2787750"/>
+            <a:ext cx="2556000" cy="180000"/>
           </a:xfrm>
           <a:prstGeom prst="rect">
             <a:avLst/>
@@ -22649,8 +22649,8 @@
         </p:nvSpPr>
         <p:spPr>
           <a:xfrm>
-            <a:off x="6192000" y="3582000"/>
-            <a:ext cx="2556000" cy="198000"/>
+            <a:off x="6192000" y="2967750"/>
+            <a:ext cx="2556000" cy="162000"/>
           </a:xfrm>
           <a:prstGeom prst="rect">
             <a:avLst/>
@@ -22683,8 +22683,8 @@
         </p:nvSpPr>
         <p:spPr>
           <a:xfrm>
-            <a:off x="5940000" y="3888000"/>
-            <a:ext cx="180000" cy="125999"/>
+            <a:off x="5940000" y="3161699"/>
+            <a:ext cx="180000" cy="108000"/>
           </a:xfrm>
           <a:prstGeom prst="rect">
             <a:avLst/>
@@ -22726,8 +22726,8 @@
         </p:nvSpPr>
         <p:spPr>
           <a:xfrm>
-            <a:off x="6192000" y="3834000"/>
-            <a:ext cx="2556000" cy="198000"/>
+            <a:off x="6192000" y="3118500"/>
+            <a:ext cx="2556000" cy="180000"/>
           </a:xfrm>
           <a:prstGeom prst="rect">
             <a:avLst/>
@@ -22760,8 +22760,8 @@
         </p:nvSpPr>
         <p:spPr>
           <a:xfrm>
-            <a:off x="6192000" y="4032000"/>
-            <a:ext cx="2556000" cy="198000"/>
+            <a:off x="6192000" y="3298500"/>
+            <a:ext cx="2556000" cy="162000"/>
           </a:xfrm>
           <a:prstGeom prst="rect">
             <a:avLst/>
@@ -22794,8 +22794,8 @@
         </p:nvSpPr>
         <p:spPr>
           <a:xfrm>
-            <a:off x="5940000" y="4338000"/>
-            <a:ext cx="180000" cy="125999"/>
+            <a:off x="5940000" y="3492449"/>
+            <a:ext cx="180000" cy="108000"/>
           </a:xfrm>
           <a:prstGeom prst="rect">
             <a:avLst/>
@@ -22837,8 +22837,8 @@
         </p:nvSpPr>
         <p:spPr>
           <a:xfrm>
-            <a:off x="6192000" y="4284000"/>
-            <a:ext cx="2556000" cy="198000"/>
+            <a:off x="6192000" y="3449249"/>
+            <a:ext cx="2556000" cy="180000"/>
           </a:xfrm>
           <a:prstGeom prst="rect">
             <a:avLst/>
@@ -22871,8 +22871,8 @@
         </p:nvSpPr>
         <p:spPr>
           <a:xfrm>
-            <a:off x="6192000" y="4482000"/>
-            <a:ext cx="2556000" cy="198000"/>
+            <a:off x="6192000" y="3629249"/>
+            <a:ext cx="2556000" cy="162000"/>
           </a:xfrm>
           <a:prstGeom prst="rect">
             <a:avLst/>
@@ -22905,7 +22905,7 @@
         </p:nvSpPr>
         <p:spPr>
           <a:xfrm>
-            <a:off x="5903999" y="4068000"/>
+            <a:off x="5903999" y="3780000"/>
             <a:ext cx="2916000" cy="18000"/>
           </a:xfrm>
           <a:prstGeom prst="rect">
@@ -22948,7 +22948,7 @@
         </p:nvSpPr>
         <p:spPr>
           <a:xfrm>
-            <a:off x="5976000" y="4104000"/>
+            <a:off x="5976000" y="3816000"/>
             <a:ext cx="2808000" cy="180000"/>
           </a:xfrm>
           <a:prstGeom prst="rect">
@@ -22982,8 +22982,8 @@
         </p:nvSpPr>
         <p:spPr>
           <a:xfrm>
-            <a:off x="5976000" y="4302000"/>
-            <a:ext cx="2808000" cy="216000"/>
+            <a:off x="5976000" y="4014000"/>
+            <a:ext cx="2808000" cy="612000"/>
           </a:xfrm>
           <a:prstGeom prst="rect">
             <a:avLst/>
@@ -27328,7 +27328,7 @@
                             <a:srgbClr val="1A1A1A"/>
                           </a:solidFill>
                         </a:rPr>
-                        <a:t>24.9x</a:t>
+                        <a:t>25.0x</a:t>
                       </a:r>
                     </a:p>
                   </a:txBody>
@@ -27626,7 +27626,7 @@
                             <a:srgbClr val="1A1A1A"/>
                           </a:solidFill>
                         </a:rPr>
-                        <a:t>25.4x</a:t>
+                        <a:t>25.6x</a:t>
                       </a:r>
                     </a:p>
                   </a:txBody>
@@ -27776,7 +27776,7 @@
                             <a:srgbClr val="1A1A1A"/>
                           </a:solidFill>
                         </a:rPr>
-                        <a:t>31.0x</a:t>
+                        <a:t>30.9x</a:t>
                       </a:r>
                     </a:p>
                   </a:txBody>
@@ -27924,7 +27924,7 @@
                             <a:srgbClr val="1A1A1A"/>
                           </a:solidFill>
                         </a:rPr>
-                        <a:t>45.3x</a:t>
+                        <a:t>45.4x</a:t>
                       </a:r>
                     </a:p>
                   </a:txBody>
@@ -28222,7 +28222,7 @@
                             <a:srgbClr val="1A1A1A"/>
                           </a:solidFill>
                         </a:rPr>
-                        <a:t>51.3x</a:t>
+                        <a:t>51.2x</a:t>
                       </a:r>
                     </a:p>
                   </a:txBody>
@@ -28372,7 +28372,7 @@
                             <a:srgbClr val="1A1A1A"/>
                           </a:solidFill>
                         </a:rPr>
-                        <a:t>25.2x</a:t>
+                        <a:t>25.3x</a:t>
                       </a:r>
                     </a:p>
                   </a:txBody>
@@ -31462,7 +31462,7 @@
                             <a:srgbClr val="1A1A1A"/>
                           </a:solidFill>
                         </a:rPr>
-                        <a:t>164.72</a:t>
+                        <a:t>164.74</a:t>
                       </a:r>
                     </a:p>
                   </a:txBody>
@@ -31674,7 +31674,7 @@
                             <a:srgbClr val="1A1A1A"/>
                           </a:solidFill>
                         </a:rPr>
-                        <a:t>75.83</a:t>
+                        <a:t>75.915</a:t>
                       </a:r>
                     </a:p>
                   </a:txBody>
@@ -31886,7 +31886,7 @@
                             <a:srgbClr val="1A1A1A"/>
                           </a:solidFill>
                         </a:rPr>
-                        <a:t>143.945</a:t>
+                        <a:t>143.7</a:t>
                       </a:r>
                     </a:p>
                   </a:txBody>
@@ -32098,7 +32098,7 @@
                             <a:srgbClr val="1A1A1A"/>
                           </a:solidFill>
                         </a:rPr>
-                        <a:t>152.64</a:t>
+                        <a:t>153.33</a:t>
                       </a:r>
                     </a:p>
                   </a:txBody>
@@ -32310,7 +32310,7 @@
                             <a:srgbClr val="1A1A1A"/>
                           </a:solidFill>
                         </a:rPr>
-                        <a:t>58.55</a:t>
+                        <a:t>58.37</a:t>
                       </a:r>
                     </a:p>
                   </a:txBody>
@@ -32522,7 +32522,7 @@
                             <a:srgbClr val="1A1A1A"/>
                           </a:solidFill>
                         </a:rPr>
-                        <a:t>123.27</a:t>
+                        <a:t>123.455</a:t>
                       </a:r>
                     </a:p>
                   </a:txBody>
@@ -32734,7 +32734,7 @@
                             <a:srgbClr val="1A1A1A"/>
                           </a:solidFill>
                         </a:rPr>
-                        <a:t>36.7999</a:t>
+                        <a:t>36.66</a:t>
                       </a:r>
                     </a:p>
                   </a:txBody>
@@ -32946,7 +32946,7 @@
                             <a:srgbClr val="1A1A1A"/>
                           </a:solidFill>
                         </a:rPr>
-                        <a:t>985.14</a:t>
+                        <a:t>983.15</a:t>
                       </a:r>
                     </a:p>
                   </a:txBody>

--- a/preview/secteur_Consumer_Defensive_S&P_500/secteur_Consumer_Defensive_S&P_500.pptx
+++ b/preview/secteur_Consumer_Defensive_S&P_500/secteur_Consumer_Defensive_S&P_500.pptx
@@ -7694,7 +7694,7 @@
                   <a:srgbClr val="FFFFFF"/>
                 </a:solidFill>
               </a:rPr>
-              <a:t>Cible : 198</a:t>
+              <a:t>Cible : 197</a:t>
             </a:r>
           </a:p>
         </p:txBody>
@@ -12160,7 +12160,7 @@
                             <a:srgbClr val="1A1A1A"/>
                           </a:solidFill>
                         </a:rPr>
-                        <a:t>164.74</a:t>
+                        <a:t>164.24</a:t>
                       </a:r>
                     </a:p>
                   </a:txBody>
@@ -12180,7 +12180,7 @@
                             <a:srgbClr val="1A1A1A"/>
                           </a:solidFill>
                         </a:rPr>
-                        <a:t>189.5</a:t>
+                        <a:t>188.9</a:t>
                       </a:r>
                     </a:p>
                   </a:txBody>
@@ -12200,7 +12200,7 @@
                             <a:srgbClr val="1A1A1A"/>
                           </a:solidFill>
                         </a:rPr>
-                        <a:t>&lt; 156.5</a:t>
+                        <a:t>&lt; 156.0</a:t>
                       </a:r>
                     </a:p>
                   </a:txBody>
@@ -12306,7 +12306,7 @@
                             <a:srgbClr val="1A1A1A"/>
                           </a:solidFill>
                         </a:rPr>
-                        <a:t>75.915</a:t>
+                        <a:t>75.755</a:t>
                       </a:r>
                     </a:p>
                   </a:txBody>
@@ -12328,7 +12328,7 @@
                             <a:srgbClr val="1A1A1A"/>
                           </a:solidFill>
                         </a:rPr>
-                        <a:t>87.3</a:t>
+                        <a:t>87.1</a:t>
                       </a:r>
                     </a:p>
                   </a:txBody>
@@ -12350,7 +12350,7 @@
                             <a:srgbClr val="1A1A1A"/>
                           </a:solidFill>
                         </a:rPr>
-                        <a:t>&lt; 72.1</a:t>
+                        <a:t>&lt; 72.0</a:t>
                       </a:r>
                     </a:p>
                   </a:txBody>
@@ -12458,7 +12458,7 @@
                             <a:srgbClr val="1A1A1A"/>
                           </a:solidFill>
                         </a:rPr>
-                        <a:t>143.7</a:t>
+                        <a:t>143.42</a:t>
                       </a:r>
                     </a:p>
                   </a:txBody>
@@ -12478,7 +12478,7 @@
                             <a:srgbClr val="1A1A1A"/>
                           </a:solidFill>
                         </a:rPr>
-                        <a:t>165.3</a:t>
+                        <a:t>164.9</a:t>
                       </a:r>
                     </a:p>
                   </a:txBody>
@@ -12498,7 +12498,7 @@
                             <a:srgbClr val="1A1A1A"/>
                           </a:solidFill>
                         </a:rPr>
-                        <a:t>&lt; 136.5</a:t>
+                        <a:t>&lt; 136.2</a:t>
                       </a:r>
                     </a:p>
                   </a:txBody>
@@ -12604,7 +12604,7 @@
                             <a:srgbClr val="1A1A1A"/>
                           </a:solidFill>
                         </a:rPr>
-                        <a:t>153.33</a:t>
+                        <a:t>153.395</a:t>
                       </a:r>
                     </a:p>
                   </a:txBody>
@@ -12626,7 +12626,7 @@
                             <a:srgbClr val="1A1A1A"/>
                           </a:solidFill>
                         </a:rPr>
-                        <a:t>176.3</a:t>
+                        <a:t>176.4</a:t>
                       </a:r>
                     </a:p>
                   </a:txBody>
@@ -12756,7 +12756,7 @@
                             <a:srgbClr val="1A1A1A"/>
                           </a:solidFill>
                         </a:rPr>
-                        <a:t>58.37</a:t>
+                        <a:t>58.175</a:t>
                       </a:r>
                     </a:p>
                   </a:txBody>
@@ -12776,7 +12776,7 @@
                             <a:srgbClr val="1A1A1A"/>
                           </a:solidFill>
                         </a:rPr>
-                        <a:t>67.1</a:t>
+                        <a:t>66.9</a:t>
                       </a:r>
                     </a:p>
                   </a:txBody>
@@ -12796,7 +12796,7 @@
                             <a:srgbClr val="1A1A1A"/>
                           </a:solidFill>
                         </a:rPr>
-                        <a:t>&lt; 55.5</a:t>
+                        <a:t>&lt; 55.3</a:t>
                       </a:r>
                     </a:p>
                   </a:txBody>
@@ -12902,7 +12902,7 @@
                             <a:srgbClr val="1A1A1A"/>
                           </a:solidFill>
                         </a:rPr>
-                        <a:t>123.455</a:t>
+                        <a:t>122.94</a:t>
                       </a:r>
                     </a:p>
                   </a:txBody>
@@ -12924,7 +12924,7 @@
                             <a:srgbClr val="1A1A1A"/>
                           </a:solidFill>
                         </a:rPr>
-                        <a:t>142.0</a:t>
+                        <a:t>141.4</a:t>
                       </a:r>
                     </a:p>
                   </a:txBody>
@@ -12946,7 +12946,7 @@
                             <a:srgbClr val="1A1A1A"/>
                           </a:solidFill>
                         </a:rPr>
-                        <a:t>&lt; 117.3</a:t>
+                        <a:t>&lt; 116.8</a:t>
                       </a:r>
                     </a:p>
                   </a:txBody>
@@ -13054,7 +13054,7 @@
                             <a:srgbClr val="1A1A1A"/>
                           </a:solidFill>
                         </a:rPr>
-                        <a:t>36.66</a:t>
+                        <a:t>36.575</a:t>
                       </a:r>
                     </a:p>
                   </a:txBody>
@@ -13074,7 +13074,7 @@
                             <a:srgbClr val="1A1A1A"/>
                           </a:solidFill>
                         </a:rPr>
-                        <a:t>42.2</a:t>
+                        <a:t>42.1</a:t>
                       </a:r>
                     </a:p>
                   </a:txBody>
@@ -13094,7 +13094,7 @@
                             <a:srgbClr val="1A1A1A"/>
                           </a:solidFill>
                         </a:rPr>
-                        <a:t>&lt; 34.8</a:t>
+                        <a:t>&lt; 34.7</a:t>
                       </a:r>
                     </a:p>
                   </a:txBody>
@@ -13200,7 +13200,7 @@
                             <a:srgbClr val="1A1A1A"/>
                           </a:solidFill>
                         </a:rPr>
-                        <a:t>983.15</a:t>
+                        <a:t>981.285</a:t>
                       </a:r>
                     </a:p>
                   </a:txBody>
@@ -13222,7 +13222,7 @@
                             <a:srgbClr val="1A1A1A"/>
                           </a:solidFill>
                         </a:rPr>
-                        <a:t>1130.6</a:t>
+                        <a:t>1128.5</a:t>
                       </a:r>
                     </a:p>
                   </a:txBody>
@@ -13244,7 +13244,7 @@
                             <a:srgbClr val="1A1A1A"/>
                           </a:solidFill>
                         </a:rPr>
-                        <a:t>&lt; 934.0</a:t>
+                        <a:t>&lt; 932.2</a:t>
                       </a:r>
                     </a:p>
                   </a:txBody>
@@ -27180,7 +27180,7 @@
                             <a:srgbClr val="1A1A1A"/>
                           </a:solidFill>
                         </a:rPr>
-                        <a:t>22.7x</a:t>
+                        <a:t>22.6x</a:t>
                       </a:r>
                     </a:p>
                   </a:txBody>
@@ -27328,7 +27328,7 @@
                             <a:srgbClr val="1A1A1A"/>
                           </a:solidFill>
                         </a:rPr>
-                        <a:t>25.0x</a:t>
+                        <a:t>24.9x</a:t>
                       </a:r>
                     </a:p>
                   </a:txBody>
@@ -27478,7 +27478,7 @@
                             <a:srgbClr val="1A1A1A"/>
                           </a:solidFill>
                         </a:rPr>
-                        <a:t>21.3x</a:t>
+                        <a:t>21.2x</a:t>
                       </a:r>
                     </a:p>
                   </a:txBody>
@@ -27776,7 +27776,7 @@
                             <a:srgbClr val="1A1A1A"/>
                           </a:solidFill>
                         </a:rPr>
-                        <a:t>30.9x</a:t>
+                        <a:t>30.8x</a:t>
                       </a:r>
                     </a:p>
                   </a:txBody>
@@ -27924,7 +27924,7 @@
                             <a:srgbClr val="1A1A1A"/>
                           </a:solidFill>
                         </a:rPr>
-                        <a:t>45.4x</a:t>
+                        <a:t>45.2x</a:t>
                       </a:r>
                     </a:p>
                   </a:txBody>
@@ -28074,7 +28074,7 @@
                             <a:srgbClr val="1A1A1A"/>
                           </a:solidFill>
                         </a:rPr>
-                        <a:t>9.0x</a:t>
+                        <a:t>8.9x</a:t>
                       </a:r>
                     </a:p>
                   </a:txBody>
@@ -28222,7 +28222,7 @@
                             <a:srgbClr val="1A1A1A"/>
                           </a:solidFill>
                         </a:rPr>
-                        <a:t>51.2x</a:t>
+                        <a:t>51.1x</a:t>
                       </a:r>
                     </a:p>
                   </a:txBody>
@@ -28372,7 +28372,7 @@
                             <a:srgbClr val="1A1A1A"/>
                           </a:solidFill>
                         </a:rPr>
-                        <a:t>25.3x</a:t>
+                        <a:t>25.2x</a:t>
                       </a:r>
                     </a:p>
                   </a:txBody>
@@ -31462,7 +31462,7 @@
                             <a:srgbClr val="1A1A1A"/>
                           </a:solidFill>
                         </a:rPr>
-                        <a:t>164.74</a:t>
+                        <a:t>164.24</a:t>
                       </a:r>
                     </a:p>
                   </a:txBody>
@@ -31674,7 +31674,7 @@
                             <a:srgbClr val="1A1A1A"/>
                           </a:solidFill>
                         </a:rPr>
-                        <a:t>75.915</a:t>
+                        <a:t>75.755</a:t>
                       </a:r>
                     </a:p>
                   </a:txBody>
@@ -31886,7 +31886,7 @@
                             <a:srgbClr val="1A1A1A"/>
                           </a:solidFill>
                         </a:rPr>
-                        <a:t>143.7</a:t>
+                        <a:t>143.42</a:t>
                       </a:r>
                     </a:p>
                   </a:txBody>
@@ -32098,7 +32098,7 @@
                             <a:srgbClr val="1A1A1A"/>
                           </a:solidFill>
                         </a:rPr>
-                        <a:t>153.33</a:t>
+                        <a:t>153.395</a:t>
                       </a:r>
                     </a:p>
                   </a:txBody>
@@ -32310,7 +32310,7 @@
                             <a:srgbClr val="1A1A1A"/>
                           </a:solidFill>
                         </a:rPr>
-                        <a:t>58.37</a:t>
+                        <a:t>58.175</a:t>
                       </a:r>
                     </a:p>
                   </a:txBody>
@@ -32522,7 +32522,7 @@
                             <a:srgbClr val="1A1A1A"/>
                           </a:solidFill>
                         </a:rPr>
-                        <a:t>123.455</a:t>
+                        <a:t>122.94</a:t>
                       </a:r>
                     </a:p>
                   </a:txBody>
@@ -32734,7 +32734,7 @@
                             <a:srgbClr val="1A1A1A"/>
                           </a:solidFill>
                         </a:rPr>
-                        <a:t>36.66</a:t>
+                        <a:t>36.575</a:t>
                       </a:r>
                     </a:p>
                   </a:txBody>
@@ -32946,7 +32946,7 @@
                             <a:srgbClr val="1A1A1A"/>
                           </a:solidFill>
                         </a:rPr>
-                        <a:t>983.15</a:t>
+                        <a:t>981.285</a:t>
                       </a:r>
                     </a:p>
                   </a:txBody>
